--- a/backend-stack-c/1_EA-and-backfill-worker-on-contabo-vps/v2_29_Data_Pipeline_&_Mtf_Visual_Combined_Architecture_Overview.pptx
+++ b/backend-stack-c/1_EA-and-backfill-worker-on-contabo-vps/v2_29_Data_Pipeline_&_Mtf_Visual_Combined_Architecture_Overview.pptx
@@ -16,9 +16,10 @@
     <p:sldId id="264" r:id="rId10"/>
     <p:sldId id="265" r:id="rId11"/>
     <p:sldId id="266" r:id="rId12"/>
+    <p:sldId id="267" r:id="rId13"/>
   </p:sldIdLst>
   <p:notesMasterIdLst>
-    <p:notesMasterId r:id="rId13"/>
+    <p:notesMasterId r:id="rId14"/>
   </p:notesMasterIdLst>
   <p:sldSz cx="12192000" cy="6858000"/>
   <p:notesSz cx="6858000" cy="12192000"/>
@@ -712,6 +713,94 @@
             <a:fld id="{F7021451-1387-4CA6-816F-3879F97B5CBC}" type="slidenum">
               <a:rPr lang="en-US"/>
               <a:t>11</a:t>
+            </a:fld>
+            <a:endParaRPr lang="en-US"/>
+          </a:p>
+        </p:txBody>
+      </p:sp>
+    </p:spTree>
+    <p:extLst>
+      <p:ext uri="{BB962C8B-B14F-4D97-AF65-F5344CB8AC3E}">
+        <p14:creationId xmlns:p14="http://schemas.microsoft.com/office/powerpoint/2010/main" val="1024086991"/>
+      </p:ext>
+    </p:extLst>
+  </p:cSld>
+  <p:clrMapOvr>
+    <a:masterClrMapping/>
+  </p:clrMapOvr>
+</p:notes>
+</file>
+
+<file path=ppt/notesSlides/notesSlide12.xml><?xml version="1.0" encoding="utf-8"?>
+<p:notes xmlns:a="http://schemas.openxmlformats.org/drawingml/2006/main" xmlns:r="http://schemas.openxmlformats.org/officeDocument/2006/relationships" xmlns:p="http://schemas.openxmlformats.org/presentationml/2006/main">
+  <p:cSld>
+    <p:spTree>
+      <p:nvGrpSpPr>
+        <p:cNvPr id="1" name=""/>
+        <p:cNvGrpSpPr/>
+        <p:nvPr/>
+      </p:nvGrpSpPr>
+      <p:grpSpPr>
+        <a:xfrm>
+          <a:off x="0" y="0"/>
+          <a:ext cx="0" cy="0"/>
+          <a:chOff x="0" y="0"/>
+          <a:chExt cx="0" cy="0"/>
+        </a:xfrm>
+      </p:grpSpPr>
+      <p:sp>
+        <p:nvSpPr>
+          <p:cNvPr id="2" name="Slide Image Placeholder 1"/>
+          <p:cNvSpPr>
+            <a:spLocks noGrp="1" noRot="1" noChangeAspect="1"/>
+          </p:cNvSpPr>
+          <p:nvPr>
+            <p:ph type="sldImg"/>
+          </p:nvPr>
+        </p:nvSpPr>
+        <p:spPr/>
+      </p:sp>
+      <p:sp>
+        <p:nvSpPr>
+          <p:cNvPr id="3" name="Notes Placeholder 2"/>
+          <p:cNvSpPr>
+            <a:spLocks noGrp="1"/>
+          </p:cNvSpPr>
+          <p:nvPr>
+            <p:ph type="body" idx="1"/>
+          </p:nvPr>
+        </p:nvSpPr>
+        <p:spPr/>
+        <p:txBody>
+          <a:bodyPr/>
+          <a:lstStyle/>
+          <a:p>
+            <a:r>
+              <a:rPr lang="en-US" dirty="0"/>
+              <a:t/>
+            </a:r>
+            <a:endParaRPr lang="en-US" dirty="0"/>
+          </a:p>
+        </p:txBody>
+      </p:sp>
+      <p:sp>
+        <p:nvSpPr>
+          <p:cNvPr id="4" name="Slide Number Placeholder 3"/>
+          <p:cNvSpPr>
+            <a:spLocks noGrp="1"/>
+          </p:cNvSpPr>
+          <p:nvPr>
+            <p:ph type="sldNum" sz="quarter" idx="10"/>
+          </p:nvPr>
+        </p:nvSpPr>
+        <p:spPr/>
+        <p:txBody>
+          <a:bodyPr/>
+          <a:lstStyle/>
+          <a:p>
+            <a:fld id="{F7021451-1387-4CA6-816F-3879F97B5CBC}" type="slidenum">
+              <a:rPr lang="en-US"/>
+              <a:t>12</a:t>
             </a:fld>
             <a:endParaRPr lang="en-US"/>
           </a:p>
@@ -2365,7 +2454,7 @@
                 <a:ea typeface="Cambria" pitchFamily="34" charset="-122"/>
                 <a:cs typeface="Cambria" pitchFamily="34" charset="-120"/>
               </a:rPr>
-              <a:t>Technology Stack Overview</a:t>
+              <a:t>Visualisation Internals — mtf_render</a:t>
             </a:r>
             <a:endParaRPr lang="en-US" sz="2500" dirty="0"/>
           </a:p>
@@ -2404,7 +2493,7 @@
                 <a:ea typeface="Calibri" pitchFamily="34" charset="-122"/>
                 <a:cs typeface="Calibri" pitchFamily="34" charset="-120"/>
               </a:rPr>
-              <a:t>All libraries and platforms in play, grouped by function</a:t>
+              <a:t>How the same market_data table becomes a three-panel PNG</a:t>
             </a:r>
             <a:endParaRPr lang="en-US" sz="1150" dirty="0"/>
           </a:p>
@@ -2419,11 +2508,11 @@
         <p:spPr>
           <a:xfrm>
             <a:off x="640080" y="1417320"/>
-            <a:ext cx="3520440" cy="2240280"/>
+            <a:ext cx="2450592" cy="1371600"/>
           </a:xfrm>
           <a:prstGeom prst="roundRect">
             <a:avLst>
-              <a:gd name="adj" fmla="val 3265"/>
+              <a:gd name="adj" fmla="val 4667"/>
             </a:avLst>
           </a:prstGeom>
           <a:solidFill>
@@ -2441,23 +2530,42 @@
       </p:sp>
       <p:sp>
         <p:nvSpPr>
-          <p:cNvPr id="5" name="Shape 3"/>
-          <p:cNvSpPr/>
-          <p:nvPr/>
-        </p:nvSpPr>
-        <p:spPr>
-          <a:xfrm>
-            <a:off x="868680" y="1645920"/>
-            <a:ext cx="502920" cy="502920"/>
-          </a:xfrm>
-          <a:prstGeom prst="ellipse">
-            <a:avLst/>
-          </a:prstGeom>
-          <a:solidFill>
-            <a:srgbClr val="1B2340"/>
-          </a:solidFill>
-          <a:ln/>
-        </p:spPr>
+          <p:cNvPr id="5" name="Text 3"/>
+          <p:cNvSpPr/>
+          <p:nvPr/>
+        </p:nvSpPr>
+        <p:spPr>
+          <a:xfrm>
+            <a:off x="804672" y="1527048"/>
+            <a:ext cx="2121408" cy="365760"/>
+          </a:xfrm>
+          <a:prstGeom prst="rect">
+            <a:avLst/>
+          </a:prstGeom>
+          <a:noFill/>
+          <a:ln/>
+        </p:spPr>
+        <p:txBody>
+          <a:bodyPr wrap="square" lIns="0" tIns="0" rIns="0" bIns="0" rtlCol="0" anchor="ctr"/>
+          <a:lstStyle/>
+          <a:p>
+            <a:pPr indent="0" marL="0">
+              <a:buNone/>
+            </a:pPr>
+            <a:r>
+              <a:rPr lang="en-US" sz="1150" b="1" dirty="0">
+                <a:solidFill>
+                  <a:srgbClr val="1B2340"/>
+                </a:solidFill>
+                <a:latin typeface="Calibri" pitchFamily="34" charset="0"/>
+                <a:ea typeface="Calibri" pitchFamily="34" charset="-122"/>
+                <a:cs typeface="Calibri" pitchFamily="34" charset="-120"/>
+              </a:rPr>
+              <a:t>data_source.py</a:t>
+            </a:r>
+            <a:endParaRPr lang="en-US" sz="1150" dirty="0"/>
+          </a:p>
+        </p:txBody>
       </p:sp>
       <p:sp>
         <p:nvSpPr>
@@ -2467,86 +2575,8 @@
         </p:nvSpPr>
         <p:spPr>
           <a:xfrm>
-            <a:off x="868680" y="1645920"/>
-            <a:ext cx="502920" cy="502920"/>
-          </a:xfrm>
-          <a:prstGeom prst="rect">
-            <a:avLst/>
-          </a:prstGeom>
-          <a:noFill/>
-          <a:ln/>
-        </p:spPr>
-        <p:txBody>
-          <a:bodyPr wrap="square" lIns="0" tIns="0" rIns="0" bIns="0" rtlCol="0" anchor="ctr"/>
-          <a:lstStyle/>
-          <a:p>
-            <a:pPr algn="ctr" indent="0" marL="0">
-              <a:buNone/>
-            </a:pPr>
-            <a:r>
-              <a:rPr lang="en-US" sz="1400" b="1" dirty="0">
-                <a:solidFill>
-                  <a:srgbClr val="E4C860"/>
-                </a:solidFill>
-                <a:latin typeface="Cambria" pitchFamily="34" charset="0"/>
-                <a:ea typeface="Cambria" pitchFamily="34" charset="-122"/>
-                <a:cs typeface="Cambria" pitchFamily="34" charset="-120"/>
-              </a:rPr>
-              <a:t>01</a:t>
-            </a:r>
-            <a:endParaRPr lang="en-US" sz="1400" dirty="0"/>
-          </a:p>
-        </p:txBody>
-      </p:sp>
-      <p:sp>
-        <p:nvSpPr>
-          <p:cNvPr id="7" name="Text 5"/>
-          <p:cNvSpPr/>
-          <p:nvPr/>
-        </p:nvSpPr>
-        <p:spPr>
-          <a:xfrm>
-            <a:off x="1508760" y="1691640"/>
-            <a:ext cx="2468880" cy="411480"/>
-          </a:xfrm>
-          <a:prstGeom prst="rect">
-            <a:avLst/>
-          </a:prstGeom>
-          <a:noFill/>
-          <a:ln/>
-        </p:spPr>
-        <p:txBody>
-          <a:bodyPr wrap="square" lIns="0" tIns="0" rIns="0" bIns="0" rtlCol="0" anchor="ctr"/>
-          <a:lstStyle/>
-          <a:p>
-            <a:pPr indent="0" marL="0">
-              <a:buNone/>
-            </a:pPr>
-            <a:r>
-              <a:rPr lang="en-US" sz="1350" b="1" dirty="0">
-                <a:solidFill>
-                  <a:srgbClr val="1B2340"/>
-                </a:solidFill>
-                <a:latin typeface="Calibri" pitchFamily="34" charset="0"/>
-                <a:ea typeface="Calibri" pitchFamily="34" charset="-122"/>
-                <a:cs typeface="Calibri" pitchFamily="34" charset="-120"/>
-              </a:rPr>
-              <a:t>Data Production</a:t>
-            </a:r>
-            <a:endParaRPr lang="en-US" sz="1350" dirty="0"/>
-          </a:p>
-        </p:txBody>
-      </p:sp>
-      <p:sp>
-        <p:nvSpPr>
-          <p:cNvPr id="8" name="Text 6"/>
-          <p:cNvSpPr/>
-          <p:nvPr/>
-        </p:nvSpPr>
-        <p:spPr>
-          <a:xfrm>
-            <a:off x="868680" y="2331720"/>
-            <a:ext cx="3063240" cy="1143000"/>
+            <a:off x="804672" y="1874520"/>
+            <a:ext cx="2121408" cy="777240"/>
           </a:xfrm>
           <a:prstGeom prst="rect">
             <a:avLst/>
@@ -2560,12 +2590,12 @@
           <a:p>
             <a:pPr indent="0" marL="0">
               <a:lnSpc>
-                <a:spcPct val="122000"/>
+                <a:spcPct val="118000"/>
               </a:lnSpc>
               <a:buNone/>
             </a:pPr>
             <a:r>
-              <a:rPr lang="en-US" sz="980" dirty="0">
+              <a:rPr lang="en-US" sz="930" dirty="0">
                 <a:solidFill>
                   <a:srgbClr val="6B7390"/>
                 </a:solidFill>
@@ -2573,30 +2603,54 @@
                 <a:ea typeface="Calibri" pitchFamily="34" charset="-122"/>
                 <a:cs typeface="Calibri" pitchFamily="34" charset="-120"/>
               </a:rPr>
-              <a:t>MQL5 (MetaTrader 5 indicator language); Windows VPS (Contabo) runtime</a:t>
-            </a:r>
-            <a:endParaRPr lang="en-US" sz="980" dirty="0"/>
-          </a:p>
-        </p:txBody>
-      </p:sp>
-      <p:sp>
-        <p:nvSpPr>
-          <p:cNvPr id="9" name="Shape 7"/>
-          <p:cNvSpPr/>
-          <p:nvPr/>
-        </p:nvSpPr>
-        <p:spPr>
-          <a:xfrm>
-            <a:off x="4389120" y="1417320"/>
-            <a:ext cx="3520440" cy="2240280"/>
+              <a:t>Two independent SQL queries (M5 rows, M15 rows), each filtered on symbol + timeframe. Renames {variant}_uoedt/base_fl/loedt to canonical names.</a:t>
+            </a:r>
+            <a:endParaRPr lang="en-US" sz="930" dirty="0"/>
+          </a:p>
+        </p:txBody>
+      </p:sp>
+      <p:sp>
+        <p:nvSpPr>
+          <p:cNvPr id="7" name="Shape 5"/>
+          <p:cNvSpPr/>
+          <p:nvPr/>
+        </p:nvSpPr>
+        <p:spPr>
+          <a:xfrm>
+            <a:off x="3090672" y="2103120"/>
+            <a:ext cx="228600" cy="0"/>
+          </a:xfrm>
+          <a:prstGeom prst="line">
+            <a:avLst/>
+          </a:prstGeom>
+          <a:noFill/>
+          <a:ln w="22225">
+            <a:solidFill>
+              <a:srgbClr val="1B2340"/>
+            </a:solidFill>
+            <a:prstDash val="solid"/>
+            <a:tailEnd type="triangle"/>
+          </a:ln>
+        </p:spPr>
+      </p:sp>
+      <p:sp>
+        <p:nvSpPr>
+          <p:cNvPr id="8" name="Shape 6"/>
+          <p:cNvSpPr/>
+          <p:nvPr/>
+        </p:nvSpPr>
+        <p:spPr>
+          <a:xfrm>
+            <a:off x="3319272" y="1417320"/>
+            <a:ext cx="2450592" cy="1371600"/>
           </a:xfrm>
           <a:prstGeom prst="roundRect">
             <a:avLst>
-              <a:gd name="adj" fmla="val 3265"/>
+              <a:gd name="adj" fmla="val 4667"/>
             </a:avLst>
           </a:prstGeom>
           <a:solidFill>
-            <a:srgbClr val="FFFFFF"/>
+            <a:srgbClr val="C9A227"/>
           </a:solidFill>
           <a:ln/>
           <a:effectLst>
@@ -2610,112 +2664,53 @@
       </p:sp>
       <p:sp>
         <p:nvSpPr>
-          <p:cNvPr id="10" name="Shape 8"/>
-          <p:cNvSpPr/>
-          <p:nvPr/>
-        </p:nvSpPr>
-        <p:spPr>
-          <a:xfrm>
-            <a:off x="4617720" y="1645920"/>
-            <a:ext cx="502920" cy="502920"/>
-          </a:xfrm>
-          <a:prstGeom prst="ellipse">
-            <a:avLst/>
-          </a:prstGeom>
-          <a:solidFill>
-            <a:srgbClr val="1B2340"/>
-          </a:solidFill>
-          <a:ln/>
-        </p:spPr>
-      </p:sp>
-      <p:sp>
-        <p:nvSpPr>
-          <p:cNvPr id="11" name="Text 9"/>
-          <p:cNvSpPr/>
-          <p:nvPr/>
-        </p:nvSpPr>
-        <p:spPr>
-          <a:xfrm>
-            <a:off x="4617720" y="1645920"/>
-            <a:ext cx="502920" cy="502920"/>
-          </a:xfrm>
-          <a:prstGeom prst="rect">
-            <a:avLst/>
-          </a:prstGeom>
-          <a:noFill/>
-          <a:ln/>
-        </p:spPr>
-        <p:txBody>
-          <a:bodyPr wrap="square" lIns="0" tIns="0" rIns="0" bIns="0" rtlCol="0" anchor="ctr"/>
-          <a:lstStyle/>
-          <a:p>
-            <a:pPr algn="ctr" indent="0" marL="0">
-              <a:buNone/>
-            </a:pPr>
-            <a:r>
-              <a:rPr lang="en-US" sz="1400" b="1" dirty="0">
-                <a:solidFill>
-                  <a:srgbClr val="E4C860"/>
-                </a:solidFill>
-                <a:latin typeface="Cambria" pitchFamily="34" charset="0"/>
-                <a:ea typeface="Cambria" pitchFamily="34" charset="-122"/>
-                <a:cs typeface="Cambria" pitchFamily="34" charset="-120"/>
-              </a:rPr>
-              <a:t>02</a:t>
-            </a:r>
-            <a:endParaRPr lang="en-US" sz="1400" dirty="0"/>
-          </a:p>
-        </p:txBody>
-      </p:sp>
-      <p:sp>
-        <p:nvSpPr>
-          <p:cNvPr id="12" name="Text 10"/>
-          <p:cNvSpPr/>
-          <p:nvPr/>
-        </p:nvSpPr>
-        <p:spPr>
-          <a:xfrm>
-            <a:off x="5257800" y="1691640"/>
-            <a:ext cx="2468880" cy="411480"/>
-          </a:xfrm>
-          <a:prstGeom prst="rect">
-            <a:avLst/>
-          </a:prstGeom>
-          <a:noFill/>
-          <a:ln/>
-        </p:spPr>
-        <p:txBody>
-          <a:bodyPr wrap="square" lIns="0" tIns="0" rIns="0" bIns="0" rtlCol="0" anchor="ctr"/>
-          <a:lstStyle/>
-          <a:p>
-            <a:pPr indent="0" marL="0">
-              <a:buNone/>
-            </a:pPr>
-            <a:r>
-              <a:rPr lang="en-US" sz="1350" b="1" dirty="0">
-                <a:solidFill>
-                  <a:srgbClr val="1B2340"/>
-                </a:solidFill>
-                <a:latin typeface="Calibri" pitchFamily="34" charset="0"/>
-                <a:ea typeface="Calibri" pitchFamily="34" charset="-122"/>
-                <a:cs typeface="Calibri" pitchFamily="34" charset="-120"/>
-              </a:rPr>
-              <a:t>Backend Processing</a:t>
-            </a:r>
-            <a:endParaRPr lang="en-US" sz="1350" dirty="0"/>
-          </a:p>
-        </p:txBody>
-      </p:sp>
-      <p:sp>
-        <p:nvSpPr>
-          <p:cNvPr id="13" name="Text 11"/>
-          <p:cNvSpPr/>
-          <p:nvPr/>
-        </p:nvSpPr>
-        <p:spPr>
-          <a:xfrm>
-            <a:off x="4617720" y="2331720"/>
-            <a:ext cx="3063240" cy="1143000"/>
+          <p:cNvPr id="9" name="Text 7"/>
+          <p:cNvSpPr/>
+          <p:nvPr/>
+        </p:nvSpPr>
+        <p:spPr>
+          <a:xfrm>
+            <a:off x="3483864" y="1527048"/>
+            <a:ext cx="2121408" cy="365760"/>
+          </a:xfrm>
+          <a:prstGeom prst="rect">
+            <a:avLst/>
+          </a:prstGeom>
+          <a:noFill/>
+          <a:ln/>
+        </p:spPr>
+        <p:txBody>
+          <a:bodyPr wrap="square" lIns="0" tIns="0" rIns="0" bIns="0" rtlCol="0" anchor="ctr"/>
+          <a:lstStyle/>
+          <a:p>
+            <a:pPr indent="0" marL="0">
+              <a:buNone/>
+            </a:pPr>
+            <a:r>
+              <a:rPr lang="en-US" sz="1150" b="1" dirty="0">
+                <a:solidFill>
+                  <a:srgbClr val="141A32"/>
+                </a:solidFill>
+                <a:latin typeface="Calibri" pitchFamily="34" charset="0"/>
+                <a:ea typeface="Calibri" pitchFamily="34" charset="-122"/>
+                <a:cs typeface="Calibri" pitchFamily="34" charset="-120"/>
+              </a:rPr>
+              <a:t>Channel object</a:t>
+            </a:r>
+            <a:endParaRPr lang="en-US" sz="1150" dirty="0"/>
+          </a:p>
+        </p:txBody>
+      </p:sp>
+      <p:sp>
+        <p:nvSpPr>
+          <p:cNvPr id="10" name="Text 8"/>
+          <p:cNvSpPr/>
+          <p:nvPr/>
+        </p:nvSpPr>
+        <p:spPr>
+          <a:xfrm>
+            <a:off x="3483864" y="1874520"/>
+            <a:ext cx="2121408" cy="777240"/>
           </a:xfrm>
           <a:prstGeom prst="rect">
             <a:avLst/>
@@ -2729,39 +2724,63 @@
           <a:p>
             <a:pPr indent="0" marL="0">
               <a:lnSpc>
-                <a:spcPct val="122000"/>
+                <a:spcPct val="118000"/>
               </a:lnSpc>
               <a:buNone/>
             </a:pPr>
             <a:r>
-              <a:rPr lang="en-US" sz="980" dirty="0">
-                <a:solidFill>
-                  <a:srgbClr val="6B7390"/>
-                </a:solidFill>
-                <a:latin typeface="Calibri" pitchFamily="34" charset="0"/>
-                <a:ea typeface="Calibri" pitchFamily="34" charset="-122"/>
-                <a:cs typeface="Calibri" pitchFamily="34" charset="-120"/>
-              </a:rPr>
-              <a:t>Python 3, argparse CLIs; hand-ported calc logic (DBSCAN, K-means, WLS) — no sklearn substitution</a:t>
-            </a:r>
-            <a:endParaRPr lang="en-US" sz="980" dirty="0"/>
-          </a:p>
-        </p:txBody>
-      </p:sp>
-      <p:sp>
-        <p:nvSpPr>
-          <p:cNvPr id="14" name="Shape 12"/>
-          <p:cNvSpPr/>
-          <p:nvPr/>
-        </p:nvSpPr>
-        <p:spPr>
-          <a:xfrm>
-            <a:off x="8138160" y="1417320"/>
-            <a:ext cx="3520440" cy="2240280"/>
+              <a:rPr lang="en-US" sz="930" dirty="0">
+                <a:solidFill>
+                  <a:srgbClr val="141A32"/>
+                </a:solidFill>
+                <a:latin typeface="Calibri" pitchFamily="34" charset="0"/>
+                <a:ea typeface="Calibri" pitchFamily="34" charset="-122"/>
+                <a:cs typeface="Calibri" pitchFamily="34" charset="-120"/>
+              </a:rPr>
+              <a:t>build_panels() builds ONE Channel from the M5 frame, then assigns that SAME object — by reference, not a copy — to panels A, B, and C.</a:t>
+            </a:r>
+            <a:endParaRPr lang="en-US" sz="930" dirty="0"/>
+          </a:p>
+        </p:txBody>
+      </p:sp>
+      <p:sp>
+        <p:nvSpPr>
+          <p:cNvPr id="11" name="Shape 9"/>
+          <p:cNvSpPr/>
+          <p:nvPr/>
+        </p:nvSpPr>
+        <p:spPr>
+          <a:xfrm>
+            <a:off x="5769864" y="2103120"/>
+            <a:ext cx="228600" cy="0"/>
+          </a:xfrm>
+          <a:prstGeom prst="line">
+            <a:avLst/>
+          </a:prstGeom>
+          <a:noFill/>
+          <a:ln w="22225">
+            <a:solidFill>
+              <a:srgbClr val="1B2340"/>
+            </a:solidFill>
+            <a:prstDash val="solid"/>
+            <a:tailEnd type="triangle"/>
+          </a:ln>
+        </p:spPr>
+      </p:sp>
+      <p:sp>
+        <p:nvSpPr>
+          <p:cNvPr id="12" name="Shape 10"/>
+          <p:cNvSpPr/>
+          <p:nvPr/>
+        </p:nvSpPr>
+        <p:spPr>
+          <a:xfrm>
+            <a:off x="5998464" y="1417320"/>
+            <a:ext cx="2450592" cy="1371600"/>
           </a:xfrm>
           <a:prstGeom prst="roundRect">
             <a:avLst>
-              <a:gd name="adj" fmla="val 3265"/>
+              <a:gd name="adj" fmla="val 4667"/>
             </a:avLst>
           </a:prstGeom>
           <a:solidFill>
@@ -2779,162 +2798,127 @@
       </p:sp>
       <p:sp>
         <p:nvSpPr>
+          <p:cNvPr id="13" name="Text 11"/>
+          <p:cNvSpPr/>
+          <p:nvPr/>
+        </p:nvSpPr>
+        <p:spPr>
+          <a:xfrm>
+            <a:off x="6163056" y="1527048"/>
+            <a:ext cx="2121408" cy="365760"/>
+          </a:xfrm>
+          <a:prstGeom prst="rect">
+            <a:avLst/>
+          </a:prstGeom>
+          <a:noFill/>
+          <a:ln/>
+        </p:spPr>
+        <p:txBody>
+          <a:bodyPr wrap="square" lIns="0" tIns="0" rIns="0" bIns="0" rtlCol="0" anchor="ctr"/>
+          <a:lstStyle/>
+          <a:p>
+            <a:pPr indent="0" marL="0">
+              <a:buNone/>
+            </a:pPr>
+            <a:r>
+              <a:rPr lang="en-US" sz="1150" b="1" dirty="0">
+                <a:solidFill>
+                  <a:srgbClr val="1B2340"/>
+                </a:solidFill>
+                <a:latin typeface="Calibri" pitchFamily="34" charset="0"/>
+                <a:ea typeface="Calibri" pitchFamily="34" charset="-122"/>
+                <a:cs typeface="Calibri" pitchFamily="34" charset="-120"/>
+              </a:rPr>
+              <a:t>renderer.py</a:t>
+            </a:r>
+            <a:endParaRPr lang="en-US" sz="1150" dirty="0"/>
+          </a:p>
+        </p:txBody>
+      </p:sp>
+      <p:sp>
+        <p:nvSpPr>
+          <p:cNvPr id="14" name="Text 12"/>
+          <p:cNvSpPr/>
+          <p:nvPr/>
+        </p:nvSpPr>
+        <p:spPr>
+          <a:xfrm>
+            <a:off x="6163056" y="1874520"/>
+            <a:ext cx="2121408" cy="777240"/>
+          </a:xfrm>
+          <a:prstGeom prst="rect">
+            <a:avLst/>
+          </a:prstGeom>
+          <a:noFill/>
+          <a:ln/>
+        </p:spPr>
+        <p:txBody>
+          <a:bodyPr wrap="square" lIns="0" tIns="0" rIns="0" bIns="0" rtlCol="0" anchor="t"/>
+          <a:lstStyle/>
+          <a:p>
+            <a:pPr indent="0" marL="0">
+              <a:lnSpc>
+                <a:spcPct val="118000"/>
+              </a:lnSpc>
+              <a:buNone/>
+            </a:pPr>
+            <a:r>
+              <a:rPr lang="en-US" sz="930" dirty="0">
+                <a:solidFill>
+                  <a:srgbClr val="6B7390"/>
+                </a:solidFill>
+                <a:latin typeface="Calibri" pitchFamily="34" charset="0"/>
+                <a:ea typeface="Calibri" pitchFamily="34" charset="-122"/>
+                <a:cs typeface="Calibri" pitchFamily="34" charset="-120"/>
+              </a:rPr>
+              <a:t>Hand-draws candles + channel against a REAL unix-time matplotlib axis — deliberately not mplfinance's categorical index, so M5 lines land at the correct time on M15 bars.</a:t>
+            </a:r>
+            <a:endParaRPr lang="en-US" sz="930" dirty="0"/>
+          </a:p>
+        </p:txBody>
+      </p:sp>
+      <p:sp>
+        <p:nvSpPr>
           <p:cNvPr id="15" name="Shape 13"/>
           <p:cNvSpPr/>
           <p:nvPr/>
         </p:nvSpPr>
         <p:spPr>
           <a:xfrm>
-            <a:off x="8366760" y="1645920"/>
-            <a:ext cx="502920" cy="502920"/>
-          </a:xfrm>
-          <a:prstGeom prst="ellipse">
-            <a:avLst/>
-          </a:prstGeom>
-          <a:solidFill>
-            <a:srgbClr val="1B2340"/>
-          </a:solidFill>
-          <a:ln/>
-        </p:spPr>
-      </p:sp>
-      <p:sp>
-        <p:nvSpPr>
-          <p:cNvPr id="16" name="Text 14"/>
-          <p:cNvSpPr/>
-          <p:nvPr/>
-        </p:nvSpPr>
-        <p:spPr>
-          <a:xfrm>
-            <a:off x="8366760" y="1645920"/>
-            <a:ext cx="502920" cy="502920"/>
-          </a:xfrm>
-          <a:prstGeom prst="rect">
-            <a:avLst/>
-          </a:prstGeom>
-          <a:noFill/>
-          <a:ln/>
-        </p:spPr>
-        <p:txBody>
-          <a:bodyPr wrap="square" lIns="0" tIns="0" rIns="0" bIns="0" rtlCol="0" anchor="ctr"/>
-          <a:lstStyle/>
-          <a:p>
-            <a:pPr algn="ctr" indent="0" marL="0">
-              <a:buNone/>
-            </a:pPr>
-            <a:r>
-              <a:rPr lang="en-US" sz="1400" b="1" dirty="0">
-                <a:solidFill>
-                  <a:srgbClr val="E4C860"/>
-                </a:solidFill>
-                <a:latin typeface="Cambria" pitchFamily="34" charset="0"/>
-                <a:ea typeface="Cambria" pitchFamily="34" charset="-122"/>
-                <a:cs typeface="Cambria" pitchFamily="34" charset="-120"/>
-              </a:rPr>
-              <a:t>03</a:t>
-            </a:r>
-            <a:endParaRPr lang="en-US" sz="1400" dirty="0"/>
-          </a:p>
-        </p:txBody>
-      </p:sp>
-      <p:sp>
-        <p:nvSpPr>
-          <p:cNvPr id="17" name="Text 15"/>
-          <p:cNvSpPr/>
-          <p:nvPr/>
-        </p:nvSpPr>
-        <p:spPr>
-          <a:xfrm>
-            <a:off x="9006840" y="1691640"/>
-            <a:ext cx="2468880" cy="411480"/>
-          </a:xfrm>
-          <a:prstGeom prst="rect">
-            <a:avLst/>
-          </a:prstGeom>
-          <a:noFill/>
-          <a:ln/>
-        </p:spPr>
-        <p:txBody>
-          <a:bodyPr wrap="square" lIns="0" tIns="0" rIns="0" bIns="0" rtlCol="0" anchor="ctr"/>
-          <a:lstStyle/>
-          <a:p>
-            <a:pPr indent="0" marL="0">
-              <a:buNone/>
-            </a:pPr>
-            <a:r>
-              <a:rPr lang="en-US" sz="1350" b="1" dirty="0">
-                <a:solidFill>
-                  <a:srgbClr val="1B2340"/>
-                </a:solidFill>
-                <a:latin typeface="Calibri" pitchFamily="34" charset="0"/>
-                <a:ea typeface="Calibri" pitchFamily="34" charset="-122"/>
-                <a:cs typeface="Calibri" pitchFamily="34" charset="-120"/>
-              </a:rPr>
-              <a:t>Storage</a:t>
-            </a:r>
-            <a:endParaRPr lang="en-US" sz="1350" dirty="0"/>
-          </a:p>
-        </p:txBody>
-      </p:sp>
-      <p:sp>
-        <p:nvSpPr>
-          <p:cNvPr id="18" name="Text 16"/>
-          <p:cNvSpPr/>
-          <p:nvPr/>
-        </p:nvSpPr>
-        <p:spPr>
-          <a:xfrm>
-            <a:off x="8366760" y="2331720"/>
-            <a:ext cx="3063240" cy="1143000"/>
-          </a:xfrm>
-          <a:prstGeom prst="rect">
-            <a:avLst/>
-          </a:prstGeom>
-          <a:noFill/>
-          <a:ln/>
-        </p:spPr>
-        <p:txBody>
-          <a:bodyPr wrap="square" lIns="0" tIns="0" rIns="0" bIns="0" rtlCol="0" anchor="t"/>
-          <a:lstStyle/>
-          <a:p>
-            <a:pPr indent="0" marL="0">
-              <a:lnSpc>
-                <a:spcPct val="122000"/>
-              </a:lnSpc>
-              <a:buNone/>
-            </a:pPr>
-            <a:r>
-              <a:rPr lang="en-US" sz="980" dirty="0">
-                <a:solidFill>
-                  <a:srgbClr val="6B7390"/>
-                </a:solidFill>
-                <a:latin typeface="Calibri" pitchFamily="34" charset="0"/>
-                <a:ea typeface="Calibri" pitchFamily="34" charset="-122"/>
-                <a:cs typeface="Calibri" pitchFamily="34" charset="-120"/>
-              </a:rPr>
-              <a:t>sqlite3 (stdlib) — WAL mode, staging tables + market_data outbox, schema-versioned SQL</a:t>
-            </a:r>
-            <a:endParaRPr lang="en-US" sz="980" dirty="0"/>
-          </a:p>
-        </p:txBody>
-      </p:sp>
-      <p:sp>
-        <p:nvSpPr>
-          <p:cNvPr id="19" name="Shape 17"/>
-          <p:cNvSpPr/>
-          <p:nvPr/>
-        </p:nvSpPr>
-        <p:spPr>
-          <a:xfrm>
-            <a:off x="640080" y="3913632"/>
-            <a:ext cx="3520440" cy="2240280"/>
+            <a:off x="8449056" y="2103120"/>
+            <a:ext cx="228600" cy="0"/>
+          </a:xfrm>
+          <a:prstGeom prst="line">
+            <a:avLst/>
+          </a:prstGeom>
+          <a:noFill/>
+          <a:ln w="22225">
+            <a:solidFill>
+              <a:srgbClr val="1B2340"/>
+            </a:solidFill>
+            <a:prstDash val="solid"/>
+            <a:tailEnd type="triangle"/>
+          </a:ln>
+        </p:spPr>
+      </p:sp>
+      <p:sp>
+        <p:nvSpPr>
+          <p:cNvPr id="16" name="Shape 14"/>
+          <p:cNvSpPr/>
+          <p:nvPr/>
+        </p:nvSpPr>
+        <p:spPr>
+          <a:xfrm>
+            <a:off x="8677656" y="1417320"/>
+            <a:ext cx="2450592" cy="1371600"/>
           </a:xfrm>
           <a:prstGeom prst="roundRect">
             <a:avLst>
-              <a:gd name="adj" fmla="val 3265"/>
+              <a:gd name="adj" fmla="val 4667"/>
             </a:avLst>
           </a:prstGeom>
           <a:solidFill>
-            <a:srgbClr val="FFFFFF"/>
+            <a:srgbClr val="141A32"/>
           </a:solidFill>
           <a:ln/>
           <a:effectLst>
@@ -2948,17 +2932,100 @@
       </p:sp>
       <p:sp>
         <p:nvSpPr>
-          <p:cNvPr id="20" name="Shape 18"/>
-          <p:cNvSpPr/>
-          <p:nvPr/>
-        </p:nvSpPr>
-        <p:spPr>
-          <a:xfrm>
-            <a:off x="868680" y="4142232"/>
-            <a:ext cx="502920" cy="502920"/>
-          </a:xfrm>
-          <a:prstGeom prst="ellipse">
-            <a:avLst/>
+          <p:cNvPr id="17" name="Text 15"/>
+          <p:cNvSpPr/>
+          <p:nvPr/>
+        </p:nvSpPr>
+        <p:spPr>
+          <a:xfrm>
+            <a:off x="8842248" y="1527048"/>
+            <a:ext cx="2121408" cy="365760"/>
+          </a:xfrm>
+          <a:prstGeom prst="rect">
+            <a:avLst/>
+          </a:prstGeom>
+          <a:noFill/>
+          <a:ln/>
+        </p:spPr>
+        <p:txBody>
+          <a:bodyPr wrap="square" lIns="0" tIns="0" rIns="0" bIns="0" rtlCol="0" anchor="ctr"/>
+          <a:lstStyle/>
+          <a:p>
+            <a:pPr indent="0" marL="0">
+              <a:buNone/>
+            </a:pPr>
+            <a:r>
+              <a:rPr lang="en-US" sz="1150" b="1" dirty="0">
+                <a:solidFill>
+                  <a:srgbClr val="FFFFFF"/>
+                </a:solidFill>
+                <a:latin typeface="Calibri" pitchFamily="34" charset="0"/>
+                <a:ea typeface="Calibri" pitchFamily="34" charset="-122"/>
+                <a:cs typeface="Calibri" pitchFamily="34" charset="-120"/>
+              </a:rPr>
+              <a:t>3-Panel PNG</a:t>
+            </a:r>
+            <a:endParaRPr lang="en-US" sz="1150" dirty="0"/>
+          </a:p>
+        </p:txBody>
+      </p:sp>
+      <p:sp>
+        <p:nvSpPr>
+          <p:cNvPr id="18" name="Text 16"/>
+          <p:cNvSpPr/>
+          <p:nvPr/>
+        </p:nvSpPr>
+        <p:spPr>
+          <a:xfrm>
+            <a:off x="8842248" y="1874520"/>
+            <a:ext cx="2121408" cy="777240"/>
+          </a:xfrm>
+          <a:prstGeom prst="rect">
+            <a:avLst/>
+          </a:prstGeom>
+          <a:noFill/>
+          <a:ln/>
+        </p:spPr>
+        <p:txBody>
+          <a:bodyPr wrap="square" lIns="0" tIns="0" rIns="0" bIns="0" rtlCol="0" anchor="t"/>
+          <a:lstStyle/>
+          <a:p>
+            <a:pPr indent="0" marL="0">
+              <a:lnSpc>
+                <a:spcPct val="118000"/>
+              </a:lnSpc>
+              <a:buNone/>
+            </a:pPr>
+            <a:r>
+              <a:rPr lang="en-US" sz="930" dirty="0">
+                <a:solidFill>
+                  <a:srgbClr val="AEB9D6"/>
+                </a:solidFill>
+                <a:latin typeface="Calibri" pitchFamily="34" charset="0"/>
+                <a:ea typeface="Calibri" pitchFamily="34" charset="-122"/>
+                <a:cs typeface="Calibri" pitchFamily="34" charset="-120"/>
+              </a:rPr>
+              <a:t>One combined figure, Agg backend (headless), 120 dpi. Chart A = M5 + its channel; B/C = M15 with the M5 channel overlaid.</a:t>
+            </a:r>
+            <a:endParaRPr lang="en-US" sz="930" dirty="0"/>
+          </a:p>
+        </p:txBody>
+      </p:sp>
+      <p:sp>
+        <p:nvSpPr>
+          <p:cNvPr id="19" name="Shape 17"/>
+          <p:cNvSpPr/>
+          <p:nvPr/>
+        </p:nvSpPr>
+        <p:spPr>
+          <a:xfrm>
+            <a:off x="640080" y="3154680"/>
+            <a:ext cx="5257800" cy="2331720"/>
+          </a:xfrm>
+          <a:prstGeom prst="roundRect">
+            <a:avLst>
+              <a:gd name="adj" fmla="val 3137"/>
+            </a:avLst>
           </a:prstGeom>
           <a:solidFill>
             <a:srgbClr val="1B2340"/>
@@ -2968,138 +3035,99 @@
       </p:sp>
       <p:sp>
         <p:nvSpPr>
+          <p:cNvPr id="20" name="Text 18"/>
+          <p:cNvSpPr/>
+          <p:nvPr/>
+        </p:nvSpPr>
+        <p:spPr>
+          <a:xfrm>
+            <a:off x="914400" y="3355848"/>
+            <a:ext cx="4709160" cy="274320"/>
+          </a:xfrm>
+          <a:prstGeom prst="rect">
+            <a:avLst/>
+          </a:prstGeom>
+          <a:noFill/>
+          <a:ln/>
+        </p:spPr>
+        <p:txBody>
+          <a:bodyPr wrap="square" lIns="0" tIns="0" rIns="0" bIns="0" rtlCol="0" anchor="ctr"/>
+          <a:lstStyle/>
+          <a:p>
+            <a:pPr indent="0" marL="0">
+              <a:buNone/>
+            </a:pPr>
+            <a:r>
+              <a:rPr lang="en-US" sz="1100" b="1" dirty="0">
+                <a:solidFill>
+                  <a:srgbClr val="C9A227"/>
+                </a:solidFill>
+                <a:latin typeface="Calibri" pitchFamily="34" charset="0"/>
+                <a:ea typeface="Calibri" pitchFamily="34" charset="-122"/>
+                <a:cs typeface="Calibri" pitchFamily="34" charset="-120"/>
+              </a:rPr>
+              <a:t>DEV / DEMO PATH — fixture.py</a:t>
+            </a:r>
+            <a:endParaRPr lang="en-US" sz="1100" dirty="0"/>
+          </a:p>
+        </p:txBody>
+      </p:sp>
+      <p:sp>
+        <p:nvSpPr>
           <p:cNvPr id="21" name="Text 19"/>
           <p:cNvSpPr/>
           <p:nvPr/>
         </p:nvSpPr>
         <p:spPr>
           <a:xfrm>
-            <a:off x="868680" y="4142232"/>
-            <a:ext cx="502920" cy="502920"/>
-          </a:xfrm>
-          <a:prstGeom prst="rect">
-            <a:avLst/>
-          </a:prstGeom>
-          <a:noFill/>
-          <a:ln/>
-        </p:spPr>
-        <p:txBody>
-          <a:bodyPr wrap="square" lIns="0" tIns="0" rIns="0" bIns="0" rtlCol="0" anchor="ctr"/>
-          <a:lstStyle/>
-          <a:p>
-            <a:pPr algn="ctr" indent="0" marL="0">
-              <a:buNone/>
-            </a:pPr>
-            <a:r>
-              <a:rPr lang="en-US" sz="1400" b="1" dirty="0">
-                <a:solidFill>
-                  <a:srgbClr val="E4C860"/>
-                </a:solidFill>
-                <a:latin typeface="Cambria" pitchFamily="34" charset="0"/>
-                <a:ea typeface="Cambria" pitchFamily="34" charset="-122"/>
-                <a:cs typeface="Cambria" pitchFamily="34" charset="-120"/>
-              </a:rPr>
-              <a:t>04</a:t>
-            </a:r>
-            <a:endParaRPr lang="en-US" sz="1400" dirty="0"/>
-          </a:p>
-        </p:txBody>
-      </p:sp>
-      <p:sp>
-        <p:nvSpPr>
-          <p:cNvPr id="22" name="Text 20"/>
-          <p:cNvSpPr/>
-          <p:nvPr/>
-        </p:nvSpPr>
-        <p:spPr>
-          <a:xfrm>
-            <a:off x="1508760" y="4187952"/>
-            <a:ext cx="2468880" cy="411480"/>
-          </a:xfrm>
-          <a:prstGeom prst="rect">
-            <a:avLst/>
-          </a:prstGeom>
-          <a:noFill/>
-          <a:ln/>
-        </p:spPr>
-        <p:txBody>
-          <a:bodyPr wrap="square" lIns="0" tIns="0" rIns="0" bIns="0" rtlCol="0" anchor="ctr"/>
-          <a:lstStyle/>
-          <a:p>
-            <a:pPr indent="0" marL="0">
-              <a:buNone/>
-            </a:pPr>
-            <a:r>
-              <a:rPr lang="en-US" sz="1350" b="1" dirty="0">
-                <a:solidFill>
-                  <a:srgbClr val="1B2340"/>
-                </a:solidFill>
-                <a:latin typeface="Calibri" pitchFamily="34" charset="0"/>
-                <a:ea typeface="Calibri" pitchFamily="34" charset="-122"/>
-                <a:cs typeface="Calibri" pitchFamily="34" charset="-120"/>
-              </a:rPr>
-              <a:t>Distribution</a:t>
-            </a:r>
-            <a:endParaRPr lang="en-US" sz="1350" dirty="0"/>
-          </a:p>
-        </p:txBody>
-      </p:sp>
-      <p:sp>
-        <p:nvSpPr>
-          <p:cNvPr id="23" name="Text 21"/>
-          <p:cNvSpPr/>
-          <p:nvPr/>
-        </p:nvSpPr>
-        <p:spPr>
-          <a:xfrm>
-            <a:off x="868680" y="4828032"/>
-            <a:ext cx="3063240" cy="1143000"/>
-          </a:xfrm>
-          <a:prstGeom prst="rect">
-            <a:avLst/>
-          </a:prstGeom>
-          <a:noFill/>
-          <a:ln/>
-        </p:spPr>
-        <p:txBody>
-          <a:bodyPr wrap="square" lIns="0" tIns="0" rIns="0" bIns="0" rtlCol="0" anchor="t"/>
+            <a:off x="914400" y="3703320"/>
+            <a:ext cx="4709160" cy="1600200"/>
+          </a:xfrm>
+          <a:prstGeom prst="rect">
+            <a:avLst/>
+          </a:prstGeom>
+          <a:noFill/>
+          <a:ln/>
+        </p:spPr>
+        <p:txBody>
+          <a:bodyPr wrap="square" lIns="0" tIns="0" rIns="0" bIns="0" rtlCol="0" anchor="ctr"/>
           <a:lstStyle/>
           <a:p>
             <a:pPr indent="0" marL="0">
               <a:lnSpc>
-                <a:spcPct val="122000"/>
+                <a:spcPct val="125000"/>
               </a:lnSpc>
               <a:buNone/>
             </a:pPr>
             <a:r>
-              <a:rPr lang="en-US" sz="980" dirty="0">
-                <a:solidFill>
-                  <a:srgbClr val="6B7390"/>
-                </a:solidFill>
-                <a:latin typeface="Calibri" pitchFamily="34" charset="0"/>
-                <a:ea typeface="Calibri" pitchFamily="34" charset="-122"/>
-                <a:cs typeface="Calibri" pitchFamily="34" charset="-120"/>
-              </a:rPr>
-              <a:t>requests + urllib3 Retry/HTTPAdapter (pooling, backoff); JSON Schema draft 2020-12 contract; Railway API Gateway</a:t>
-            </a:r>
-            <a:endParaRPr lang="en-US" sz="980" dirty="0"/>
-          </a:p>
-        </p:txBody>
-      </p:sp>
-      <p:sp>
-        <p:nvSpPr>
-          <p:cNvPr id="24" name="Shape 22"/>
-          <p:cNvSpPr/>
-          <p:nvPr/>
-        </p:nvSpPr>
-        <p:spPr>
-          <a:xfrm>
-            <a:off x="4389120" y="3913632"/>
-            <a:ext cx="3520440" cy="2240280"/>
+              <a:rPr lang="en-US" sz="1000" dirty="0">
+                <a:solidFill>
+                  <a:srgbClr val="AEB9D6"/>
+                </a:solidFill>
+                <a:latin typeface="Calibri" pitchFamily="34" charset="0"/>
+                <a:ea typeface="Calibri" pitchFamily="34" charset="-122"/>
+                <a:cs typeface="Calibri" pitchFamily="34" charset="-120"/>
+              </a:rPr>
+              <a:t>The shipped real market_data sample has only 3 M5 bars, no M15 rows, and NULL channel columns (warm-up by design) — it can't exercise the renderer. fixture.py fabricates a self-consistent synthetic xauusd.db instead: 96 M5 bars (8h) plus a coherently-aggregated M15 series, with a populated straight parallel channel per variant. Used automatically whenever --db is omitted from the CLI.</a:t>
+            </a:r>
+            <a:endParaRPr lang="en-US" sz="1000" dirty="0"/>
+          </a:p>
+        </p:txBody>
+      </p:sp>
+      <p:sp>
+        <p:nvSpPr>
+          <p:cNvPr id="22" name="Shape 20"/>
+          <p:cNvSpPr/>
+          <p:nvPr/>
+        </p:nvSpPr>
+        <p:spPr>
+          <a:xfrm>
+            <a:off x="6263640" y="3154680"/>
+            <a:ext cx="5257800" cy="2331720"/>
           </a:xfrm>
           <a:prstGeom prst="roundRect">
             <a:avLst>
-              <a:gd name="adj" fmla="val 3265"/>
+              <a:gd name="adj" fmla="val 3137"/>
             </a:avLst>
           </a:prstGeom>
           <a:solidFill>
@@ -3117,62 +3145,124 @@
       </p:sp>
       <p:sp>
         <p:nvSpPr>
-          <p:cNvPr id="25" name="Shape 23"/>
-          <p:cNvSpPr/>
-          <p:nvPr/>
-        </p:nvSpPr>
-        <p:spPr>
-          <a:xfrm>
-            <a:off x="4617720" y="4142232"/>
-            <a:ext cx="502920" cy="502920"/>
+          <p:cNvPr id="23" name="Text 21"/>
+          <p:cNvSpPr/>
+          <p:nvPr/>
+        </p:nvSpPr>
+        <p:spPr>
+          <a:xfrm>
+            <a:off x="6537960" y="3355848"/>
+            <a:ext cx="4709160" cy="274320"/>
+          </a:xfrm>
+          <a:prstGeom prst="rect">
+            <a:avLst/>
+          </a:prstGeom>
+          <a:noFill/>
+          <a:ln/>
+        </p:spPr>
+        <p:txBody>
+          <a:bodyPr wrap="square" lIns="0" tIns="0" rIns="0" bIns="0" rtlCol="0" anchor="ctr"/>
+          <a:lstStyle/>
+          <a:p>
+            <a:pPr indent="0" marL="0">
+              <a:buNone/>
+            </a:pPr>
+            <a:r>
+              <a:rPr lang="en-US" sz="1100" b="1" dirty="0">
+                <a:solidFill>
+                  <a:srgbClr val="C9A227"/>
+                </a:solidFill>
+                <a:latin typeface="Calibri" pitchFamily="34" charset="0"/>
+                <a:ea typeface="Calibri" pitchFamily="34" charset="-122"/>
+                <a:cs typeface="Calibri" pitchFamily="34" charset="-120"/>
+              </a:rPr>
+              <a:t>TEST COVERAGE — test_mtf_render.py</a:t>
+            </a:r>
+            <a:endParaRPr lang="en-US" sz="1100" dirty="0"/>
+          </a:p>
+        </p:txBody>
+      </p:sp>
+      <p:sp>
+        <p:nvSpPr>
+          <p:cNvPr id="24" name="Shape 22"/>
+          <p:cNvSpPr/>
+          <p:nvPr/>
+        </p:nvSpPr>
+        <p:spPr>
+          <a:xfrm>
+            <a:off x="6537960" y="3803904"/>
+            <a:ext cx="73152" cy="73152"/>
           </a:xfrm>
           <a:prstGeom prst="ellipse">
             <a:avLst/>
           </a:prstGeom>
           <a:solidFill>
-            <a:srgbClr val="1B2340"/>
+            <a:srgbClr val="C9A227"/>
           </a:solidFill>
           <a:ln/>
         </p:spPr>
       </p:sp>
       <p:sp>
         <p:nvSpPr>
-          <p:cNvPr id="26" name="Text 24"/>
-          <p:cNvSpPr/>
-          <p:nvPr/>
-        </p:nvSpPr>
-        <p:spPr>
-          <a:xfrm>
-            <a:off x="4617720" y="4142232"/>
-            <a:ext cx="502920" cy="502920"/>
-          </a:xfrm>
-          <a:prstGeom prst="rect">
-            <a:avLst/>
-          </a:prstGeom>
-          <a:noFill/>
-          <a:ln/>
-        </p:spPr>
-        <p:txBody>
-          <a:bodyPr wrap="square" lIns="0" tIns="0" rIns="0" bIns="0" rtlCol="0" anchor="ctr"/>
-          <a:lstStyle/>
-          <a:p>
-            <a:pPr algn="ctr" indent="0" marL="0">
-              <a:buNone/>
-            </a:pPr>
-            <a:r>
-              <a:rPr lang="en-US" sz="1400" b="1" dirty="0">
-                <a:solidFill>
-                  <a:srgbClr val="E4C860"/>
-                </a:solidFill>
-                <a:latin typeface="Cambria" pitchFamily="34" charset="0"/>
-                <a:ea typeface="Cambria" pitchFamily="34" charset="-122"/>
-                <a:cs typeface="Cambria" pitchFamily="34" charset="-120"/>
-              </a:rPr>
-              <a:t>05</a:t>
-            </a:r>
-            <a:endParaRPr lang="en-US" sz="1400" dirty="0"/>
-          </a:p>
-        </p:txBody>
+          <p:cNvPr id="25" name="Text 23"/>
+          <p:cNvSpPr/>
+          <p:nvPr/>
+        </p:nvSpPr>
+        <p:spPr>
+          <a:xfrm>
+            <a:off x="6720840" y="3749040"/>
+            <a:ext cx="4526280" cy="548640"/>
+          </a:xfrm>
+          <a:prstGeom prst="rect">
+            <a:avLst/>
+          </a:prstGeom>
+          <a:noFill/>
+          <a:ln/>
+        </p:spPr>
+        <p:txBody>
+          <a:bodyPr wrap="square" lIns="0" tIns="0" rIns="0" bIns="0" rtlCol="0" anchor="t"/>
+          <a:lstStyle/>
+          <a:p>
+            <a:pPr indent="0" marL="0">
+              <a:lnSpc>
+                <a:spcPct val="118000"/>
+              </a:lnSpc>
+              <a:buNone/>
+            </a:pPr>
+            <a:r>
+              <a:rPr lang="en-US" sz="1000" dirty="0">
+                <a:solidFill>
+                  <a:srgbClr val="3C4560"/>
+                </a:solidFill>
+                <a:latin typeface="Calibri" pitchFamily="34" charset="0"/>
+                <a:ea typeface="Calibri" pitchFamily="34" charset="-122"/>
+                <a:cs typeface="Calibri" pitchFamily="34" charset="-120"/>
+              </a:rPr>
+              <a:t>Asserts panels B and C reference the IDENTICAL Channel object as A — proves the M5 channel is reused, not recomputed</a:t>
+            </a:r>
+            <a:endParaRPr lang="en-US" sz="1000" dirty="0"/>
+          </a:p>
+        </p:txBody>
+      </p:sp>
+      <p:sp>
+        <p:nvSpPr>
+          <p:cNvPr id="26" name="Shape 24"/>
+          <p:cNvSpPr/>
+          <p:nvPr/>
+        </p:nvSpPr>
+        <p:spPr>
+          <a:xfrm>
+            <a:off x="6537960" y="4370832"/>
+            <a:ext cx="73152" cy="73152"/>
+          </a:xfrm>
+          <a:prstGeom prst="ellipse">
+            <a:avLst/>
+          </a:prstGeom>
+          <a:solidFill>
+            <a:srgbClr val="C9A227"/>
+          </a:solidFill>
+          <a:ln/>
+        </p:spPr>
       </p:sp>
       <p:sp>
         <p:nvSpPr>
@@ -3182,47 +3272,8 @@
         </p:nvSpPr>
         <p:spPr>
           <a:xfrm>
-            <a:off x="5257800" y="4187952"/>
-            <a:ext cx="2468880" cy="411480"/>
-          </a:xfrm>
-          <a:prstGeom prst="rect">
-            <a:avLst/>
-          </a:prstGeom>
-          <a:noFill/>
-          <a:ln/>
-        </p:spPr>
-        <p:txBody>
-          <a:bodyPr wrap="square" lIns="0" tIns="0" rIns="0" bIns="0" rtlCol="0" anchor="ctr"/>
-          <a:lstStyle/>
-          <a:p>
-            <a:pPr indent="0" marL="0">
-              <a:buNone/>
-            </a:pPr>
-            <a:r>
-              <a:rPr lang="en-US" sz="1350" b="1" dirty="0">
-                <a:solidFill>
-                  <a:srgbClr val="1B2340"/>
-                </a:solidFill>
-                <a:latin typeface="Calibri" pitchFamily="34" charset="0"/>
-                <a:ea typeface="Calibri" pitchFamily="34" charset="-122"/>
-                <a:cs typeface="Calibri" pitchFamily="34" charset="-120"/>
-              </a:rPr>
-              <a:t>Visualisation</a:t>
-            </a:r>
-            <a:endParaRPr lang="en-US" sz="1350" dirty="0"/>
-          </a:p>
-        </p:txBody>
-      </p:sp>
-      <p:sp>
-        <p:nvSpPr>
-          <p:cNvPr id="28" name="Text 26"/>
-          <p:cNvSpPr/>
-          <p:nvPr/>
-        </p:nvSpPr>
-        <p:spPr>
-          <a:xfrm>
-            <a:off x="4617720" y="4828032"/>
-            <a:ext cx="3063240" cy="1143000"/>
+            <a:off x="6720840" y="4315968"/>
+            <a:ext cx="4526280" cy="548640"/>
           </a:xfrm>
           <a:prstGeom prst="rect">
             <a:avLst/>
@@ -3236,162 +3287,55 @@
           <a:p>
             <a:pPr indent="0" marL="0">
               <a:lnSpc>
-                <a:spcPct val="122000"/>
+                <a:spcPct val="118000"/>
               </a:lnSpc>
               <a:buNone/>
             </a:pPr>
             <a:r>
-              <a:rPr lang="en-US" sz="980" dirty="0">
-                <a:solidFill>
-                  <a:srgbClr val="6B7390"/>
-                </a:solidFill>
-                <a:latin typeface="Calibri" pitchFamily="34" charset="0"/>
-                <a:ea typeface="Calibri" pitchFamily="34" charset="-122"/>
-                <a:cs typeface="Calibri" pitchFamily="34" charset="-120"/>
-              </a:rPr>
-              <a:t>pandas + numpy (Generator-seeded fixtures); matplotlib Agg backend + matplotlib.dates — real time-axis, not mplfinance</a:t>
-            </a:r>
-            <a:endParaRPr lang="en-US" sz="980" dirty="0"/>
-          </a:p>
-        </p:txBody>
-      </p:sp>
-      <p:sp>
-        <p:nvSpPr>
-          <p:cNvPr id="29" name="Shape 27"/>
-          <p:cNvSpPr/>
-          <p:nvPr/>
-        </p:nvSpPr>
-        <p:spPr>
-          <a:xfrm>
-            <a:off x="8138160" y="3913632"/>
-            <a:ext cx="3520440" cy="2240280"/>
-          </a:xfrm>
-          <a:prstGeom prst="roundRect">
-            <a:avLst>
-              <a:gd name="adj" fmla="val 3265"/>
-            </a:avLst>
+              <a:rPr lang="en-US" sz="1000" dirty="0">
+                <a:solidFill>
+                  <a:srgbClr val="3C4560"/>
+                </a:solidFill>
+                <a:latin typeface="Calibri" pitchFamily="34" charset="0"/>
+                <a:ea typeface="Calibri" pitchFamily="34" charset="-122"/>
+                <a:cs typeface="Calibri" pitchFamily="34" charset="-120"/>
+              </a:rPr>
+              <a:t>All 6 centroid variants load and populate the channel correctly</a:t>
+            </a:r>
+            <a:endParaRPr lang="en-US" sz="1000" dirty="0"/>
+          </a:p>
+        </p:txBody>
+      </p:sp>
+      <p:sp>
+        <p:nvSpPr>
+          <p:cNvPr id="28" name="Shape 26"/>
+          <p:cNvSpPr/>
+          <p:nvPr/>
+        </p:nvSpPr>
+        <p:spPr>
+          <a:xfrm>
+            <a:off x="6537960" y="4937760"/>
+            <a:ext cx="73152" cy="73152"/>
+          </a:xfrm>
+          <a:prstGeom prst="ellipse">
+            <a:avLst/>
           </a:prstGeom>
           <a:solidFill>
-            <a:srgbClr val="FFFFFF"/>
+            <a:srgbClr val="C9A227"/>
           </a:solidFill>
           <a:ln/>
-          <a:effectLst>
-            <a:outerShdw sx="100000" sy="100000" kx="0" ky="0" algn="bl" rotWithShape="0" blurRad="101600" dist="38100" dir="2700000">
-              <a:srgbClr val="000000">
-                <a:alpha val="12000"/>
-              </a:srgbClr>
-            </a:outerShdw>
-          </a:effectLst>
-        </p:spPr>
-      </p:sp>
-      <p:sp>
-        <p:nvSpPr>
-          <p:cNvPr id="30" name="Shape 28"/>
-          <p:cNvSpPr/>
-          <p:nvPr/>
-        </p:nvSpPr>
-        <p:spPr>
-          <a:xfrm>
-            <a:off x="8366760" y="4142232"/>
-            <a:ext cx="502920" cy="502920"/>
-          </a:xfrm>
-          <a:prstGeom prst="ellipse">
-            <a:avLst/>
-          </a:prstGeom>
-          <a:solidFill>
-            <a:srgbClr val="1B2340"/>
-          </a:solidFill>
-          <a:ln/>
-        </p:spPr>
-      </p:sp>
-      <p:sp>
-        <p:nvSpPr>
-          <p:cNvPr id="31" name="Text 29"/>
-          <p:cNvSpPr/>
-          <p:nvPr/>
-        </p:nvSpPr>
-        <p:spPr>
-          <a:xfrm>
-            <a:off x="8366760" y="4142232"/>
-            <a:ext cx="502920" cy="502920"/>
-          </a:xfrm>
-          <a:prstGeom prst="rect">
-            <a:avLst/>
-          </a:prstGeom>
-          <a:noFill/>
-          <a:ln/>
-        </p:spPr>
-        <p:txBody>
-          <a:bodyPr wrap="square" lIns="0" tIns="0" rIns="0" bIns="0" rtlCol="0" anchor="ctr"/>
-          <a:lstStyle/>
-          <a:p>
-            <a:pPr algn="ctr" indent="0" marL="0">
-              <a:buNone/>
-            </a:pPr>
-            <a:r>
-              <a:rPr lang="en-US" sz="1400" b="1" dirty="0">
-                <a:solidFill>
-                  <a:srgbClr val="E4C860"/>
-                </a:solidFill>
-                <a:latin typeface="Cambria" pitchFamily="34" charset="0"/>
-                <a:ea typeface="Cambria" pitchFamily="34" charset="-122"/>
-                <a:cs typeface="Cambria" pitchFamily="34" charset="-120"/>
-              </a:rPr>
-              <a:t>06</a:t>
-            </a:r>
-            <a:endParaRPr lang="en-US" sz="1400" dirty="0"/>
-          </a:p>
-        </p:txBody>
-      </p:sp>
-      <p:sp>
-        <p:nvSpPr>
-          <p:cNvPr id="32" name="Text 30"/>
-          <p:cNvSpPr/>
-          <p:nvPr/>
-        </p:nvSpPr>
-        <p:spPr>
-          <a:xfrm>
-            <a:off x="9006840" y="4187952"/>
-            <a:ext cx="2468880" cy="411480"/>
-          </a:xfrm>
-          <a:prstGeom prst="rect">
-            <a:avLst/>
-          </a:prstGeom>
-          <a:noFill/>
-          <a:ln/>
-        </p:spPr>
-        <p:txBody>
-          <a:bodyPr wrap="square" lIns="0" tIns="0" rIns="0" bIns="0" rtlCol="0" anchor="ctr"/>
-          <a:lstStyle/>
-          <a:p>
-            <a:pPr indent="0" marL="0">
-              <a:buNone/>
-            </a:pPr>
-            <a:r>
-              <a:rPr lang="en-US" sz="1350" b="1" dirty="0">
-                <a:solidFill>
-                  <a:srgbClr val="1B2340"/>
-                </a:solidFill>
-                <a:latin typeface="Calibri" pitchFamily="34" charset="0"/>
-                <a:ea typeface="Calibri" pitchFamily="34" charset="-122"/>
-                <a:cs typeface="Calibri" pitchFamily="34" charset="-120"/>
-              </a:rPr>
-              <a:t>Deployment &amp; Ops</a:t>
-            </a:r>
-            <a:endParaRPr lang="en-US" sz="1350" dirty="0"/>
-          </a:p>
-        </p:txBody>
-      </p:sp>
-      <p:sp>
-        <p:nvSpPr>
-          <p:cNvPr id="33" name="Text 31"/>
-          <p:cNvSpPr/>
-          <p:nvPr/>
-        </p:nvSpPr>
-        <p:spPr>
-          <a:xfrm>
-            <a:off x="8366760" y="4828032"/>
-            <a:ext cx="3063240" cy="1143000"/>
+        </p:spPr>
+      </p:sp>
+      <p:sp>
+        <p:nvSpPr>
+          <p:cNvPr id="29" name="Text 27"/>
+          <p:cNvSpPr/>
+          <p:nvPr/>
+        </p:nvSpPr>
+        <p:spPr>
+          <a:xfrm>
+            <a:off x="6720840" y="4882896"/>
+            <a:ext cx="4526280" cy="548640"/>
           </a:xfrm>
           <a:prstGeom prst="rect">
             <a:avLst/>
@@ -3405,28 +3349,28 @@
           <a:p>
             <a:pPr indent="0" marL="0">
               <a:lnSpc>
-                <a:spcPct val="122000"/>
+                <a:spcPct val="118000"/>
               </a:lnSpc>
               <a:buNone/>
             </a:pPr>
             <a:r>
-              <a:rPr lang="en-US" sz="980" dirty="0">
-                <a:solidFill>
-                  <a:srgbClr val="6B7390"/>
-                </a:solidFill>
-                <a:latin typeface="Calibri" pitchFamily="34" charset="0"/>
-                <a:ea typeface="Calibri" pitchFamily="34" charset="-122"/>
-                <a:cs typeface="Calibri" pitchFamily="34" charset="-120"/>
-              </a:rPr>
-              <a:t>NSSM (3 auto-restarting Windows services); RotatingFileHandler logs; signal-based graceful shutdown</a:t>
-            </a:r>
-            <a:endParaRPr lang="en-US" sz="980" dirty="0"/>
-          </a:p>
-        </p:txBody>
-      </p:sp>
-      <p:sp>
-        <p:nvSpPr>
-          <p:cNvPr id="34" name="Text 32"/>
+              <a:rPr lang="en-US" sz="1000" dirty="0">
+                <a:solidFill>
+                  <a:srgbClr val="3C4560"/>
+                </a:solidFill>
+                <a:latin typeface="Calibri" pitchFamily="34" charset="0"/>
+                <a:ea typeface="Calibri" pitchFamily="34" charset="-122"/>
+                <a:cs typeface="Calibri" pitchFamily="34" charset="-120"/>
+              </a:rPr>
+              <a:t>Render produces a non-trivial PNG file (size-checked)</a:t>
+            </a:r>
+            <a:endParaRPr lang="en-US" sz="1000" dirty="0"/>
+          </a:p>
+        </p:txBody>
+      </p:sp>
+      <p:sp>
+        <p:nvSpPr>
+          <p:cNvPr id="30" name="Text 28"/>
           <p:cNvSpPr/>
           <p:nvPr/>
         </p:nvSpPr>
@@ -3465,7 +3409,7 @@
       </p:sp>
       <p:sp>
         <p:nvSpPr>
-          <p:cNvPr id="35" name="Text 33"/>
+          <p:cNvPr id="31" name="Text 29"/>
           <p:cNvSpPr/>
           <p:nvPr/>
         </p:nvSpPr>
@@ -3496,7 +3440,7 @@
                 <a:ea typeface="Calibri" pitchFamily="34" charset="-122"/>
                 <a:cs typeface="Calibri" pitchFamily="34" charset="-120"/>
               </a:rPr>
-              <a:t>10 / 11</a:t>
+              <a:t>10 / 12</a:t>
             </a:r>
             <a:endParaRPr lang="en-US" sz="900" dirty="0"/>
           </a:p>
@@ -3513,6 +3457,1208 @@
 <file path=ppt/slides/slide11.xml><?xml version="1.0" encoding="utf-8"?>
 <p:sld xmlns:a="http://schemas.openxmlformats.org/drawingml/2006/main" xmlns:r="http://schemas.openxmlformats.org/officeDocument/2006/relationships" xmlns:p="http://schemas.openxmlformats.org/presentationml/2006/main">
   <p:cSld name="Slide 11">
+    <p:bg>
+      <p:bgPr>
+        <a:solidFill>
+          <a:srgbClr val="F7F7F5"/>
+        </a:solidFill>
+      </p:bgPr>
+    </p:bg>
+    <p:spTree>
+      <p:nvGrpSpPr>
+        <p:cNvPr id="1" name=""/>
+        <p:cNvGrpSpPr/>
+        <p:nvPr/>
+      </p:nvGrpSpPr>
+      <p:grpSpPr>
+        <a:xfrm>
+          <a:off x="0" y="0"/>
+          <a:ext cx="0" cy="0"/>
+          <a:chOff x="0" y="0"/>
+          <a:chExt cx="0" cy="0"/>
+        </a:xfrm>
+      </p:grpSpPr>
+      <p:sp>
+        <p:nvSpPr>
+          <p:cNvPr id="2" name="Text 0"/>
+          <p:cNvSpPr/>
+          <p:nvPr/>
+        </p:nvSpPr>
+        <p:spPr>
+          <a:xfrm>
+            <a:off x="640080" y="384048"/>
+            <a:ext cx="10058400" cy="502920"/>
+          </a:xfrm>
+          <a:prstGeom prst="rect">
+            <a:avLst/>
+          </a:prstGeom>
+          <a:noFill/>
+          <a:ln/>
+        </p:spPr>
+        <p:txBody>
+          <a:bodyPr wrap="square" lIns="0" tIns="0" rIns="0" bIns="0" rtlCol="0" anchor="ctr"/>
+          <a:lstStyle/>
+          <a:p>
+            <a:pPr indent="0" marL="0">
+              <a:buNone/>
+            </a:pPr>
+            <a:r>
+              <a:rPr lang="en-US" sz="2500" b="1" dirty="0">
+                <a:solidFill>
+                  <a:srgbClr val="1B2340"/>
+                </a:solidFill>
+                <a:latin typeface="Cambria" pitchFamily="34" charset="0"/>
+                <a:ea typeface="Cambria" pitchFamily="34" charset="-122"/>
+                <a:cs typeface="Cambria" pitchFamily="34" charset="-120"/>
+              </a:rPr>
+              <a:t>Technology Stack Overview</a:t>
+            </a:r>
+            <a:endParaRPr lang="en-US" sz="2500" dirty="0"/>
+          </a:p>
+        </p:txBody>
+      </p:sp>
+      <p:sp>
+        <p:nvSpPr>
+          <p:cNvPr id="3" name="Text 1"/>
+          <p:cNvSpPr/>
+          <p:nvPr/>
+        </p:nvSpPr>
+        <p:spPr>
+          <a:xfrm>
+            <a:off x="640080" y="841248"/>
+            <a:ext cx="10607040" cy="320040"/>
+          </a:xfrm>
+          <a:prstGeom prst="rect">
+            <a:avLst/>
+          </a:prstGeom>
+          <a:noFill/>
+          <a:ln/>
+        </p:spPr>
+        <p:txBody>
+          <a:bodyPr wrap="square" lIns="0" tIns="0" rIns="0" bIns="0" rtlCol="0" anchor="ctr"/>
+          <a:lstStyle/>
+          <a:p>
+            <a:pPr indent="0" marL="0">
+              <a:buNone/>
+            </a:pPr>
+            <a:r>
+              <a:rPr lang="en-US" sz="1150" i="1" dirty="0">
+                <a:solidFill>
+                  <a:srgbClr val="6B7390"/>
+                </a:solidFill>
+                <a:latin typeface="Calibri" pitchFamily="34" charset="0"/>
+                <a:ea typeface="Calibri" pitchFamily="34" charset="-122"/>
+                <a:cs typeface="Calibri" pitchFamily="34" charset="-120"/>
+              </a:rPr>
+              <a:t>All libraries and platforms in play, grouped by function</a:t>
+            </a:r>
+            <a:endParaRPr lang="en-US" sz="1150" dirty="0"/>
+          </a:p>
+        </p:txBody>
+      </p:sp>
+      <p:sp>
+        <p:nvSpPr>
+          <p:cNvPr id="4" name="Shape 2"/>
+          <p:cNvSpPr/>
+          <p:nvPr/>
+        </p:nvSpPr>
+        <p:spPr>
+          <a:xfrm>
+            <a:off x="640080" y="1417320"/>
+            <a:ext cx="3520440" cy="2240280"/>
+          </a:xfrm>
+          <a:prstGeom prst="roundRect">
+            <a:avLst>
+              <a:gd name="adj" fmla="val 3265"/>
+            </a:avLst>
+          </a:prstGeom>
+          <a:solidFill>
+            <a:srgbClr val="FFFFFF"/>
+          </a:solidFill>
+          <a:ln/>
+          <a:effectLst>
+            <a:outerShdw sx="100000" sy="100000" kx="0" ky="0" algn="bl" rotWithShape="0" blurRad="101600" dist="38100" dir="2700000">
+              <a:srgbClr val="000000">
+                <a:alpha val="12000"/>
+              </a:srgbClr>
+            </a:outerShdw>
+          </a:effectLst>
+        </p:spPr>
+      </p:sp>
+      <p:sp>
+        <p:nvSpPr>
+          <p:cNvPr id="5" name="Shape 3"/>
+          <p:cNvSpPr/>
+          <p:nvPr/>
+        </p:nvSpPr>
+        <p:spPr>
+          <a:xfrm>
+            <a:off x="868680" y="1645920"/>
+            <a:ext cx="502920" cy="502920"/>
+          </a:xfrm>
+          <a:prstGeom prst="ellipse">
+            <a:avLst/>
+          </a:prstGeom>
+          <a:solidFill>
+            <a:srgbClr val="1B2340"/>
+          </a:solidFill>
+          <a:ln/>
+        </p:spPr>
+      </p:sp>
+      <p:sp>
+        <p:nvSpPr>
+          <p:cNvPr id="6" name="Text 4"/>
+          <p:cNvSpPr/>
+          <p:nvPr/>
+        </p:nvSpPr>
+        <p:spPr>
+          <a:xfrm>
+            <a:off x="868680" y="1645920"/>
+            <a:ext cx="502920" cy="502920"/>
+          </a:xfrm>
+          <a:prstGeom prst="rect">
+            <a:avLst/>
+          </a:prstGeom>
+          <a:noFill/>
+          <a:ln/>
+        </p:spPr>
+        <p:txBody>
+          <a:bodyPr wrap="square" lIns="0" tIns="0" rIns="0" bIns="0" rtlCol="0" anchor="ctr"/>
+          <a:lstStyle/>
+          <a:p>
+            <a:pPr algn="ctr" indent="0" marL="0">
+              <a:buNone/>
+            </a:pPr>
+            <a:r>
+              <a:rPr lang="en-US" sz="1400" b="1" dirty="0">
+                <a:solidFill>
+                  <a:srgbClr val="E4C860"/>
+                </a:solidFill>
+                <a:latin typeface="Cambria" pitchFamily="34" charset="0"/>
+                <a:ea typeface="Cambria" pitchFamily="34" charset="-122"/>
+                <a:cs typeface="Cambria" pitchFamily="34" charset="-120"/>
+              </a:rPr>
+              <a:t>01</a:t>
+            </a:r>
+            <a:endParaRPr lang="en-US" sz="1400" dirty="0"/>
+          </a:p>
+        </p:txBody>
+      </p:sp>
+      <p:sp>
+        <p:nvSpPr>
+          <p:cNvPr id="7" name="Text 5"/>
+          <p:cNvSpPr/>
+          <p:nvPr/>
+        </p:nvSpPr>
+        <p:spPr>
+          <a:xfrm>
+            <a:off x="1508760" y="1691640"/>
+            <a:ext cx="2468880" cy="411480"/>
+          </a:xfrm>
+          <a:prstGeom prst="rect">
+            <a:avLst/>
+          </a:prstGeom>
+          <a:noFill/>
+          <a:ln/>
+        </p:spPr>
+        <p:txBody>
+          <a:bodyPr wrap="square" lIns="0" tIns="0" rIns="0" bIns="0" rtlCol="0" anchor="ctr"/>
+          <a:lstStyle/>
+          <a:p>
+            <a:pPr indent="0" marL="0">
+              <a:buNone/>
+            </a:pPr>
+            <a:r>
+              <a:rPr lang="en-US" sz="1350" b="1" dirty="0">
+                <a:solidFill>
+                  <a:srgbClr val="1B2340"/>
+                </a:solidFill>
+                <a:latin typeface="Calibri" pitchFamily="34" charset="0"/>
+                <a:ea typeface="Calibri" pitchFamily="34" charset="-122"/>
+                <a:cs typeface="Calibri" pitchFamily="34" charset="-120"/>
+              </a:rPr>
+              <a:t>Data Production</a:t>
+            </a:r>
+            <a:endParaRPr lang="en-US" sz="1350" dirty="0"/>
+          </a:p>
+        </p:txBody>
+      </p:sp>
+      <p:sp>
+        <p:nvSpPr>
+          <p:cNvPr id="8" name="Text 6"/>
+          <p:cNvSpPr/>
+          <p:nvPr/>
+        </p:nvSpPr>
+        <p:spPr>
+          <a:xfrm>
+            <a:off x="868680" y="2331720"/>
+            <a:ext cx="3063240" cy="1143000"/>
+          </a:xfrm>
+          <a:prstGeom prst="rect">
+            <a:avLst/>
+          </a:prstGeom>
+          <a:noFill/>
+          <a:ln/>
+        </p:spPr>
+        <p:txBody>
+          <a:bodyPr wrap="square" lIns="0" tIns="0" rIns="0" bIns="0" rtlCol="0" anchor="t"/>
+          <a:lstStyle/>
+          <a:p>
+            <a:pPr indent="0" marL="0">
+              <a:lnSpc>
+                <a:spcPct val="122000"/>
+              </a:lnSpc>
+              <a:buNone/>
+            </a:pPr>
+            <a:r>
+              <a:rPr lang="en-US" sz="980" dirty="0">
+                <a:solidFill>
+                  <a:srgbClr val="6B7390"/>
+                </a:solidFill>
+                <a:latin typeface="Calibri" pitchFamily="34" charset="0"/>
+                <a:ea typeface="Calibri" pitchFamily="34" charset="-122"/>
+                <a:cs typeface="Calibri" pitchFamily="34" charset="-120"/>
+              </a:rPr>
+              <a:t>MQL5 (MetaTrader 5 indicator language); Windows VPS (Contabo) runtime</a:t>
+            </a:r>
+            <a:endParaRPr lang="en-US" sz="980" dirty="0"/>
+          </a:p>
+        </p:txBody>
+      </p:sp>
+      <p:sp>
+        <p:nvSpPr>
+          <p:cNvPr id="9" name="Shape 7"/>
+          <p:cNvSpPr/>
+          <p:nvPr/>
+        </p:nvSpPr>
+        <p:spPr>
+          <a:xfrm>
+            <a:off x="4389120" y="1417320"/>
+            <a:ext cx="3520440" cy="2240280"/>
+          </a:xfrm>
+          <a:prstGeom prst="roundRect">
+            <a:avLst>
+              <a:gd name="adj" fmla="val 3265"/>
+            </a:avLst>
+          </a:prstGeom>
+          <a:solidFill>
+            <a:srgbClr val="FFFFFF"/>
+          </a:solidFill>
+          <a:ln/>
+          <a:effectLst>
+            <a:outerShdw sx="100000" sy="100000" kx="0" ky="0" algn="bl" rotWithShape="0" blurRad="101600" dist="38100" dir="2700000">
+              <a:srgbClr val="000000">
+                <a:alpha val="12000"/>
+              </a:srgbClr>
+            </a:outerShdw>
+          </a:effectLst>
+        </p:spPr>
+      </p:sp>
+      <p:sp>
+        <p:nvSpPr>
+          <p:cNvPr id="10" name="Shape 8"/>
+          <p:cNvSpPr/>
+          <p:nvPr/>
+        </p:nvSpPr>
+        <p:spPr>
+          <a:xfrm>
+            <a:off x="4617720" y="1645920"/>
+            <a:ext cx="502920" cy="502920"/>
+          </a:xfrm>
+          <a:prstGeom prst="ellipse">
+            <a:avLst/>
+          </a:prstGeom>
+          <a:solidFill>
+            <a:srgbClr val="1B2340"/>
+          </a:solidFill>
+          <a:ln/>
+        </p:spPr>
+      </p:sp>
+      <p:sp>
+        <p:nvSpPr>
+          <p:cNvPr id="11" name="Text 9"/>
+          <p:cNvSpPr/>
+          <p:nvPr/>
+        </p:nvSpPr>
+        <p:spPr>
+          <a:xfrm>
+            <a:off x="4617720" y="1645920"/>
+            <a:ext cx="502920" cy="502920"/>
+          </a:xfrm>
+          <a:prstGeom prst="rect">
+            <a:avLst/>
+          </a:prstGeom>
+          <a:noFill/>
+          <a:ln/>
+        </p:spPr>
+        <p:txBody>
+          <a:bodyPr wrap="square" lIns="0" tIns="0" rIns="0" bIns="0" rtlCol="0" anchor="ctr"/>
+          <a:lstStyle/>
+          <a:p>
+            <a:pPr algn="ctr" indent="0" marL="0">
+              <a:buNone/>
+            </a:pPr>
+            <a:r>
+              <a:rPr lang="en-US" sz="1400" b="1" dirty="0">
+                <a:solidFill>
+                  <a:srgbClr val="E4C860"/>
+                </a:solidFill>
+                <a:latin typeface="Cambria" pitchFamily="34" charset="0"/>
+                <a:ea typeface="Cambria" pitchFamily="34" charset="-122"/>
+                <a:cs typeface="Cambria" pitchFamily="34" charset="-120"/>
+              </a:rPr>
+              <a:t>02</a:t>
+            </a:r>
+            <a:endParaRPr lang="en-US" sz="1400" dirty="0"/>
+          </a:p>
+        </p:txBody>
+      </p:sp>
+      <p:sp>
+        <p:nvSpPr>
+          <p:cNvPr id="12" name="Text 10"/>
+          <p:cNvSpPr/>
+          <p:nvPr/>
+        </p:nvSpPr>
+        <p:spPr>
+          <a:xfrm>
+            <a:off x="5257800" y="1691640"/>
+            <a:ext cx="2468880" cy="411480"/>
+          </a:xfrm>
+          <a:prstGeom prst="rect">
+            <a:avLst/>
+          </a:prstGeom>
+          <a:noFill/>
+          <a:ln/>
+        </p:spPr>
+        <p:txBody>
+          <a:bodyPr wrap="square" lIns="0" tIns="0" rIns="0" bIns="0" rtlCol="0" anchor="ctr"/>
+          <a:lstStyle/>
+          <a:p>
+            <a:pPr indent="0" marL="0">
+              <a:buNone/>
+            </a:pPr>
+            <a:r>
+              <a:rPr lang="en-US" sz="1350" b="1" dirty="0">
+                <a:solidFill>
+                  <a:srgbClr val="1B2340"/>
+                </a:solidFill>
+                <a:latin typeface="Calibri" pitchFamily="34" charset="0"/>
+                <a:ea typeface="Calibri" pitchFamily="34" charset="-122"/>
+                <a:cs typeface="Calibri" pitchFamily="34" charset="-120"/>
+              </a:rPr>
+              <a:t>Backend Processing</a:t>
+            </a:r>
+            <a:endParaRPr lang="en-US" sz="1350" dirty="0"/>
+          </a:p>
+        </p:txBody>
+      </p:sp>
+      <p:sp>
+        <p:nvSpPr>
+          <p:cNvPr id="13" name="Text 11"/>
+          <p:cNvSpPr/>
+          <p:nvPr/>
+        </p:nvSpPr>
+        <p:spPr>
+          <a:xfrm>
+            <a:off x="4617720" y="2331720"/>
+            <a:ext cx="3063240" cy="1143000"/>
+          </a:xfrm>
+          <a:prstGeom prst="rect">
+            <a:avLst/>
+          </a:prstGeom>
+          <a:noFill/>
+          <a:ln/>
+        </p:spPr>
+        <p:txBody>
+          <a:bodyPr wrap="square" lIns="0" tIns="0" rIns="0" bIns="0" rtlCol="0" anchor="t"/>
+          <a:lstStyle/>
+          <a:p>
+            <a:pPr indent="0" marL="0">
+              <a:lnSpc>
+                <a:spcPct val="122000"/>
+              </a:lnSpc>
+              <a:buNone/>
+            </a:pPr>
+            <a:r>
+              <a:rPr lang="en-US" sz="980" dirty="0">
+                <a:solidFill>
+                  <a:srgbClr val="6B7390"/>
+                </a:solidFill>
+                <a:latin typeface="Calibri" pitchFamily="34" charset="0"/>
+                <a:ea typeface="Calibri" pitchFamily="34" charset="-122"/>
+                <a:cs typeface="Calibri" pitchFamily="34" charset="-120"/>
+              </a:rPr>
+              <a:t>Python 3, argparse CLIs; hand-ported calc logic (DBSCAN, K-means, WLS) — no sklearn substitution</a:t>
+            </a:r>
+            <a:endParaRPr lang="en-US" sz="980" dirty="0"/>
+          </a:p>
+        </p:txBody>
+      </p:sp>
+      <p:sp>
+        <p:nvSpPr>
+          <p:cNvPr id="14" name="Shape 12"/>
+          <p:cNvSpPr/>
+          <p:nvPr/>
+        </p:nvSpPr>
+        <p:spPr>
+          <a:xfrm>
+            <a:off x="8138160" y="1417320"/>
+            <a:ext cx="3520440" cy="2240280"/>
+          </a:xfrm>
+          <a:prstGeom prst="roundRect">
+            <a:avLst>
+              <a:gd name="adj" fmla="val 3265"/>
+            </a:avLst>
+          </a:prstGeom>
+          <a:solidFill>
+            <a:srgbClr val="FFFFFF"/>
+          </a:solidFill>
+          <a:ln/>
+          <a:effectLst>
+            <a:outerShdw sx="100000" sy="100000" kx="0" ky="0" algn="bl" rotWithShape="0" blurRad="101600" dist="38100" dir="2700000">
+              <a:srgbClr val="000000">
+                <a:alpha val="12000"/>
+              </a:srgbClr>
+            </a:outerShdw>
+          </a:effectLst>
+        </p:spPr>
+      </p:sp>
+      <p:sp>
+        <p:nvSpPr>
+          <p:cNvPr id="15" name="Shape 13"/>
+          <p:cNvSpPr/>
+          <p:nvPr/>
+        </p:nvSpPr>
+        <p:spPr>
+          <a:xfrm>
+            <a:off x="8366760" y="1645920"/>
+            <a:ext cx="502920" cy="502920"/>
+          </a:xfrm>
+          <a:prstGeom prst="ellipse">
+            <a:avLst/>
+          </a:prstGeom>
+          <a:solidFill>
+            <a:srgbClr val="1B2340"/>
+          </a:solidFill>
+          <a:ln/>
+        </p:spPr>
+      </p:sp>
+      <p:sp>
+        <p:nvSpPr>
+          <p:cNvPr id="16" name="Text 14"/>
+          <p:cNvSpPr/>
+          <p:nvPr/>
+        </p:nvSpPr>
+        <p:spPr>
+          <a:xfrm>
+            <a:off x="8366760" y="1645920"/>
+            <a:ext cx="502920" cy="502920"/>
+          </a:xfrm>
+          <a:prstGeom prst="rect">
+            <a:avLst/>
+          </a:prstGeom>
+          <a:noFill/>
+          <a:ln/>
+        </p:spPr>
+        <p:txBody>
+          <a:bodyPr wrap="square" lIns="0" tIns="0" rIns="0" bIns="0" rtlCol="0" anchor="ctr"/>
+          <a:lstStyle/>
+          <a:p>
+            <a:pPr algn="ctr" indent="0" marL="0">
+              <a:buNone/>
+            </a:pPr>
+            <a:r>
+              <a:rPr lang="en-US" sz="1400" b="1" dirty="0">
+                <a:solidFill>
+                  <a:srgbClr val="E4C860"/>
+                </a:solidFill>
+                <a:latin typeface="Cambria" pitchFamily="34" charset="0"/>
+                <a:ea typeface="Cambria" pitchFamily="34" charset="-122"/>
+                <a:cs typeface="Cambria" pitchFamily="34" charset="-120"/>
+              </a:rPr>
+              <a:t>03</a:t>
+            </a:r>
+            <a:endParaRPr lang="en-US" sz="1400" dirty="0"/>
+          </a:p>
+        </p:txBody>
+      </p:sp>
+      <p:sp>
+        <p:nvSpPr>
+          <p:cNvPr id="17" name="Text 15"/>
+          <p:cNvSpPr/>
+          <p:nvPr/>
+        </p:nvSpPr>
+        <p:spPr>
+          <a:xfrm>
+            <a:off x="9006840" y="1691640"/>
+            <a:ext cx="2468880" cy="411480"/>
+          </a:xfrm>
+          <a:prstGeom prst="rect">
+            <a:avLst/>
+          </a:prstGeom>
+          <a:noFill/>
+          <a:ln/>
+        </p:spPr>
+        <p:txBody>
+          <a:bodyPr wrap="square" lIns="0" tIns="0" rIns="0" bIns="0" rtlCol="0" anchor="ctr"/>
+          <a:lstStyle/>
+          <a:p>
+            <a:pPr indent="0" marL="0">
+              <a:buNone/>
+            </a:pPr>
+            <a:r>
+              <a:rPr lang="en-US" sz="1350" b="1" dirty="0">
+                <a:solidFill>
+                  <a:srgbClr val="1B2340"/>
+                </a:solidFill>
+                <a:latin typeface="Calibri" pitchFamily="34" charset="0"/>
+                <a:ea typeface="Calibri" pitchFamily="34" charset="-122"/>
+                <a:cs typeface="Calibri" pitchFamily="34" charset="-120"/>
+              </a:rPr>
+              <a:t>Storage</a:t>
+            </a:r>
+            <a:endParaRPr lang="en-US" sz="1350" dirty="0"/>
+          </a:p>
+        </p:txBody>
+      </p:sp>
+      <p:sp>
+        <p:nvSpPr>
+          <p:cNvPr id="18" name="Text 16"/>
+          <p:cNvSpPr/>
+          <p:nvPr/>
+        </p:nvSpPr>
+        <p:spPr>
+          <a:xfrm>
+            <a:off x="8366760" y="2331720"/>
+            <a:ext cx="3063240" cy="1143000"/>
+          </a:xfrm>
+          <a:prstGeom prst="rect">
+            <a:avLst/>
+          </a:prstGeom>
+          <a:noFill/>
+          <a:ln/>
+        </p:spPr>
+        <p:txBody>
+          <a:bodyPr wrap="square" lIns="0" tIns="0" rIns="0" bIns="0" rtlCol="0" anchor="t"/>
+          <a:lstStyle/>
+          <a:p>
+            <a:pPr indent="0" marL="0">
+              <a:lnSpc>
+                <a:spcPct val="122000"/>
+              </a:lnSpc>
+              <a:buNone/>
+            </a:pPr>
+            <a:r>
+              <a:rPr lang="en-US" sz="980" dirty="0">
+                <a:solidFill>
+                  <a:srgbClr val="6B7390"/>
+                </a:solidFill>
+                <a:latin typeface="Calibri" pitchFamily="34" charset="0"/>
+                <a:ea typeface="Calibri" pitchFamily="34" charset="-122"/>
+                <a:cs typeface="Calibri" pitchFamily="34" charset="-120"/>
+              </a:rPr>
+              <a:t>sqlite3 (stdlib) — WAL mode, staging tables + market_data outbox, schema-versioned SQL</a:t>
+            </a:r>
+            <a:endParaRPr lang="en-US" sz="980" dirty="0"/>
+          </a:p>
+        </p:txBody>
+      </p:sp>
+      <p:sp>
+        <p:nvSpPr>
+          <p:cNvPr id="19" name="Shape 17"/>
+          <p:cNvSpPr/>
+          <p:nvPr/>
+        </p:nvSpPr>
+        <p:spPr>
+          <a:xfrm>
+            <a:off x="640080" y="3913632"/>
+            <a:ext cx="3520440" cy="2240280"/>
+          </a:xfrm>
+          <a:prstGeom prst="roundRect">
+            <a:avLst>
+              <a:gd name="adj" fmla="val 3265"/>
+            </a:avLst>
+          </a:prstGeom>
+          <a:solidFill>
+            <a:srgbClr val="FFFFFF"/>
+          </a:solidFill>
+          <a:ln/>
+          <a:effectLst>
+            <a:outerShdw sx="100000" sy="100000" kx="0" ky="0" algn="bl" rotWithShape="0" blurRad="101600" dist="38100" dir="2700000">
+              <a:srgbClr val="000000">
+                <a:alpha val="12000"/>
+              </a:srgbClr>
+            </a:outerShdw>
+          </a:effectLst>
+        </p:spPr>
+      </p:sp>
+      <p:sp>
+        <p:nvSpPr>
+          <p:cNvPr id="20" name="Shape 18"/>
+          <p:cNvSpPr/>
+          <p:nvPr/>
+        </p:nvSpPr>
+        <p:spPr>
+          <a:xfrm>
+            <a:off x="868680" y="4142232"/>
+            <a:ext cx="502920" cy="502920"/>
+          </a:xfrm>
+          <a:prstGeom prst="ellipse">
+            <a:avLst/>
+          </a:prstGeom>
+          <a:solidFill>
+            <a:srgbClr val="1B2340"/>
+          </a:solidFill>
+          <a:ln/>
+        </p:spPr>
+      </p:sp>
+      <p:sp>
+        <p:nvSpPr>
+          <p:cNvPr id="21" name="Text 19"/>
+          <p:cNvSpPr/>
+          <p:nvPr/>
+        </p:nvSpPr>
+        <p:spPr>
+          <a:xfrm>
+            <a:off x="868680" y="4142232"/>
+            <a:ext cx="502920" cy="502920"/>
+          </a:xfrm>
+          <a:prstGeom prst="rect">
+            <a:avLst/>
+          </a:prstGeom>
+          <a:noFill/>
+          <a:ln/>
+        </p:spPr>
+        <p:txBody>
+          <a:bodyPr wrap="square" lIns="0" tIns="0" rIns="0" bIns="0" rtlCol="0" anchor="ctr"/>
+          <a:lstStyle/>
+          <a:p>
+            <a:pPr algn="ctr" indent="0" marL="0">
+              <a:buNone/>
+            </a:pPr>
+            <a:r>
+              <a:rPr lang="en-US" sz="1400" b="1" dirty="0">
+                <a:solidFill>
+                  <a:srgbClr val="E4C860"/>
+                </a:solidFill>
+                <a:latin typeface="Cambria" pitchFamily="34" charset="0"/>
+                <a:ea typeface="Cambria" pitchFamily="34" charset="-122"/>
+                <a:cs typeface="Cambria" pitchFamily="34" charset="-120"/>
+              </a:rPr>
+              <a:t>04</a:t>
+            </a:r>
+            <a:endParaRPr lang="en-US" sz="1400" dirty="0"/>
+          </a:p>
+        </p:txBody>
+      </p:sp>
+      <p:sp>
+        <p:nvSpPr>
+          <p:cNvPr id="22" name="Text 20"/>
+          <p:cNvSpPr/>
+          <p:nvPr/>
+        </p:nvSpPr>
+        <p:spPr>
+          <a:xfrm>
+            <a:off x="1508760" y="4187952"/>
+            <a:ext cx="2468880" cy="411480"/>
+          </a:xfrm>
+          <a:prstGeom prst="rect">
+            <a:avLst/>
+          </a:prstGeom>
+          <a:noFill/>
+          <a:ln/>
+        </p:spPr>
+        <p:txBody>
+          <a:bodyPr wrap="square" lIns="0" tIns="0" rIns="0" bIns="0" rtlCol="0" anchor="ctr"/>
+          <a:lstStyle/>
+          <a:p>
+            <a:pPr indent="0" marL="0">
+              <a:buNone/>
+            </a:pPr>
+            <a:r>
+              <a:rPr lang="en-US" sz="1350" b="1" dirty="0">
+                <a:solidFill>
+                  <a:srgbClr val="1B2340"/>
+                </a:solidFill>
+                <a:latin typeface="Calibri" pitchFamily="34" charset="0"/>
+                <a:ea typeface="Calibri" pitchFamily="34" charset="-122"/>
+                <a:cs typeface="Calibri" pitchFamily="34" charset="-120"/>
+              </a:rPr>
+              <a:t>Distribution</a:t>
+            </a:r>
+            <a:endParaRPr lang="en-US" sz="1350" dirty="0"/>
+          </a:p>
+        </p:txBody>
+      </p:sp>
+      <p:sp>
+        <p:nvSpPr>
+          <p:cNvPr id="23" name="Text 21"/>
+          <p:cNvSpPr/>
+          <p:nvPr/>
+        </p:nvSpPr>
+        <p:spPr>
+          <a:xfrm>
+            <a:off x="868680" y="4828032"/>
+            <a:ext cx="3063240" cy="1143000"/>
+          </a:xfrm>
+          <a:prstGeom prst="rect">
+            <a:avLst/>
+          </a:prstGeom>
+          <a:noFill/>
+          <a:ln/>
+        </p:spPr>
+        <p:txBody>
+          <a:bodyPr wrap="square" lIns="0" tIns="0" rIns="0" bIns="0" rtlCol="0" anchor="t"/>
+          <a:lstStyle/>
+          <a:p>
+            <a:pPr indent="0" marL="0">
+              <a:lnSpc>
+                <a:spcPct val="122000"/>
+              </a:lnSpc>
+              <a:buNone/>
+            </a:pPr>
+            <a:r>
+              <a:rPr lang="en-US" sz="980" dirty="0">
+                <a:solidFill>
+                  <a:srgbClr val="6B7390"/>
+                </a:solidFill>
+                <a:latin typeface="Calibri" pitchFamily="34" charset="0"/>
+                <a:ea typeface="Calibri" pitchFamily="34" charset="-122"/>
+                <a:cs typeface="Calibri" pitchFamily="34" charset="-120"/>
+              </a:rPr>
+              <a:t>requests + urllib3 Retry/HTTPAdapter (pooling, backoff); JSON Schema draft 2020-12 contract; Railway API Gateway</a:t>
+            </a:r>
+            <a:endParaRPr lang="en-US" sz="980" dirty="0"/>
+          </a:p>
+        </p:txBody>
+      </p:sp>
+      <p:sp>
+        <p:nvSpPr>
+          <p:cNvPr id="24" name="Shape 22"/>
+          <p:cNvSpPr/>
+          <p:nvPr/>
+        </p:nvSpPr>
+        <p:spPr>
+          <a:xfrm>
+            <a:off x="4389120" y="3913632"/>
+            <a:ext cx="3520440" cy="2240280"/>
+          </a:xfrm>
+          <a:prstGeom prst="roundRect">
+            <a:avLst>
+              <a:gd name="adj" fmla="val 3265"/>
+            </a:avLst>
+          </a:prstGeom>
+          <a:solidFill>
+            <a:srgbClr val="FFFFFF"/>
+          </a:solidFill>
+          <a:ln/>
+          <a:effectLst>
+            <a:outerShdw sx="100000" sy="100000" kx="0" ky="0" algn="bl" rotWithShape="0" blurRad="101600" dist="38100" dir="2700000">
+              <a:srgbClr val="000000">
+                <a:alpha val="12000"/>
+              </a:srgbClr>
+            </a:outerShdw>
+          </a:effectLst>
+        </p:spPr>
+      </p:sp>
+      <p:sp>
+        <p:nvSpPr>
+          <p:cNvPr id="25" name="Shape 23"/>
+          <p:cNvSpPr/>
+          <p:nvPr/>
+        </p:nvSpPr>
+        <p:spPr>
+          <a:xfrm>
+            <a:off x="4617720" y="4142232"/>
+            <a:ext cx="502920" cy="502920"/>
+          </a:xfrm>
+          <a:prstGeom prst="ellipse">
+            <a:avLst/>
+          </a:prstGeom>
+          <a:solidFill>
+            <a:srgbClr val="1B2340"/>
+          </a:solidFill>
+          <a:ln/>
+        </p:spPr>
+      </p:sp>
+      <p:sp>
+        <p:nvSpPr>
+          <p:cNvPr id="26" name="Text 24"/>
+          <p:cNvSpPr/>
+          <p:nvPr/>
+        </p:nvSpPr>
+        <p:spPr>
+          <a:xfrm>
+            <a:off x="4617720" y="4142232"/>
+            <a:ext cx="502920" cy="502920"/>
+          </a:xfrm>
+          <a:prstGeom prst="rect">
+            <a:avLst/>
+          </a:prstGeom>
+          <a:noFill/>
+          <a:ln/>
+        </p:spPr>
+        <p:txBody>
+          <a:bodyPr wrap="square" lIns="0" tIns="0" rIns="0" bIns="0" rtlCol="0" anchor="ctr"/>
+          <a:lstStyle/>
+          <a:p>
+            <a:pPr algn="ctr" indent="0" marL="0">
+              <a:buNone/>
+            </a:pPr>
+            <a:r>
+              <a:rPr lang="en-US" sz="1400" b="1" dirty="0">
+                <a:solidFill>
+                  <a:srgbClr val="E4C860"/>
+                </a:solidFill>
+                <a:latin typeface="Cambria" pitchFamily="34" charset="0"/>
+                <a:ea typeface="Cambria" pitchFamily="34" charset="-122"/>
+                <a:cs typeface="Cambria" pitchFamily="34" charset="-120"/>
+              </a:rPr>
+              <a:t>05</a:t>
+            </a:r>
+            <a:endParaRPr lang="en-US" sz="1400" dirty="0"/>
+          </a:p>
+        </p:txBody>
+      </p:sp>
+      <p:sp>
+        <p:nvSpPr>
+          <p:cNvPr id="27" name="Text 25"/>
+          <p:cNvSpPr/>
+          <p:nvPr/>
+        </p:nvSpPr>
+        <p:spPr>
+          <a:xfrm>
+            <a:off x="5257800" y="4187952"/>
+            <a:ext cx="2468880" cy="411480"/>
+          </a:xfrm>
+          <a:prstGeom prst="rect">
+            <a:avLst/>
+          </a:prstGeom>
+          <a:noFill/>
+          <a:ln/>
+        </p:spPr>
+        <p:txBody>
+          <a:bodyPr wrap="square" lIns="0" tIns="0" rIns="0" bIns="0" rtlCol="0" anchor="ctr"/>
+          <a:lstStyle/>
+          <a:p>
+            <a:pPr indent="0" marL="0">
+              <a:buNone/>
+            </a:pPr>
+            <a:r>
+              <a:rPr lang="en-US" sz="1350" b="1" dirty="0">
+                <a:solidFill>
+                  <a:srgbClr val="1B2340"/>
+                </a:solidFill>
+                <a:latin typeface="Calibri" pitchFamily="34" charset="0"/>
+                <a:ea typeface="Calibri" pitchFamily="34" charset="-122"/>
+                <a:cs typeface="Calibri" pitchFamily="34" charset="-120"/>
+              </a:rPr>
+              <a:t>Visualisation</a:t>
+            </a:r>
+            <a:endParaRPr lang="en-US" sz="1350" dirty="0"/>
+          </a:p>
+        </p:txBody>
+      </p:sp>
+      <p:sp>
+        <p:nvSpPr>
+          <p:cNvPr id="28" name="Text 26"/>
+          <p:cNvSpPr/>
+          <p:nvPr/>
+        </p:nvSpPr>
+        <p:spPr>
+          <a:xfrm>
+            <a:off x="4617720" y="4828032"/>
+            <a:ext cx="3063240" cy="1143000"/>
+          </a:xfrm>
+          <a:prstGeom prst="rect">
+            <a:avLst/>
+          </a:prstGeom>
+          <a:noFill/>
+          <a:ln/>
+        </p:spPr>
+        <p:txBody>
+          <a:bodyPr wrap="square" lIns="0" tIns="0" rIns="0" bIns="0" rtlCol="0" anchor="t"/>
+          <a:lstStyle/>
+          <a:p>
+            <a:pPr indent="0" marL="0">
+              <a:lnSpc>
+                <a:spcPct val="122000"/>
+              </a:lnSpc>
+              <a:buNone/>
+            </a:pPr>
+            <a:r>
+              <a:rPr lang="en-US" sz="980" dirty="0">
+                <a:solidFill>
+                  <a:srgbClr val="6B7390"/>
+                </a:solidFill>
+                <a:latin typeface="Calibri" pitchFamily="34" charset="0"/>
+                <a:ea typeface="Calibri" pitchFamily="34" charset="-122"/>
+                <a:cs typeface="Calibri" pitchFamily="34" charset="-120"/>
+              </a:rPr>
+              <a:t>pandas + numpy (Generator-seeded fixtures); matplotlib Agg backend + matplotlib.dates — real time-axis, not mplfinance</a:t>
+            </a:r>
+            <a:endParaRPr lang="en-US" sz="980" dirty="0"/>
+          </a:p>
+        </p:txBody>
+      </p:sp>
+      <p:sp>
+        <p:nvSpPr>
+          <p:cNvPr id="29" name="Shape 27"/>
+          <p:cNvSpPr/>
+          <p:nvPr/>
+        </p:nvSpPr>
+        <p:spPr>
+          <a:xfrm>
+            <a:off x="8138160" y="3913632"/>
+            <a:ext cx="3520440" cy="2240280"/>
+          </a:xfrm>
+          <a:prstGeom prst="roundRect">
+            <a:avLst>
+              <a:gd name="adj" fmla="val 3265"/>
+            </a:avLst>
+          </a:prstGeom>
+          <a:solidFill>
+            <a:srgbClr val="FFFFFF"/>
+          </a:solidFill>
+          <a:ln/>
+          <a:effectLst>
+            <a:outerShdw sx="100000" sy="100000" kx="0" ky="0" algn="bl" rotWithShape="0" blurRad="101600" dist="38100" dir="2700000">
+              <a:srgbClr val="000000">
+                <a:alpha val="12000"/>
+              </a:srgbClr>
+            </a:outerShdw>
+          </a:effectLst>
+        </p:spPr>
+      </p:sp>
+      <p:sp>
+        <p:nvSpPr>
+          <p:cNvPr id="30" name="Shape 28"/>
+          <p:cNvSpPr/>
+          <p:nvPr/>
+        </p:nvSpPr>
+        <p:spPr>
+          <a:xfrm>
+            <a:off x="8366760" y="4142232"/>
+            <a:ext cx="502920" cy="502920"/>
+          </a:xfrm>
+          <a:prstGeom prst="ellipse">
+            <a:avLst/>
+          </a:prstGeom>
+          <a:solidFill>
+            <a:srgbClr val="1B2340"/>
+          </a:solidFill>
+          <a:ln/>
+        </p:spPr>
+      </p:sp>
+      <p:sp>
+        <p:nvSpPr>
+          <p:cNvPr id="31" name="Text 29"/>
+          <p:cNvSpPr/>
+          <p:nvPr/>
+        </p:nvSpPr>
+        <p:spPr>
+          <a:xfrm>
+            <a:off x="8366760" y="4142232"/>
+            <a:ext cx="502920" cy="502920"/>
+          </a:xfrm>
+          <a:prstGeom prst="rect">
+            <a:avLst/>
+          </a:prstGeom>
+          <a:noFill/>
+          <a:ln/>
+        </p:spPr>
+        <p:txBody>
+          <a:bodyPr wrap="square" lIns="0" tIns="0" rIns="0" bIns="0" rtlCol="0" anchor="ctr"/>
+          <a:lstStyle/>
+          <a:p>
+            <a:pPr algn="ctr" indent="0" marL="0">
+              <a:buNone/>
+            </a:pPr>
+            <a:r>
+              <a:rPr lang="en-US" sz="1400" b="1" dirty="0">
+                <a:solidFill>
+                  <a:srgbClr val="E4C860"/>
+                </a:solidFill>
+                <a:latin typeface="Cambria" pitchFamily="34" charset="0"/>
+                <a:ea typeface="Cambria" pitchFamily="34" charset="-122"/>
+                <a:cs typeface="Cambria" pitchFamily="34" charset="-120"/>
+              </a:rPr>
+              <a:t>06</a:t>
+            </a:r>
+            <a:endParaRPr lang="en-US" sz="1400" dirty="0"/>
+          </a:p>
+        </p:txBody>
+      </p:sp>
+      <p:sp>
+        <p:nvSpPr>
+          <p:cNvPr id="32" name="Text 30"/>
+          <p:cNvSpPr/>
+          <p:nvPr/>
+        </p:nvSpPr>
+        <p:spPr>
+          <a:xfrm>
+            <a:off x="9006840" y="4187952"/>
+            <a:ext cx="2468880" cy="411480"/>
+          </a:xfrm>
+          <a:prstGeom prst="rect">
+            <a:avLst/>
+          </a:prstGeom>
+          <a:noFill/>
+          <a:ln/>
+        </p:spPr>
+        <p:txBody>
+          <a:bodyPr wrap="square" lIns="0" tIns="0" rIns="0" bIns="0" rtlCol="0" anchor="ctr"/>
+          <a:lstStyle/>
+          <a:p>
+            <a:pPr indent="0" marL="0">
+              <a:buNone/>
+            </a:pPr>
+            <a:r>
+              <a:rPr lang="en-US" sz="1350" b="1" dirty="0">
+                <a:solidFill>
+                  <a:srgbClr val="1B2340"/>
+                </a:solidFill>
+                <a:latin typeface="Calibri" pitchFamily="34" charset="0"/>
+                <a:ea typeface="Calibri" pitchFamily="34" charset="-122"/>
+                <a:cs typeface="Calibri" pitchFamily="34" charset="-120"/>
+              </a:rPr>
+              <a:t>Deployment &amp; Ops</a:t>
+            </a:r>
+            <a:endParaRPr lang="en-US" sz="1350" dirty="0"/>
+          </a:p>
+        </p:txBody>
+      </p:sp>
+      <p:sp>
+        <p:nvSpPr>
+          <p:cNvPr id="33" name="Text 31"/>
+          <p:cNvSpPr/>
+          <p:nvPr/>
+        </p:nvSpPr>
+        <p:spPr>
+          <a:xfrm>
+            <a:off x="8366760" y="4828032"/>
+            <a:ext cx="3063240" cy="1143000"/>
+          </a:xfrm>
+          <a:prstGeom prst="rect">
+            <a:avLst/>
+          </a:prstGeom>
+          <a:noFill/>
+          <a:ln/>
+        </p:spPr>
+        <p:txBody>
+          <a:bodyPr wrap="square" lIns="0" tIns="0" rIns="0" bIns="0" rtlCol="0" anchor="t"/>
+          <a:lstStyle/>
+          <a:p>
+            <a:pPr indent="0" marL="0">
+              <a:lnSpc>
+                <a:spcPct val="122000"/>
+              </a:lnSpc>
+              <a:buNone/>
+            </a:pPr>
+            <a:r>
+              <a:rPr lang="en-US" sz="980" dirty="0">
+                <a:solidFill>
+                  <a:srgbClr val="6B7390"/>
+                </a:solidFill>
+                <a:latin typeface="Calibri" pitchFamily="34" charset="0"/>
+                <a:ea typeface="Calibri" pitchFamily="34" charset="-122"/>
+                <a:cs typeface="Calibri" pitchFamily="34" charset="-120"/>
+              </a:rPr>
+              <a:t>NSSM (3 auto-restarting Windows services); RotatingFileHandler logs; signal-based graceful shutdown</a:t>
+            </a:r>
+            <a:endParaRPr lang="en-US" sz="980" dirty="0"/>
+          </a:p>
+        </p:txBody>
+      </p:sp>
+      <p:sp>
+        <p:nvSpPr>
+          <p:cNvPr id="34" name="Text 32"/>
+          <p:cNvSpPr/>
+          <p:nvPr/>
+        </p:nvSpPr>
+        <p:spPr>
+          <a:xfrm>
+            <a:off x="457200" y="6473952"/>
+            <a:ext cx="7315200" cy="274320"/>
+          </a:xfrm>
+          <a:prstGeom prst="rect">
+            <a:avLst/>
+          </a:prstGeom>
+          <a:noFill/>
+          <a:ln/>
+        </p:spPr>
+        <p:txBody>
+          <a:bodyPr wrap="square" lIns="0" tIns="0" rIns="0" bIns="0" rtlCol="0" anchor="ctr"/>
+          <a:lstStyle/>
+          <a:p>
+            <a:pPr indent="0" marL="0">
+              <a:buNone/>
+            </a:pPr>
+            <a:r>
+              <a:rPr lang="en-US" sz="900" dirty="0">
+                <a:solidFill>
+                  <a:srgbClr val="6B7390"/>
+                </a:solidFill>
+                <a:latin typeface="Calibri" pitchFamily="34" charset="0"/>
+                <a:ea typeface="Calibri" pitchFamily="34" charset="-122"/>
+                <a:cs typeface="Calibri" pitchFamily="34" charset="-120"/>
+              </a:rPr>
+              <a:t>Combined Architecture — Executive Overview</a:t>
+            </a:r>
+            <a:endParaRPr lang="en-US" sz="900" dirty="0"/>
+          </a:p>
+        </p:txBody>
+      </p:sp>
+      <p:sp>
+        <p:nvSpPr>
+          <p:cNvPr id="35" name="Text 33"/>
+          <p:cNvSpPr/>
+          <p:nvPr/>
+        </p:nvSpPr>
+        <p:spPr>
+          <a:xfrm>
+            <a:off x="11155680" y="6473952"/>
+            <a:ext cx="548640" cy="274320"/>
+          </a:xfrm>
+          <a:prstGeom prst="rect">
+            <a:avLst/>
+          </a:prstGeom>
+          <a:noFill/>
+          <a:ln/>
+        </p:spPr>
+        <p:txBody>
+          <a:bodyPr wrap="square" lIns="0" tIns="0" rIns="0" bIns="0" rtlCol="0" anchor="ctr"/>
+          <a:lstStyle/>
+          <a:p>
+            <a:pPr algn="r" indent="0" marL="0">
+              <a:buNone/>
+            </a:pPr>
+            <a:r>
+              <a:rPr lang="en-US" sz="900" dirty="0">
+                <a:solidFill>
+                  <a:srgbClr val="6B7390"/>
+                </a:solidFill>
+                <a:latin typeface="Calibri" pitchFamily="34" charset="0"/>
+                <a:ea typeface="Calibri" pitchFamily="34" charset="-122"/>
+                <a:cs typeface="Calibri" pitchFamily="34" charset="-120"/>
+              </a:rPr>
+              <a:t>11 / 12</a:t>
+            </a:r>
+            <a:endParaRPr lang="en-US" sz="900" dirty="0"/>
+          </a:p>
+        </p:txBody>
+      </p:sp>
+    </p:spTree>
+  </p:cSld>
+  <p:clrMapOvr>
+    <a:masterClrMapping/>
+  </p:clrMapOvr>
+</p:sld>
+</file>
+
+<file path=ppt/slides/slide12.xml><?xml version="1.0" encoding="utf-8"?>
+<p:sld xmlns:a="http://schemas.openxmlformats.org/drawingml/2006/main" xmlns:r="http://schemas.openxmlformats.org/officeDocument/2006/relationships" xmlns:p="http://schemas.openxmlformats.org/presentationml/2006/main">
+  <p:cSld name="Slide 12">
     <p:bg>
       <p:bgPr>
         <a:solidFill>
@@ -4310,7 +5456,7 @@
                 <a:ea typeface="Calibri" pitchFamily="34" charset="-122"/>
                 <a:cs typeface="Calibri" pitchFamily="34" charset="-120"/>
               </a:rPr>
-              <a:t>11 / 11</a:t>
+              <a:t>12 / 12</a:t>
             </a:r>
             <a:endParaRPr lang="en-US" sz="900" dirty="0"/>
           </a:p>
@@ -5278,7 +6424,7 @@
                 <a:ea typeface="Calibri" pitchFamily="34" charset="-122"/>
                 <a:cs typeface="Calibri" pitchFamily="34" charset="-120"/>
               </a:rPr>
-              <a:t>2 / 11</a:t>
+              <a:t>2 / 12</a:t>
             </a:r>
             <a:endParaRPr lang="en-US" sz="900" dirty="0"/>
           </a:p>
@@ -7247,7 +8393,7 @@
                 <a:ea typeface="Calibri" pitchFamily="34" charset="-122"/>
                 <a:cs typeface="Calibri" pitchFamily="34" charset="-120"/>
               </a:rPr>
-              <a:t>3 / 11</a:t>
+              <a:t>3 / 12</a:t>
             </a:r>
             <a:endParaRPr lang="en-US" sz="900" dirty="0"/>
           </a:p>
@@ -8367,7 +9513,7 @@
                 <a:ea typeface="Calibri" pitchFamily="34" charset="-122"/>
                 <a:cs typeface="Calibri" pitchFamily="34" charset="-120"/>
               </a:rPr>
-              <a:t>4 / 11</a:t>
+              <a:t>4 / 12</a:t>
             </a:r>
             <a:endParaRPr lang="en-US" sz="900" dirty="0"/>
           </a:p>
@@ -9400,7 +10546,7 @@
                 <a:ea typeface="Calibri" pitchFamily="34" charset="-122"/>
                 <a:cs typeface="Calibri" pitchFamily="34" charset="-120"/>
               </a:rPr>
-              <a:t>5 / 11</a:t>
+              <a:t>5 / 12</a:t>
             </a:r>
             <a:endParaRPr lang="en-US" sz="900" dirty="0"/>
           </a:p>
@@ -9471,7 +10617,7 @@
                 <a:ea typeface="Cambria" pitchFamily="34" charset="-122"/>
                 <a:cs typeface="Cambria" pitchFamily="34" charset="-120"/>
               </a:rPr>
-              <a:t>Validation &amp; Retry Logic</a:t>
+              <a:t>Why Keep Both Paths? — Necessity &amp; Trade-offs</a:t>
             </a:r>
             <a:endParaRPr lang="en-US" sz="2500" dirty="0"/>
           </a:p>
@@ -9510,7 +10656,7 @@
                 <a:ea typeface="Calibri" pitchFamily="34" charset="-122"/>
                 <a:cs typeface="Calibri" pitchFamily="34" charset="-120"/>
               </a:rPr>
-              <a:t>Four checks gate every cycle before a bar reaches market_data</a:t>
+              <a:t>Not required, don't collaborate, and trade speed for integrity in a structural way</a:t>
             </a:r>
             <a:endParaRPr lang="en-US" sz="1150" dirty="0"/>
           </a:p>
@@ -9524,576 +10670,16 @@
         </p:nvSpPr>
         <p:spPr>
           <a:xfrm>
-            <a:off x="640080" y="1417320"/>
-            <a:ext cx="457200" cy="457200"/>
-          </a:xfrm>
-          <a:prstGeom prst="ellipse">
-            <a:avLst/>
-          </a:prstGeom>
-          <a:solidFill>
-            <a:srgbClr val="1B2340"/>
-          </a:solidFill>
-          <a:ln/>
-        </p:spPr>
-      </p:sp>
-      <p:sp>
-        <p:nvSpPr>
-          <p:cNvPr id="5" name="Text 3"/>
-          <p:cNvSpPr/>
-          <p:nvPr/>
-        </p:nvSpPr>
-        <p:spPr>
-          <a:xfrm>
-            <a:off x="640080" y="1417320"/>
-            <a:ext cx="457200" cy="457200"/>
-          </a:xfrm>
-          <a:prstGeom prst="rect">
-            <a:avLst/>
-          </a:prstGeom>
-          <a:noFill/>
-          <a:ln/>
-        </p:spPr>
-        <p:txBody>
-          <a:bodyPr wrap="square" lIns="0" tIns="0" rIns="0" bIns="0" rtlCol="0" anchor="ctr"/>
-          <a:lstStyle/>
-          <a:p>
-            <a:pPr algn="ctr" indent="0" marL="0">
-              <a:buNone/>
-            </a:pPr>
-            <a:r>
-              <a:rPr lang="en-US" sz="1500" b="1" dirty="0">
-                <a:solidFill>
-                  <a:srgbClr val="E4C860"/>
-                </a:solidFill>
-                <a:latin typeface="Cambria" pitchFamily="34" charset="0"/>
-                <a:ea typeface="Cambria" pitchFamily="34" charset="-122"/>
-                <a:cs typeface="Cambria" pitchFamily="34" charset="-120"/>
-              </a:rPr>
-              <a:t>1</a:t>
-            </a:r>
-            <a:endParaRPr lang="en-US" sz="1500" dirty="0"/>
-          </a:p>
-        </p:txBody>
-      </p:sp>
-      <p:sp>
-        <p:nvSpPr>
-          <p:cNvPr id="6" name="Text 4"/>
-          <p:cNvSpPr/>
-          <p:nvPr/>
-        </p:nvSpPr>
-        <p:spPr>
-          <a:xfrm>
-            <a:off x="1234440" y="1371600"/>
-            <a:ext cx="5577840" cy="320040"/>
-          </a:xfrm>
-          <a:prstGeom prst="rect">
-            <a:avLst/>
-          </a:prstGeom>
-          <a:noFill/>
-          <a:ln/>
-        </p:spPr>
-        <p:txBody>
-          <a:bodyPr wrap="square" lIns="0" tIns="0" rIns="0" bIns="0" rtlCol="0" anchor="ctr"/>
-          <a:lstStyle/>
-          <a:p>
-            <a:pPr indent="0" marL="0">
-              <a:buNone/>
-            </a:pPr>
-            <a:r>
-              <a:rPr lang="en-US" sz="1250" b="1" dirty="0">
-                <a:solidFill>
-                  <a:srgbClr val="1B2340"/>
-                </a:solidFill>
-                <a:latin typeface="Calibri" pitchFamily="34" charset="0"/>
-                <a:ea typeface="Calibri" pitchFamily="34" charset="-122"/>
-                <a:cs typeface="Calibri" pitchFamily="34" charset="-120"/>
-              </a:rPr>
-              <a:t>Cross-source key agreement</a:t>
-            </a:r>
-            <a:endParaRPr lang="en-US" sz="1250" dirty="0"/>
-          </a:p>
-        </p:txBody>
-      </p:sp>
-      <p:sp>
-        <p:nvSpPr>
-          <p:cNvPr id="7" name="Text 5"/>
-          <p:cNvSpPr/>
-          <p:nvPr/>
-        </p:nvSpPr>
-        <p:spPr>
-          <a:xfrm>
-            <a:off x="1234440" y="1691640"/>
-            <a:ext cx="5623560" cy="685800"/>
-          </a:xfrm>
-          <a:prstGeom prst="rect">
-            <a:avLst/>
-          </a:prstGeom>
-          <a:noFill/>
-          <a:ln/>
-        </p:spPr>
-        <p:txBody>
-          <a:bodyPr wrap="square" lIns="0" tIns="0" rIns="0" bIns="0" rtlCol="0" anchor="ctr"/>
-          <a:lstStyle/>
-          <a:p>
-            <a:pPr indent="0" marL="0">
-              <a:lnSpc>
-                <a:spcPct val="118000"/>
-              </a:lnSpc>
-              <a:buNone/>
-            </a:pPr>
-            <a:r>
-              <a:rPr lang="en-US" sz="1000" dirty="0">
-                <a:solidFill>
-                  <a:srgbClr val="6B7390"/>
-                </a:solidFill>
-                <a:latin typeface="Calibri" pitchFamily="34" charset="0"/>
-                <a:ea typeface="Calibri" pitchFamily="34" charset="-122"/>
-                <a:cs typeface="Calibri" pitchFamily="34" charset="-120"/>
-              </a:rPr>
-              <a:t>For every timestamp present in ≥2 of the 11 per-bar sources: symbol and timeframe must match exactly; close must agree within CLOSE_TOLERANCE = 0.01 (one XAUUSD point).</a:t>
-            </a:r>
-            <a:endParaRPr lang="en-US" sz="1000" dirty="0"/>
-          </a:p>
-        </p:txBody>
-      </p:sp>
-      <p:sp>
-        <p:nvSpPr>
-          <p:cNvPr id="8" name="Shape 6"/>
-          <p:cNvSpPr/>
-          <p:nvPr/>
-        </p:nvSpPr>
-        <p:spPr>
-          <a:xfrm>
-            <a:off x="640080" y="2496312"/>
-            <a:ext cx="457200" cy="457200"/>
-          </a:xfrm>
-          <a:prstGeom prst="ellipse">
-            <a:avLst/>
-          </a:prstGeom>
-          <a:solidFill>
-            <a:srgbClr val="1B2340"/>
-          </a:solidFill>
-          <a:ln/>
-        </p:spPr>
-      </p:sp>
-      <p:sp>
-        <p:nvSpPr>
-          <p:cNvPr id="9" name="Text 7"/>
-          <p:cNvSpPr/>
-          <p:nvPr/>
-        </p:nvSpPr>
-        <p:spPr>
-          <a:xfrm>
-            <a:off x="640080" y="2496312"/>
-            <a:ext cx="457200" cy="457200"/>
-          </a:xfrm>
-          <a:prstGeom prst="rect">
-            <a:avLst/>
-          </a:prstGeom>
-          <a:noFill/>
-          <a:ln/>
-        </p:spPr>
-        <p:txBody>
-          <a:bodyPr wrap="square" lIns="0" tIns="0" rIns="0" bIns="0" rtlCol="0" anchor="ctr"/>
-          <a:lstStyle/>
-          <a:p>
-            <a:pPr algn="ctr" indent="0" marL="0">
-              <a:buNone/>
-            </a:pPr>
-            <a:r>
-              <a:rPr lang="en-US" sz="1500" b="1" dirty="0">
-                <a:solidFill>
-                  <a:srgbClr val="E4C860"/>
-                </a:solidFill>
-                <a:latin typeface="Cambria" pitchFamily="34" charset="0"/>
-                <a:ea typeface="Cambria" pitchFamily="34" charset="-122"/>
-                <a:cs typeface="Cambria" pitchFamily="34" charset="-120"/>
-              </a:rPr>
-              <a:t>2</a:t>
-            </a:r>
-            <a:endParaRPr lang="en-US" sz="1500" dirty="0"/>
-          </a:p>
-        </p:txBody>
-      </p:sp>
-      <p:sp>
-        <p:nvSpPr>
-          <p:cNvPr id="10" name="Text 8"/>
-          <p:cNvSpPr/>
-          <p:nvPr/>
-        </p:nvSpPr>
-        <p:spPr>
-          <a:xfrm>
-            <a:off x="1234440" y="2450592"/>
-            <a:ext cx="5577840" cy="320040"/>
-          </a:xfrm>
-          <a:prstGeom prst="rect">
-            <a:avLst/>
-          </a:prstGeom>
-          <a:noFill/>
-          <a:ln/>
-        </p:spPr>
-        <p:txBody>
-          <a:bodyPr wrap="square" lIns="0" tIns="0" rIns="0" bIns="0" rtlCol="0" anchor="ctr"/>
-          <a:lstStyle/>
-          <a:p>
-            <a:pPr indent="0" marL="0">
-              <a:buNone/>
-            </a:pPr>
-            <a:r>
-              <a:rPr lang="en-US" sz="1250" b="1" dirty="0">
-                <a:solidFill>
-                  <a:srgbClr val="1B2340"/>
-                </a:solidFill>
-                <a:latin typeface="Calibri" pitchFamily="34" charset="0"/>
-                <a:ea typeface="Calibri" pitchFamily="34" charset="-122"/>
-                <a:cs typeface="Calibri" pitchFamily="34" charset="-120"/>
-              </a:rPr>
-              <a:t>ZigZag-as-subset check</a:t>
-            </a:r>
-            <a:endParaRPr lang="en-US" sz="1250" dirty="0"/>
-          </a:p>
-        </p:txBody>
-      </p:sp>
-      <p:sp>
-        <p:nvSpPr>
-          <p:cNvPr id="11" name="Text 9"/>
-          <p:cNvSpPr/>
-          <p:nvPr/>
-        </p:nvSpPr>
-        <p:spPr>
-          <a:xfrm>
-            <a:off x="1234440" y="2770632"/>
-            <a:ext cx="5623560" cy="685800"/>
-          </a:xfrm>
-          <a:prstGeom prst="rect">
-            <a:avLst/>
-          </a:prstGeom>
-          <a:noFill/>
-          <a:ln/>
-        </p:spPr>
-        <p:txBody>
-          <a:bodyPr wrap="square" lIns="0" tIns="0" rIns="0" bIns="0" rtlCol="0" anchor="ctr"/>
-          <a:lstStyle/>
-          <a:p>
-            <a:pPr indent="0" marL="0">
-              <a:lnSpc>
-                <a:spcPct val="118000"/>
-              </a:lnSpc>
-              <a:buNone/>
-            </a:pPr>
-            <a:r>
-              <a:rPr lang="en-US" sz="1000" dirty="0">
-                <a:solidFill>
-                  <a:srgbClr val="6B7390"/>
-                </a:solidFill>
-                <a:latin typeface="Calibri" pitchFamily="34" charset="0"/>
-                <a:ea typeface="Calibri" pitchFamily="34" charset="-122"/>
-                <a:cs typeface="Calibri" pitchFamily="34" charset="-120"/>
-              </a:rPr>
-              <a:t>Every ZigZag pivot's timestamp must exist on the OHLCV spine, with its close matching the OHLCV close within the same tolerance.</a:t>
-            </a:r>
-            <a:endParaRPr lang="en-US" sz="1000" dirty="0"/>
-          </a:p>
-        </p:txBody>
-      </p:sp>
-      <p:sp>
-        <p:nvSpPr>
-          <p:cNvPr id="12" name="Shape 10"/>
-          <p:cNvSpPr/>
-          <p:nvPr/>
-        </p:nvSpPr>
-        <p:spPr>
-          <a:xfrm>
-            <a:off x="640080" y="3575304"/>
-            <a:ext cx="457200" cy="457200"/>
-          </a:xfrm>
-          <a:prstGeom prst="ellipse">
-            <a:avLst/>
-          </a:prstGeom>
-          <a:solidFill>
-            <a:srgbClr val="1B2340"/>
-          </a:solidFill>
-          <a:ln/>
-        </p:spPr>
-      </p:sp>
-      <p:sp>
-        <p:nvSpPr>
-          <p:cNvPr id="13" name="Text 11"/>
-          <p:cNvSpPr/>
-          <p:nvPr/>
-        </p:nvSpPr>
-        <p:spPr>
-          <a:xfrm>
-            <a:off x="640080" y="3575304"/>
-            <a:ext cx="457200" cy="457200"/>
-          </a:xfrm>
-          <a:prstGeom prst="rect">
-            <a:avLst/>
-          </a:prstGeom>
-          <a:noFill/>
-          <a:ln/>
-        </p:spPr>
-        <p:txBody>
-          <a:bodyPr wrap="square" lIns="0" tIns="0" rIns="0" bIns="0" rtlCol="0" anchor="ctr"/>
-          <a:lstStyle/>
-          <a:p>
-            <a:pPr algn="ctr" indent="0" marL="0">
-              <a:buNone/>
-            </a:pPr>
-            <a:r>
-              <a:rPr lang="en-US" sz="1500" b="1" dirty="0">
-                <a:solidFill>
-                  <a:srgbClr val="E4C860"/>
-                </a:solidFill>
-                <a:latin typeface="Cambria" pitchFamily="34" charset="0"/>
-                <a:ea typeface="Cambria" pitchFamily="34" charset="-122"/>
-                <a:cs typeface="Cambria" pitchFamily="34" charset="-120"/>
-              </a:rPr>
-              <a:t>3</a:t>
-            </a:r>
-            <a:endParaRPr lang="en-US" sz="1500" dirty="0"/>
-          </a:p>
-        </p:txBody>
-      </p:sp>
-      <p:sp>
-        <p:nvSpPr>
-          <p:cNvPr id="14" name="Text 12"/>
-          <p:cNvSpPr/>
-          <p:nvPr/>
-        </p:nvSpPr>
-        <p:spPr>
-          <a:xfrm>
-            <a:off x="1234440" y="3529584"/>
-            <a:ext cx="5577840" cy="320040"/>
-          </a:xfrm>
-          <a:prstGeom prst="rect">
-            <a:avLst/>
-          </a:prstGeom>
-          <a:noFill/>
-          <a:ln/>
-        </p:spPr>
-        <p:txBody>
-          <a:bodyPr wrap="square" lIns="0" tIns="0" rIns="0" bIns="0" rtlCol="0" anchor="ctr"/>
-          <a:lstStyle/>
-          <a:p>
-            <a:pPr indent="0" marL="0">
-              <a:buNone/>
-            </a:pPr>
-            <a:r>
-              <a:rPr lang="en-US" sz="1250" b="1" dirty="0">
-                <a:solidFill>
-                  <a:srgbClr val="1B2340"/>
-                </a:solidFill>
-                <a:latin typeface="Calibri" pitchFamily="34" charset="0"/>
-                <a:ea typeface="Calibri" pitchFamily="34" charset="-122"/>
-                <a:cs typeface="Calibri" pitchFamily="34" charset="-120"/>
-              </a:rPr>
-              <a:t>Completeness / staleness check</a:t>
-            </a:r>
-            <a:endParaRPr lang="en-US" sz="1250" dirty="0"/>
-          </a:p>
-        </p:txBody>
-      </p:sp>
-      <p:sp>
-        <p:nvSpPr>
-          <p:cNvPr id="15" name="Text 13"/>
-          <p:cNvSpPr/>
-          <p:nvPr/>
-        </p:nvSpPr>
-        <p:spPr>
-          <a:xfrm>
-            <a:off x="1234440" y="3849624"/>
-            <a:ext cx="5623560" cy="685800"/>
-          </a:xfrm>
-          <a:prstGeom prst="rect">
-            <a:avLst/>
-          </a:prstGeom>
-          <a:noFill/>
-          <a:ln/>
-        </p:spPr>
-        <p:txBody>
-          <a:bodyPr wrap="square" lIns="0" tIns="0" rIns="0" bIns="0" rtlCol="0" anchor="ctr"/>
-          <a:lstStyle/>
-          <a:p>
-            <a:pPr indent="0" marL="0">
-              <a:lnSpc>
-                <a:spcPct val="118000"/>
-              </a:lnSpc>
-              <a:buNone/>
-            </a:pPr>
-            <a:r>
-              <a:rPr lang="en-US" sz="1000" dirty="0">
-                <a:solidFill>
-                  <a:srgbClr val="6B7390"/>
-                </a:solidFill>
-                <a:latin typeface="Calibri" pitchFamily="34" charset="0"/>
-                <a:ea typeface="Calibri" pitchFamily="34" charset="-122"/>
-                <a:cs typeface="Calibri" pitchFamily="34" charset="-120"/>
-              </a:rPr>
-              <a:t>All 11 per-bar sources must have staged rows; the latest OHLCV bar must appear in every source — catches one indicator silently falling behind.</a:t>
-            </a:r>
-            <a:endParaRPr lang="en-US" sz="1000" dirty="0"/>
-          </a:p>
-        </p:txBody>
-      </p:sp>
-      <p:sp>
-        <p:nvSpPr>
-          <p:cNvPr id="16" name="Shape 14"/>
-          <p:cNvSpPr/>
-          <p:nvPr/>
-        </p:nvSpPr>
-        <p:spPr>
-          <a:xfrm>
-            <a:off x="640080" y="4654296"/>
-            <a:ext cx="457200" cy="457200"/>
-          </a:xfrm>
-          <a:prstGeom prst="ellipse">
-            <a:avLst/>
-          </a:prstGeom>
-          <a:solidFill>
-            <a:srgbClr val="1B2340"/>
-          </a:solidFill>
-          <a:ln/>
-        </p:spPr>
-      </p:sp>
-      <p:sp>
-        <p:nvSpPr>
-          <p:cNvPr id="17" name="Text 15"/>
-          <p:cNvSpPr/>
-          <p:nvPr/>
-        </p:nvSpPr>
-        <p:spPr>
-          <a:xfrm>
-            <a:off x="640080" y="4654296"/>
-            <a:ext cx="457200" cy="457200"/>
-          </a:xfrm>
-          <a:prstGeom prst="rect">
-            <a:avLst/>
-          </a:prstGeom>
-          <a:noFill/>
-          <a:ln/>
-        </p:spPr>
-        <p:txBody>
-          <a:bodyPr wrap="square" lIns="0" tIns="0" rIns="0" bIns="0" rtlCol="0" anchor="ctr"/>
-          <a:lstStyle/>
-          <a:p>
-            <a:pPr algn="ctr" indent="0" marL="0">
-              <a:buNone/>
-            </a:pPr>
-            <a:r>
-              <a:rPr lang="en-US" sz="1500" b="1" dirty="0">
-                <a:solidFill>
-                  <a:srgbClr val="E4C860"/>
-                </a:solidFill>
-                <a:latin typeface="Cambria" pitchFamily="34" charset="0"/>
-                <a:ea typeface="Cambria" pitchFamily="34" charset="-122"/>
-                <a:cs typeface="Cambria" pitchFamily="34" charset="-120"/>
-              </a:rPr>
-              <a:t>4</a:t>
-            </a:r>
-            <a:endParaRPr lang="en-US" sz="1500" dirty="0"/>
-          </a:p>
-        </p:txBody>
-      </p:sp>
-      <p:sp>
-        <p:nvSpPr>
-          <p:cNvPr id="18" name="Text 16"/>
-          <p:cNvSpPr/>
-          <p:nvPr/>
-        </p:nvSpPr>
-        <p:spPr>
-          <a:xfrm>
-            <a:off x="1234440" y="4608576"/>
-            <a:ext cx="5577840" cy="320040"/>
-          </a:xfrm>
-          <a:prstGeom prst="rect">
-            <a:avLst/>
-          </a:prstGeom>
-          <a:noFill/>
-          <a:ln/>
-        </p:spPr>
-        <p:txBody>
-          <a:bodyPr wrap="square" lIns="0" tIns="0" rIns="0" bIns="0" rtlCol="0" anchor="ctr"/>
-          <a:lstStyle/>
-          <a:p>
-            <a:pPr indent="0" marL="0">
-              <a:buNone/>
-            </a:pPr>
-            <a:r>
-              <a:rPr lang="en-US" sz="1250" b="1" dirty="0">
-                <a:solidFill>
-                  <a:srgbClr val="1B2340"/>
-                </a:solidFill>
-                <a:latin typeface="Calibri" pitchFamily="34" charset="0"/>
-                <a:ea typeface="Calibri" pitchFamily="34" charset="-122"/>
-                <a:cs typeface="Calibri" pitchFamily="34" charset="-120"/>
-              </a:rPr>
-              <a:t>Market-hours gate</a:t>
-            </a:r>
-            <a:endParaRPr lang="en-US" sz="1250" dirty="0"/>
-          </a:p>
-        </p:txBody>
-      </p:sp>
-      <p:sp>
-        <p:nvSpPr>
-          <p:cNvPr id="19" name="Text 17"/>
-          <p:cNvSpPr/>
-          <p:nvPr/>
-        </p:nvSpPr>
-        <p:spPr>
-          <a:xfrm>
-            <a:off x="1234440" y="4928616"/>
-            <a:ext cx="5623560" cy="685800"/>
-          </a:xfrm>
-          <a:prstGeom prst="rect">
-            <a:avLst/>
-          </a:prstGeom>
-          <a:noFill/>
-          <a:ln/>
-        </p:spPr>
-        <p:txBody>
-          <a:bodyPr wrap="square" lIns="0" tIns="0" rIns="0" bIns="0" rtlCol="0" anchor="ctr"/>
-          <a:lstStyle/>
-          <a:p>
-            <a:pPr indent="0" marL="0">
-              <a:lnSpc>
-                <a:spcPct val="118000"/>
-              </a:lnSpc>
-              <a:buNone/>
-            </a:pPr>
-            <a:r>
-              <a:rPr lang="en-US" sz="1000" dirty="0">
-                <a:solidFill>
-                  <a:srgbClr val="6B7390"/>
-                </a:solidFill>
-                <a:latin typeface="Calibri" pitchFamily="34" charset="0"/>
-                <a:ea typeface="Calibri" pitchFamily="34" charset="-122"/>
-                <a:cs typeface="Calibri" pitchFamily="34" charset="-120"/>
-              </a:rPr>
-              <a:t>XAUUSD Mon–Fri 01:01–23:59 broker-server time (GMT+2/+3, US-DST-aware, converted to UTC). Closed-market cycles are skipped without burning a retry attempt.</a:t>
-            </a:r>
-            <a:endParaRPr lang="en-US" sz="1000" dirty="0"/>
-          </a:p>
-        </p:txBody>
-      </p:sp>
-      <p:sp>
-        <p:nvSpPr>
-          <p:cNvPr id="20" name="Shape 18"/>
-          <p:cNvSpPr/>
-          <p:nvPr/>
-        </p:nvSpPr>
-        <p:spPr>
-          <a:xfrm>
-            <a:off x="7178040" y="1417320"/>
-            <a:ext cx="4343400" cy="4892040"/>
+            <a:off x="640080" y="1280160"/>
+            <a:ext cx="5257800" cy="1554480"/>
           </a:xfrm>
           <a:prstGeom prst="roundRect">
             <a:avLst>
-              <a:gd name="adj" fmla="val 1684"/>
+              <a:gd name="adj" fmla="val 4706"/>
             </a:avLst>
           </a:prstGeom>
           <a:solidFill>
-            <a:srgbClr val="1B2340"/>
+            <a:srgbClr val="FFFFFF"/>
           </a:solidFill>
           <a:ln/>
           <a:effectLst>
@@ -10107,38 +10693,41 @@
       </p:sp>
       <p:sp>
         <p:nvSpPr>
-          <p:cNvPr id="21" name="Text 19"/>
-          <p:cNvSpPr/>
-          <p:nvPr/>
-        </p:nvSpPr>
-        <p:spPr>
-          <a:xfrm>
-            <a:off x="7452360" y="1645920"/>
-            <a:ext cx="3840480" cy="274320"/>
-          </a:xfrm>
-          <a:prstGeom prst="rect">
-            <a:avLst/>
-          </a:prstGeom>
-          <a:noFill/>
-          <a:ln/>
-        </p:spPr>
-        <p:txBody>
-          <a:bodyPr wrap="square" lIns="0" tIns="0" rIns="0" bIns="0" rtlCol="0" anchor="ctr"/>
-          <a:lstStyle/>
-          <a:p>
-            <a:pPr indent="0" marL="0">
-              <a:buNone/>
-            </a:pPr>
-            <a:r>
-              <a:rPr lang="en-US" sz="1100" b="1" spc="200" kern="0" dirty="0">
-                <a:solidFill>
-                  <a:srgbClr val="C9A227"/>
-                </a:solidFill>
-                <a:latin typeface="Calibri" pitchFamily="34" charset="0"/>
-                <a:ea typeface="Calibri" pitchFamily="34" charset="-122"/>
-                <a:cs typeface="Calibri" pitchFamily="34" charset="-120"/>
-              </a:rPr>
-              <a:t>CYCLE LIFECYCLE</a:t>
+          <p:cNvPr id="5" name="Text 3"/>
+          <p:cNvSpPr/>
+          <p:nvPr/>
+        </p:nvSpPr>
+        <p:spPr>
+          <a:xfrm>
+            <a:off x="914400" y="1463040"/>
+            <a:ext cx="4709160" cy="365760"/>
+          </a:xfrm>
+          <a:prstGeom prst="rect">
+            <a:avLst/>
+          </a:prstGeom>
+          <a:noFill/>
+          <a:ln/>
+        </p:spPr>
+        <p:txBody>
+          <a:bodyPr wrap="square" lIns="0" tIns="0" rIns="0" bIns="0" rtlCol="0" anchor="ctr"/>
+          <a:lstStyle/>
+          <a:p>
+            <a:pPr indent="0" marL="0">
+              <a:lnSpc>
+                <a:spcPct val="110000"/>
+              </a:lnSpc>
+              <a:buNone/>
+            </a:pPr>
+            <a:r>
+              <a:rPr lang="en-US" sz="1100" b="1" dirty="0">
+                <a:solidFill>
+                  <a:srgbClr val="1B2340"/>
+                </a:solidFill>
+                <a:latin typeface="Calibri" pitchFamily="34" charset="0"/>
+                <a:ea typeface="Calibri" pitchFamily="34" charset="-122"/>
+                <a:cs typeface="Calibri" pitchFamily="34" charset="-120"/>
+              </a:rPr>
+              <a:t>STILL RETAINED — for two reasons, neither required</a:t>
             </a:r>
             <a:endParaRPr lang="en-US" sz="1100" dirty="0"/>
           </a:p>
@@ -10146,141 +10735,321 @@
       </p:sp>
       <p:sp>
         <p:nvSpPr>
-          <p:cNvPr id="22" name="Shape 20"/>
-          <p:cNvSpPr/>
-          <p:nvPr/>
-        </p:nvSpPr>
-        <p:spPr>
-          <a:xfrm>
-            <a:off x="7452360" y="2057400"/>
-            <a:ext cx="3794760" cy="457200"/>
+          <p:cNvPr id="6" name="Text 4"/>
+          <p:cNvSpPr/>
+          <p:nvPr/>
+        </p:nvSpPr>
+        <p:spPr>
+          <a:xfrm>
+            <a:off x="914400" y="1828800"/>
+            <a:ext cx="4709160" cy="822960"/>
+          </a:xfrm>
+          <a:prstGeom prst="rect">
+            <a:avLst/>
+          </a:prstGeom>
+          <a:noFill/>
+          <a:ln/>
+        </p:spPr>
+        <p:txBody>
+          <a:bodyPr wrap="square" lIns="0" tIns="0" rIns="0" bIns="0" rtlCol="0" anchor="ctr"/>
+          <a:lstStyle/>
+          <a:p>
+            <a:pPr indent="0" marL="0">
+              <a:lnSpc>
+                <a:spcPct val="120000"/>
+              </a:lnSpc>
+              <a:buNone/>
+            </a:pPr>
+            <a:r>
+              <a:rPr lang="en-US" sz="950" dirty="0">
+                <a:solidFill>
+                  <a:srgbClr val="3C4560"/>
+                </a:solidFill>
+                <a:latin typeface="Calibri" pitchFamily="34" charset="0"/>
+                <a:ea typeface="Calibri" pitchFamily="34" charset="-122"/>
+                <a:cs typeface="Calibri" pitchFamily="34" charset="-120"/>
+              </a:rPr>
+              <a:t>Historical continuity — the pre-v6 (v2.28) design, kept cheap as a reference/rollback point rather than deleted. Future low-latency optionality — the sub-ms push already exists and is schema-correct (v2.29.1) if a future consumer ever needs near-real-time data. It is NOT for keeping the indicators running — see right.</a:t>
+            </a:r>
+            <a:endParaRPr lang="en-US" sz="950" dirty="0"/>
+          </a:p>
+        </p:txBody>
+      </p:sp>
+      <p:sp>
+        <p:nvSpPr>
+          <p:cNvPr id="7" name="Shape 5"/>
+          <p:cNvSpPr/>
+          <p:nvPr/>
+        </p:nvSpPr>
+        <p:spPr>
+          <a:xfrm>
+            <a:off x="6263640" y="1280160"/>
+            <a:ext cx="5257800" cy="1554480"/>
           </a:xfrm>
           <a:prstGeom prst="roundRect">
             <a:avLst>
-              <a:gd name="adj" fmla="val 12000"/>
+              <a:gd name="adj" fmla="val 4706"/>
             </a:avLst>
           </a:prstGeom>
           <a:solidFill>
-            <a:srgbClr val="141A32"/>
+            <a:srgbClr val="FFFFFF"/>
           </a:solidFill>
           <a:ln/>
-        </p:spPr>
-      </p:sp>
-      <p:sp>
-        <p:nvSpPr>
-          <p:cNvPr id="23" name="Text 21"/>
-          <p:cNvSpPr/>
-          <p:nvPr/>
-        </p:nvSpPr>
-        <p:spPr>
-          <a:xfrm>
-            <a:off x="7452360" y="2057400"/>
-            <a:ext cx="3794760" cy="457200"/>
-          </a:xfrm>
-          <a:prstGeom prst="rect">
-            <a:avLst/>
-          </a:prstGeom>
-          <a:noFill/>
-          <a:ln/>
-        </p:spPr>
-        <p:txBody>
-          <a:bodyPr wrap="square" lIns="0" tIns="0" rIns="0" bIns="0" rtlCol="0" anchor="ctr"/>
-          <a:lstStyle/>
-          <a:p>
-            <a:pPr algn="ctr" indent="0" marL="0">
-              <a:buNone/>
-            </a:pPr>
-            <a:r>
-              <a:rPr lang="en-US" sz="1150" b="1" dirty="0">
-                <a:solidFill>
-                  <a:srgbClr val="FFFFFF"/>
-                </a:solidFill>
-                <a:latin typeface="Calibri" pitchFamily="34" charset="0"/>
-                <a:ea typeface="Calibri" pitchFamily="34" charset="-122"/>
-                <a:cs typeface="Calibri" pitchFamily="34" charset="-120"/>
-              </a:rPr>
-              <a:t>collecting</a:t>
-            </a:r>
-            <a:endParaRPr lang="en-US" sz="1150" dirty="0"/>
-          </a:p>
-        </p:txBody>
-      </p:sp>
-      <p:sp>
-        <p:nvSpPr>
-          <p:cNvPr id="24" name="Shape 22"/>
-          <p:cNvSpPr/>
-          <p:nvPr/>
-        </p:nvSpPr>
-        <p:spPr>
-          <a:xfrm>
-            <a:off x="7452360" y="2624328"/>
-            <a:ext cx="3794760" cy="457200"/>
+          <a:effectLst>
+            <a:outerShdw sx="100000" sy="100000" kx="0" ky="0" algn="bl" rotWithShape="0" blurRad="101600" dist="38100" dir="2700000">
+              <a:srgbClr val="000000">
+                <a:alpha val="12000"/>
+              </a:srgbClr>
+            </a:outerShdw>
+          </a:effectLst>
+        </p:spPr>
+      </p:sp>
+      <p:sp>
+        <p:nvSpPr>
+          <p:cNvPr id="8" name="Text 6"/>
+          <p:cNvSpPr/>
+          <p:nvPr/>
+        </p:nvSpPr>
+        <p:spPr>
+          <a:xfrm>
+            <a:off x="6537960" y="1463040"/>
+            <a:ext cx="4709160" cy="365760"/>
+          </a:xfrm>
+          <a:prstGeom prst="rect">
+            <a:avLst/>
+          </a:prstGeom>
+          <a:noFill/>
+          <a:ln/>
+        </p:spPr>
+        <p:txBody>
+          <a:bodyPr wrap="square" lIns="0" tIns="0" rIns="0" bIns="0" rtlCol="0" anchor="ctr"/>
+          <a:lstStyle/>
+          <a:p>
+            <a:pPr indent="0" marL="0">
+              <a:lnSpc>
+                <a:spcPct val="110000"/>
+              </a:lnSpc>
+              <a:buNone/>
+            </a:pPr>
+            <a:r>
+              <a:rPr lang="en-US" sz="1100" b="1" dirty="0">
+                <a:solidFill>
+                  <a:srgbClr val="1B2340"/>
+                </a:solidFill>
+                <a:latin typeface="Calibri" pitchFamily="34" charset="0"/>
+                <a:ea typeface="Calibri" pitchFamily="34" charset="-122"/>
+                <a:cs typeface="Calibri" pitchFamily="34" charset="-120"/>
+              </a:rPr>
+              <a:t>INDICATORS ARE SELF-SUFFICIENT — no EA required</a:t>
+            </a:r>
+            <a:endParaRPr lang="en-US" sz="1100" dirty="0"/>
+          </a:p>
+        </p:txBody>
+      </p:sp>
+      <p:sp>
+        <p:nvSpPr>
+          <p:cNvPr id="9" name="Text 7"/>
+          <p:cNvSpPr/>
+          <p:nvPr/>
+        </p:nvSpPr>
+        <p:spPr>
+          <a:xfrm>
+            <a:off x="6537960" y="1828800"/>
+            <a:ext cx="4709160" cy="822960"/>
+          </a:xfrm>
+          <a:prstGeom prst="rect">
+            <a:avLst/>
+          </a:prstGeom>
+          <a:noFill/>
+          <a:ln/>
+        </p:spPr>
+        <p:txBody>
+          <a:bodyPr wrap="square" lIns="0" tIns="0" rIns="0" bIns="0" rtlCol="0" anchor="ctr"/>
+          <a:lstStyle/>
+          <a:p>
+            <a:pPr indent="0" marL="0">
+              <a:lnSpc>
+                <a:spcPct val="120000"/>
+              </a:lnSpc>
+              <a:buNone/>
+            </a:pPr>
+            <a:r>
+              <a:rPr lang="en-US" sz="950" dirty="0">
+                <a:solidFill>
+                  <a:srgbClr val="3C4560"/>
+                </a:solidFill>
+                <a:latin typeface="Calibri" pitchFamily="34" charset="0"/>
+                <a:ea typeface="Calibri" pitchFamily="34" charset="-122"/>
+                <a:cs typeface="Calibri" pitchFamily="34" charset="-120"/>
+              </a:rPr>
+              <a:t>Each of the 12 .mq5 files is itself an indicator (#property indicator_chart_window) with its own OnInit()→EventSetTimer(1) and OnTimer() checking InpExportSecond. Attaching it to a chart is enough — it auto-exports every minute with zero EA involvement, confirmed directly in source.</a:t>
+            </a:r>
+            <a:endParaRPr lang="en-US" sz="950" dirty="0"/>
+          </a:p>
+        </p:txBody>
+      </p:sp>
+      <p:sp>
+        <p:nvSpPr>
+          <p:cNvPr id="10" name="Shape 8"/>
+          <p:cNvSpPr/>
+          <p:nvPr/>
+        </p:nvSpPr>
+        <p:spPr>
+          <a:xfrm>
+            <a:off x="640080" y="3108960"/>
+            <a:ext cx="10881360" cy="3017520"/>
           </a:xfrm>
           <a:prstGeom prst="roundRect">
             <a:avLst>
-              <a:gd name="adj" fmla="val 12000"/>
+              <a:gd name="adj" fmla="val 2424"/>
             </a:avLst>
           </a:prstGeom>
           <a:solidFill>
-            <a:srgbClr val="141A32"/>
+            <a:srgbClr val="1B2340"/>
           </a:solidFill>
           <a:ln/>
-        </p:spPr>
-      </p:sp>
-      <p:sp>
-        <p:nvSpPr>
-          <p:cNvPr id="25" name="Text 23"/>
-          <p:cNvSpPr/>
-          <p:nvPr/>
-        </p:nvSpPr>
-        <p:spPr>
-          <a:xfrm>
-            <a:off x="7452360" y="2624328"/>
-            <a:ext cx="3794760" cy="457200"/>
-          </a:xfrm>
-          <a:prstGeom prst="rect">
-            <a:avLst/>
-          </a:prstGeom>
-          <a:noFill/>
-          <a:ln/>
-        </p:spPr>
-        <p:txBody>
-          <a:bodyPr wrap="square" lIns="0" tIns="0" rIns="0" bIns="0" rtlCol="0" anchor="ctr"/>
-          <a:lstStyle/>
-          <a:p>
-            <a:pPr algn="ctr" indent="0" marL="0">
-              <a:buNone/>
-            </a:pPr>
-            <a:r>
-              <a:rPr lang="en-US" sz="1150" b="1" dirty="0">
-                <a:solidFill>
-                  <a:srgbClr val="FFFFFF"/>
-                </a:solidFill>
-                <a:latin typeface="Calibri" pitchFamily="34" charset="0"/>
-                <a:ea typeface="Calibri" pitchFamily="34" charset="-122"/>
-                <a:cs typeface="Calibri" pitchFamily="34" charset="-120"/>
-              </a:rPr>
-              <a:t>validating</a:t>
-            </a:r>
-            <a:endParaRPr lang="en-US" sz="1150" dirty="0"/>
-          </a:p>
-        </p:txBody>
-      </p:sp>
-      <p:sp>
-        <p:nvSpPr>
-          <p:cNvPr id="26" name="Shape 24"/>
-          <p:cNvSpPr/>
-          <p:nvPr/>
-        </p:nvSpPr>
-        <p:spPr>
-          <a:xfrm>
-            <a:off x="7452360" y="3191256"/>
-            <a:ext cx="3794760" cy="457200"/>
-          </a:xfrm>
-          <a:prstGeom prst="roundRect">
-            <a:avLst>
-              <a:gd name="adj" fmla="val 12000"/>
-            </a:avLst>
+          <a:effectLst>
+            <a:outerShdw sx="100000" sy="100000" kx="0" ky="0" algn="bl" rotWithShape="0" blurRad="101600" dist="38100" dir="2700000">
+              <a:srgbClr val="000000">
+                <a:alpha val="12000"/>
+              </a:srgbClr>
+            </a:outerShdw>
+          </a:effectLst>
+        </p:spPr>
+      </p:sp>
+      <p:sp>
+        <p:nvSpPr>
+          <p:cNvPr id="11" name="Text 9"/>
+          <p:cNvSpPr/>
+          <p:nvPr/>
+        </p:nvSpPr>
+        <p:spPr>
+          <a:xfrm>
+            <a:off x="914400" y="3273552"/>
+            <a:ext cx="10332720" cy="292608"/>
+          </a:xfrm>
+          <a:prstGeom prst="rect">
+            <a:avLst/>
+          </a:prstGeom>
+          <a:noFill/>
+          <a:ln/>
+        </p:spPr>
+        <p:txBody>
+          <a:bodyPr wrap="square" lIns="0" tIns="0" rIns="0" bIns="0" rtlCol="0" anchor="ctr"/>
+          <a:lstStyle/>
+          <a:p>
+            <a:pPr indent="0" marL="0">
+              <a:buNone/>
+            </a:pPr>
+            <a:r>
+              <a:rPr lang="en-US" sz="1300" b="1" dirty="0">
+                <a:solidFill>
+                  <a:srgbClr val="C9A227"/>
+                </a:solidFill>
+                <a:latin typeface="Calibri" pitchFamily="34" charset="0"/>
+                <a:ea typeface="Calibri" pitchFamily="34" charset="-122"/>
+                <a:cs typeface="Calibri" pitchFamily="34" charset="-120"/>
+              </a:rPr>
+              <a:t>SPEED vs. VALIDATION — why you can't cheaply have both</a:t>
+            </a:r>
+            <a:endParaRPr lang="en-US" sz="1300" dirty="0"/>
+          </a:p>
+        </p:txBody>
+      </p:sp>
+      <p:sp>
+        <p:nvSpPr>
+          <p:cNvPr id="12" name="Text 10"/>
+          <p:cNvSpPr/>
+          <p:nvPr/>
+        </p:nvSpPr>
+        <p:spPr>
+          <a:xfrm>
+            <a:off x="914400" y="3611880"/>
+            <a:ext cx="10332720" cy="502920"/>
+          </a:xfrm>
+          <a:prstGeom prst="rect">
+            <a:avLst/>
+          </a:prstGeom>
+          <a:noFill/>
+          <a:ln/>
+        </p:spPr>
+        <p:txBody>
+          <a:bodyPr wrap="square" lIns="0" tIns="0" rIns="0" bIns="0" rtlCol="0" anchor="ctr"/>
+          <a:lstStyle/>
+          <a:p>
+            <a:pPr indent="0" marL="0">
+              <a:lnSpc>
+                <a:spcPct val="120000"/>
+              </a:lnSpc>
+              <a:buNone/>
+            </a:pPr>
+            <a:r>
+              <a:rPr lang="en-US" sz="1000" i="1" dirty="0">
+                <a:solidFill>
+                  <a:srgbClr val="AEB9D6"/>
+                </a:solidFill>
+                <a:latin typeface="Calibri" pitchFamily="34" charset="0"/>
+                <a:ea typeface="Calibri" pitchFamily="34" charset="-122"/>
+                <a:cs typeface="Calibri" pitchFamily="34" charset="-120"/>
+              </a:rPr>
+              <a:t>Cross-source validation is structurally a batch operation — it needs multiple independently-timed files to have landed before they can be compared. The Second Path's speed comes precisely from skipping that comparison.</a:t>
+            </a:r>
+            <a:endParaRPr lang="en-US" sz="1000" dirty="0"/>
+          </a:p>
+        </p:txBody>
+      </p:sp>
+      <p:sp>
+        <p:nvSpPr>
+          <p:cNvPr id="13" name="Text 11"/>
+          <p:cNvSpPr/>
+          <p:nvPr/>
+        </p:nvSpPr>
+        <p:spPr>
+          <a:xfrm>
+            <a:off x="914400" y="4206240"/>
+            <a:ext cx="4937760" cy="274320"/>
+          </a:xfrm>
+          <a:prstGeom prst="rect">
+            <a:avLst/>
+          </a:prstGeom>
+          <a:noFill/>
+          <a:ln/>
+        </p:spPr>
+        <p:txBody>
+          <a:bodyPr wrap="square" lIns="0" tIns="0" rIns="0" bIns="0" rtlCol="0" anchor="ctr"/>
+          <a:lstStyle/>
+          <a:p>
+            <a:pPr indent="0" marL="0">
+              <a:buNone/>
+            </a:pPr>
+            <a:r>
+              <a:rPr lang="en-US" sz="1100" b="1" dirty="0">
+                <a:solidFill>
+                  <a:srgbClr val="E4C860"/>
+                </a:solidFill>
+                <a:latin typeface="Calibri" pitchFamily="34" charset="0"/>
+                <a:ea typeface="Calibri" pitchFamily="34" charset="-122"/>
+                <a:cs typeface="Calibri" pitchFamily="34" charset="-120"/>
+              </a:rPr>
+              <a:t>SECOND PATH — fast</a:t>
+            </a:r>
+            <a:endParaRPr lang="en-US" sz="1100" dirty="0"/>
+          </a:p>
+        </p:txBody>
+      </p:sp>
+      <p:sp>
+        <p:nvSpPr>
+          <p:cNvPr id="14" name="Shape 12"/>
+          <p:cNvSpPr/>
+          <p:nvPr/>
+        </p:nvSpPr>
+        <p:spPr>
+          <a:xfrm>
+            <a:off x="914400" y="4581144"/>
+            <a:ext cx="73152" cy="73152"/>
+          </a:xfrm>
+          <a:prstGeom prst="ellipse">
+            <a:avLst/>
           </a:prstGeom>
           <a:solidFill>
             <a:srgbClr val="C9A227"/>
@@ -10290,383 +11059,398 @@
       </p:sp>
       <p:sp>
         <p:nvSpPr>
+          <p:cNvPr id="15" name="Text 13"/>
+          <p:cNvSpPr/>
+          <p:nvPr/>
+        </p:nvSpPr>
+        <p:spPr>
+          <a:xfrm>
+            <a:off x="1115568" y="4526280"/>
+            <a:ext cx="4736592" cy="502920"/>
+          </a:xfrm>
+          <a:prstGeom prst="rect">
+            <a:avLst/>
+          </a:prstGeom>
+          <a:noFill/>
+          <a:ln/>
+        </p:spPr>
+        <p:txBody>
+          <a:bodyPr wrap="square" lIns="0" tIns="0" rIns="0" bIns="0" rtlCol="0" anchor="t"/>
+          <a:lstStyle/>
+          <a:p>
+            <a:pPr indent="0" marL="0">
+              <a:lnSpc>
+                <a:spcPct val="118000"/>
+              </a:lnSpc>
+              <a:buNone/>
+            </a:pPr>
+            <a:r>
+              <a:rPr lang="en-US" sz="930" dirty="0">
+                <a:solidFill>
+                  <a:srgbClr val="AEB9D6"/>
+                </a:solidFill>
+                <a:latin typeface="Calibri" pitchFamily="34" charset="0"/>
+                <a:ea typeface="Calibri" pitchFamily="34" charset="-122"/>
+                <a:cs typeface="Calibri" pitchFamily="34" charset="-120"/>
+              </a:rPr>
+              <a:t>OnTick() fires on every price tick; detects a newly-closed bar and pushes over the socket in &lt;1ms</a:t>
+            </a:r>
+            <a:endParaRPr lang="en-US" sz="930" dirty="0"/>
+          </a:p>
+        </p:txBody>
+      </p:sp>
+      <p:sp>
+        <p:nvSpPr>
+          <p:cNvPr id="16" name="Shape 14"/>
+          <p:cNvSpPr/>
+          <p:nvPr/>
+        </p:nvSpPr>
+        <p:spPr>
+          <a:xfrm>
+            <a:off x="914400" y="5111496"/>
+            <a:ext cx="73152" cy="73152"/>
+          </a:xfrm>
+          <a:prstGeom prst="ellipse">
+            <a:avLst/>
+          </a:prstGeom>
+          <a:solidFill>
+            <a:srgbClr val="C9A227"/>
+          </a:solidFill>
+          <a:ln/>
+        </p:spPr>
+      </p:sp>
+      <p:sp>
+        <p:nvSpPr>
+          <p:cNvPr id="17" name="Text 15"/>
+          <p:cNvSpPr/>
+          <p:nvPr/>
+        </p:nvSpPr>
+        <p:spPr>
+          <a:xfrm>
+            <a:off x="1115568" y="5056632"/>
+            <a:ext cx="4736592" cy="502920"/>
+          </a:xfrm>
+          <a:prstGeom prst="rect">
+            <a:avLst/>
+          </a:prstGeom>
+          <a:noFill/>
+          <a:ln/>
+        </p:spPr>
+        <p:txBody>
+          <a:bodyPr wrap="square" lIns="0" tIns="0" rIns="0" bIns="0" rtlCol="0" anchor="t"/>
+          <a:lstStyle/>
+          <a:p>
+            <a:pPr indent="0" marL="0">
+              <a:lnSpc>
+                <a:spcPct val="118000"/>
+              </a:lnSpc>
+              <a:buNone/>
+            </a:pPr>
+            <a:r>
+              <a:rPr lang="en-US" sz="930" dirty="0">
+                <a:solidFill>
+                  <a:srgbClr val="AEB9D6"/>
+                </a:solidFill>
+                <a:latin typeface="Calibri" pitchFamily="34" charset="0"/>
+                <a:ea typeface="Calibri" pitchFamily="34" charset="-122"/>
+                <a:cs typeface="Calibri" pitchFamily="34" charset="-120"/>
+              </a:rPr>
+              <a:t>No cross-source key agreement, completeness check, or reject-and-retry — nothing to compare a buffer read against</a:t>
+            </a:r>
+            <a:endParaRPr lang="en-US" sz="930" dirty="0"/>
+          </a:p>
+        </p:txBody>
+      </p:sp>
+      <p:sp>
+        <p:nvSpPr>
+          <p:cNvPr id="18" name="Shape 16"/>
+          <p:cNvSpPr/>
+          <p:nvPr/>
+        </p:nvSpPr>
+        <p:spPr>
+          <a:xfrm>
+            <a:off x="914400" y="5641848"/>
+            <a:ext cx="73152" cy="73152"/>
+          </a:xfrm>
+          <a:prstGeom prst="ellipse">
+            <a:avLst/>
+          </a:prstGeom>
+          <a:solidFill>
+            <a:srgbClr val="C9A227"/>
+          </a:solidFill>
+          <a:ln/>
+        </p:spPr>
+      </p:sp>
+      <p:sp>
+        <p:nvSpPr>
+          <p:cNvPr id="19" name="Text 17"/>
+          <p:cNvSpPr/>
+          <p:nvPr/>
+        </p:nvSpPr>
+        <p:spPr>
+          <a:xfrm>
+            <a:off x="1115568" y="5586984"/>
+            <a:ext cx="4736592" cy="502920"/>
+          </a:xfrm>
+          <a:prstGeom prst="rect">
+            <a:avLst/>
+          </a:prstGeom>
+          <a:noFill/>
+          <a:ln/>
+        </p:spPr>
+        <p:txBody>
+          <a:bodyPr wrap="square" lIns="0" tIns="0" rIns="0" bIns="0" rtlCol="0" anchor="t"/>
+          <a:lstStyle/>
+          <a:p>
+            <a:pPr indent="0" marL="0">
+              <a:lnSpc>
+                <a:spcPct val="118000"/>
+              </a:lnSpc>
+              <a:buNone/>
+            </a:pPr>
+            <a:r>
+              <a:rPr lang="en-US" sz="930" dirty="0">
+                <a:solidFill>
+                  <a:srgbClr val="AEB9D6"/>
+                </a:solidFill>
+                <a:latin typeface="Calibri" pitchFamily="34" charset="0"/>
+                <a:ea typeface="Calibri" pitchFamily="34" charset="-122"/>
+                <a:cs typeface="Calibri" pitchFamily="34" charset="-120"/>
+              </a:rPr>
+              <a:t>Has null-safety + a circuit breaker, but that's network resilience, not data-quality validation</a:t>
+            </a:r>
+            <a:endParaRPr lang="en-US" sz="930" dirty="0"/>
+          </a:p>
+        </p:txBody>
+      </p:sp>
+      <p:sp>
+        <p:nvSpPr>
+          <p:cNvPr id="20" name="Text 18"/>
+          <p:cNvSpPr/>
+          <p:nvPr/>
+        </p:nvSpPr>
+        <p:spPr>
+          <a:xfrm>
+            <a:off x="6263640" y="4206240"/>
+            <a:ext cx="4937760" cy="274320"/>
+          </a:xfrm>
+          <a:prstGeom prst="rect">
+            <a:avLst/>
+          </a:prstGeom>
+          <a:noFill/>
+          <a:ln/>
+        </p:spPr>
+        <p:txBody>
+          <a:bodyPr wrap="square" lIns="0" tIns="0" rIns="0" bIns="0" rtlCol="0" anchor="ctr"/>
+          <a:lstStyle/>
+          <a:p>
+            <a:pPr indent="0" marL="0">
+              <a:buNone/>
+            </a:pPr>
+            <a:r>
+              <a:rPr lang="en-US" sz="1100" b="1" dirty="0">
+                <a:solidFill>
+                  <a:srgbClr val="E4C860"/>
+                </a:solidFill>
+                <a:latin typeface="Calibri" pitchFamily="34" charset="0"/>
+                <a:ea typeface="Calibri" pitchFamily="34" charset="-122"/>
+                <a:cs typeface="Calibri" pitchFamily="34" charset="-120"/>
+              </a:rPr>
+              <a:t>FIRST PATH — validated</a:t>
+            </a:r>
+            <a:endParaRPr lang="en-US" sz="1100" dirty="0"/>
+          </a:p>
+        </p:txBody>
+      </p:sp>
+      <p:sp>
+        <p:nvSpPr>
+          <p:cNvPr id="21" name="Shape 19"/>
+          <p:cNvSpPr/>
+          <p:nvPr/>
+        </p:nvSpPr>
+        <p:spPr>
+          <a:xfrm>
+            <a:off x="6263640" y="4581144"/>
+            <a:ext cx="73152" cy="73152"/>
+          </a:xfrm>
+          <a:prstGeom prst="ellipse">
+            <a:avLst/>
+          </a:prstGeom>
+          <a:solidFill>
+            <a:srgbClr val="C9A227"/>
+          </a:solidFill>
+          <a:ln/>
+        </p:spPr>
+      </p:sp>
+      <p:sp>
+        <p:nvSpPr>
+          <p:cNvPr id="22" name="Text 20"/>
+          <p:cNvSpPr/>
+          <p:nvPr/>
+        </p:nvSpPr>
+        <p:spPr>
+          <a:xfrm>
+            <a:off x="6464808" y="4526280"/>
+            <a:ext cx="4736592" cy="502920"/>
+          </a:xfrm>
+          <a:prstGeom prst="rect">
+            <a:avLst/>
+          </a:prstGeom>
+          <a:noFill/>
+          <a:ln/>
+        </p:spPr>
+        <p:txBody>
+          <a:bodyPr wrap="square" lIns="0" tIns="0" rIns="0" bIns="0" rtlCol="0" anchor="t"/>
+          <a:lstStyle/>
+          <a:p>
+            <a:pPr indent="0" marL="0">
+              <a:lnSpc>
+                <a:spcPct val="118000"/>
+              </a:lnSpc>
+              <a:buNone/>
+            </a:pPr>
+            <a:r>
+              <a:rPr lang="en-US" sz="930" dirty="0">
+                <a:solidFill>
+                  <a:srgbClr val="AEB9D6"/>
+                </a:solidFill>
+                <a:latin typeface="Calibri" pitchFamily="34" charset="0"/>
+                <a:ea typeface="Calibri" pitchFamily="34" charset="-122"/>
+                <a:cs typeface="Calibri" pitchFamily="34" charset="-120"/>
+              </a:rPr>
+              <a:t>Normal case: indicator's own :59 export + collector's 5s wake ≈ under a minute past bar-close</a:t>
+            </a:r>
+            <a:endParaRPr lang="en-US" sz="930" dirty="0"/>
+          </a:p>
+        </p:txBody>
+      </p:sp>
+      <p:sp>
+        <p:nvSpPr>
+          <p:cNvPr id="23" name="Shape 21"/>
+          <p:cNvSpPr/>
+          <p:nvPr/>
+        </p:nvSpPr>
+        <p:spPr>
+          <a:xfrm>
+            <a:off x="6263640" y="5111496"/>
+            <a:ext cx="73152" cy="73152"/>
+          </a:xfrm>
+          <a:prstGeom prst="ellipse">
+            <a:avLst/>
+          </a:prstGeom>
+          <a:solidFill>
+            <a:srgbClr val="C9A227"/>
+          </a:solidFill>
+          <a:ln/>
+        </p:spPr>
+      </p:sp>
+      <p:sp>
+        <p:nvSpPr>
+          <p:cNvPr id="24" name="Text 22"/>
+          <p:cNvSpPr/>
+          <p:nvPr/>
+        </p:nvSpPr>
+        <p:spPr>
+          <a:xfrm>
+            <a:off x="6464808" y="5056632"/>
+            <a:ext cx="4736592" cy="502920"/>
+          </a:xfrm>
+          <a:prstGeom prst="rect">
+            <a:avLst/>
+          </a:prstGeom>
+          <a:noFill/>
+          <a:ln/>
+        </p:spPr>
+        <p:txBody>
+          <a:bodyPr wrap="square" lIns="0" tIns="0" rIns="0" bIns="0" rtlCol="0" anchor="t"/>
+          <a:lstStyle/>
+          <a:p>
+            <a:pPr indent="0" marL="0">
+              <a:lnSpc>
+                <a:spcPct val="118000"/>
+              </a:lnSpc>
+              <a:buNone/>
+            </a:pPr>
+            <a:r>
+              <a:rPr lang="en-US" sz="930" dirty="0">
+                <a:solidFill>
+                  <a:srgbClr val="AEB9D6"/>
+                </a:solidFill>
+                <a:latin typeface="Calibri" pitchFamily="34" charset="0"/>
+                <a:ea typeface="Calibri" pitchFamily="34" charset="-122"/>
+                <a:cs typeface="Calibri" pitchFamily="34" charset="-120"/>
+              </a:rPr>
+              <a:t>Cross-source key agreement + completeness/staleness check before any row is trusted</a:t>
+            </a:r>
+            <a:endParaRPr lang="en-US" sz="930" dirty="0"/>
+          </a:p>
+        </p:txBody>
+      </p:sp>
+      <p:sp>
+        <p:nvSpPr>
+          <p:cNvPr id="25" name="Shape 23"/>
+          <p:cNvSpPr/>
+          <p:nvPr/>
+        </p:nvSpPr>
+        <p:spPr>
+          <a:xfrm>
+            <a:off x="6263640" y="5641848"/>
+            <a:ext cx="73152" cy="73152"/>
+          </a:xfrm>
+          <a:prstGeom prst="ellipse">
+            <a:avLst/>
+          </a:prstGeom>
+          <a:solidFill>
+            <a:srgbClr val="C9A227"/>
+          </a:solidFill>
+          <a:ln/>
+        </p:spPr>
+      </p:sp>
+      <p:sp>
+        <p:nvSpPr>
+          <p:cNvPr id="26" name="Text 24"/>
+          <p:cNvSpPr/>
+          <p:nvPr/>
+        </p:nvSpPr>
+        <p:spPr>
+          <a:xfrm>
+            <a:off x="6464808" y="5586984"/>
+            <a:ext cx="4736592" cy="502920"/>
+          </a:xfrm>
+          <a:prstGeom prst="rect">
+            <a:avLst/>
+          </a:prstGeom>
+          <a:noFill/>
+          <a:ln/>
+        </p:spPr>
+        <p:txBody>
+          <a:bodyPr wrap="square" lIns="0" tIns="0" rIns="0" bIns="0" rtlCol="0" anchor="t"/>
+          <a:lstStyle/>
+          <a:p>
+            <a:pPr indent="0" marL="0">
+              <a:lnSpc>
+                <a:spcPct val="118000"/>
+              </a:lnSpc>
+              <a:buNone/>
+            </a:pPr>
+            <a:r>
+              <a:rPr lang="en-US" sz="930" dirty="0">
+                <a:solidFill>
+                  <a:srgbClr val="AEB9D6"/>
+                </a:solidFill>
+                <a:latin typeface="Calibri" pitchFamily="34" charset="0"/>
+                <a:ea typeface="Calibri" pitchFamily="34" charset="-122"/>
+                <a:cs typeface="Calibri" pitchFamily="34" charset="-120"/>
+              </a:rPr>
+              <a:t>Only degrades to minutes when a cycle is rejected and retries (≤3 × 65s)</a:t>
+            </a:r>
+            <a:endParaRPr lang="en-US" sz="930" dirty="0"/>
+          </a:p>
+        </p:txBody>
+      </p:sp>
+      <p:sp>
+        <p:nvSpPr>
           <p:cNvPr id="27" name="Text 25"/>
-          <p:cNvSpPr/>
-          <p:nvPr/>
-        </p:nvSpPr>
-        <p:spPr>
-          <a:xfrm>
-            <a:off x="7452360" y="3191256"/>
-            <a:ext cx="3794760" cy="457200"/>
-          </a:xfrm>
-          <a:prstGeom prst="rect">
-            <a:avLst/>
-          </a:prstGeom>
-          <a:noFill/>
-          <a:ln/>
-        </p:spPr>
-        <p:txBody>
-          <a:bodyPr wrap="square" lIns="0" tIns="0" rIns="0" bIns="0" rtlCol="0" anchor="ctr"/>
-          <a:lstStyle/>
-          <a:p>
-            <a:pPr algn="ctr" indent="0" marL="0">
-              <a:buNone/>
-            </a:pPr>
-            <a:r>
-              <a:rPr lang="en-US" sz="1150" b="1" dirty="0">
-                <a:solidFill>
-                  <a:srgbClr val="141A32"/>
-                </a:solidFill>
-                <a:latin typeface="Calibri" pitchFamily="34" charset="0"/>
-                <a:ea typeface="Calibri" pitchFamily="34" charset="-122"/>
-                <a:cs typeface="Calibri" pitchFamily="34" charset="-120"/>
-              </a:rPr>
-              <a:t>validated  ✓</a:t>
-            </a:r>
-            <a:endParaRPr lang="en-US" sz="1150" dirty="0"/>
-          </a:p>
-        </p:txBody>
-      </p:sp>
-      <p:sp>
-        <p:nvSpPr>
-          <p:cNvPr id="28" name="Shape 26"/>
-          <p:cNvSpPr/>
-          <p:nvPr/>
-        </p:nvSpPr>
-        <p:spPr>
-          <a:xfrm>
-            <a:off x="7452360" y="3758184"/>
-            <a:ext cx="3794760" cy="457200"/>
-          </a:xfrm>
-          <a:prstGeom prst="roundRect">
-            <a:avLst>
-              <a:gd name="adj" fmla="val 12000"/>
-            </a:avLst>
-          </a:prstGeom>
-          <a:solidFill>
-            <a:srgbClr val="3A2230"/>
-          </a:solidFill>
-          <a:ln/>
-        </p:spPr>
-      </p:sp>
-      <p:sp>
-        <p:nvSpPr>
-          <p:cNvPr id="29" name="Text 27"/>
-          <p:cNvSpPr/>
-          <p:nvPr/>
-        </p:nvSpPr>
-        <p:spPr>
-          <a:xfrm>
-            <a:off x="7452360" y="3758184"/>
-            <a:ext cx="3794760" cy="457200"/>
-          </a:xfrm>
-          <a:prstGeom prst="rect">
-            <a:avLst/>
-          </a:prstGeom>
-          <a:noFill/>
-          <a:ln/>
-        </p:spPr>
-        <p:txBody>
-          <a:bodyPr wrap="square" lIns="0" tIns="0" rIns="0" bIns="0" rtlCol="0" anchor="ctr"/>
-          <a:lstStyle/>
-          <a:p>
-            <a:pPr algn="ctr" indent="0" marL="0">
-              <a:buNone/>
-            </a:pPr>
-            <a:r>
-              <a:rPr lang="en-US" sz="1150" b="1" dirty="0">
-                <a:solidFill>
-                  <a:srgbClr val="FFFFFF"/>
-                </a:solidFill>
-                <a:latin typeface="Calibri" pitchFamily="34" charset="0"/>
-                <a:ea typeface="Calibri" pitchFamily="34" charset="-122"/>
-                <a:cs typeface="Calibri" pitchFamily="34" charset="-120"/>
-              </a:rPr>
-              <a:t>rejected  ✗</a:t>
-            </a:r>
-            <a:endParaRPr lang="en-US" sz="1150" dirty="0"/>
-          </a:p>
-        </p:txBody>
-      </p:sp>
-      <p:sp>
-        <p:nvSpPr>
-          <p:cNvPr id="30" name="Text 28"/>
-          <p:cNvSpPr/>
-          <p:nvPr/>
-        </p:nvSpPr>
-        <p:spPr>
-          <a:xfrm>
-            <a:off x="7452360" y="4370832"/>
-            <a:ext cx="3840480" cy="685800"/>
-          </a:xfrm>
-          <a:prstGeom prst="rect">
-            <a:avLst/>
-          </a:prstGeom>
-          <a:noFill/>
-          <a:ln/>
-        </p:spPr>
-        <p:txBody>
-          <a:bodyPr wrap="square" lIns="0" tIns="0" rIns="0" bIns="0" rtlCol="0" anchor="ctr"/>
-          <a:lstStyle/>
-          <a:p>
-            <a:pPr indent="0" marL="0">
-              <a:lnSpc>
-                <a:spcPct val="120000"/>
-              </a:lnSpc>
-              <a:buNone/>
-            </a:pPr>
-            <a:r>
-              <a:rPr lang="en-US" sz="950" dirty="0">
-                <a:solidFill>
-                  <a:srgbClr val="AEB9D6"/>
-                </a:solidFill>
-                <a:latin typeface="Calibri" pitchFamily="34" charset="0"/>
-                <a:ea typeface="Calibri" pitchFamily="34" charset="-122"/>
-                <a:cs typeface="Calibri" pitchFamily="34" charset="-120"/>
-              </a:rPr>
-              <a:t>On rejection: staged rows are purged, the reason is logged to validation_failures (JSON detail per mismatch), and the cycle re-requests.</a:t>
-            </a:r>
-            <a:endParaRPr lang="en-US" sz="950" dirty="0"/>
-          </a:p>
-        </p:txBody>
-      </p:sp>
-      <p:sp>
-        <p:nvSpPr>
-          <p:cNvPr id="31" name="Text 29"/>
-          <p:cNvSpPr/>
-          <p:nvPr/>
-        </p:nvSpPr>
-        <p:spPr>
-          <a:xfrm>
-            <a:off x="7452360" y="5193792"/>
-            <a:ext cx="2743200" cy="274320"/>
-          </a:xfrm>
-          <a:prstGeom prst="rect">
-            <a:avLst/>
-          </a:prstGeom>
-          <a:noFill/>
-          <a:ln/>
-        </p:spPr>
-        <p:txBody>
-          <a:bodyPr wrap="square" lIns="0" tIns="0" rIns="0" bIns="0" rtlCol="0" anchor="ctr"/>
-          <a:lstStyle/>
-          <a:p>
-            <a:pPr indent="0" marL="0">
-              <a:buNone/>
-            </a:pPr>
-            <a:r>
-              <a:rPr lang="en-US" sz="1000" dirty="0">
-                <a:solidFill>
-                  <a:srgbClr val="AEB9D6"/>
-                </a:solidFill>
-                <a:latin typeface="Calibri" pitchFamily="34" charset="0"/>
-                <a:ea typeface="Calibri" pitchFamily="34" charset="-122"/>
-                <a:cs typeface="Calibri" pitchFamily="34" charset="-120"/>
-              </a:rPr>
-              <a:t>MAX_ATTEMPTS_PER_CYCLE</a:t>
-            </a:r>
-            <a:endParaRPr lang="en-US" sz="1000" dirty="0"/>
-          </a:p>
-        </p:txBody>
-      </p:sp>
-      <p:sp>
-        <p:nvSpPr>
-          <p:cNvPr id="32" name="Text 30"/>
-          <p:cNvSpPr/>
-          <p:nvPr/>
-        </p:nvSpPr>
-        <p:spPr>
-          <a:xfrm>
-            <a:off x="10149840" y="5193792"/>
-            <a:ext cx="1097280" cy="274320"/>
-          </a:xfrm>
-          <a:prstGeom prst="rect">
-            <a:avLst/>
-          </a:prstGeom>
-          <a:noFill/>
-          <a:ln/>
-        </p:spPr>
-        <p:txBody>
-          <a:bodyPr wrap="square" lIns="0" tIns="0" rIns="0" bIns="0" rtlCol="0" anchor="ctr"/>
-          <a:lstStyle/>
-          <a:p>
-            <a:pPr algn="r" indent="0" marL="0">
-              <a:buNone/>
-            </a:pPr>
-            <a:r>
-              <a:rPr lang="en-US" sz="1000" b="1" dirty="0">
-                <a:solidFill>
-                  <a:srgbClr val="E4C860"/>
-                </a:solidFill>
-                <a:latin typeface="Calibri" pitchFamily="34" charset="0"/>
-                <a:ea typeface="Calibri" pitchFamily="34" charset="-122"/>
-                <a:cs typeface="Calibri" pitchFamily="34" charset="-120"/>
-              </a:rPr>
-              <a:t>3</a:t>
-            </a:r>
-            <a:endParaRPr lang="en-US" sz="1000" dirty="0"/>
-          </a:p>
-        </p:txBody>
-      </p:sp>
-      <p:sp>
-        <p:nvSpPr>
-          <p:cNvPr id="33" name="Text 31"/>
-          <p:cNvSpPr/>
-          <p:nvPr/>
-        </p:nvSpPr>
-        <p:spPr>
-          <a:xfrm>
-            <a:off x="7452360" y="5486400"/>
-            <a:ext cx="2743200" cy="274320"/>
-          </a:xfrm>
-          <a:prstGeom prst="rect">
-            <a:avLst/>
-          </a:prstGeom>
-          <a:noFill/>
-          <a:ln/>
-        </p:spPr>
-        <p:txBody>
-          <a:bodyPr wrap="square" lIns="0" tIns="0" rIns="0" bIns="0" rtlCol="0" anchor="ctr"/>
-          <a:lstStyle/>
-          <a:p>
-            <a:pPr indent="0" marL="0">
-              <a:buNone/>
-            </a:pPr>
-            <a:r>
-              <a:rPr lang="en-US" sz="1000" dirty="0">
-                <a:solidFill>
-                  <a:srgbClr val="AEB9D6"/>
-                </a:solidFill>
-                <a:latin typeface="Calibri" pitchFamily="34" charset="0"/>
-                <a:ea typeface="Calibri" pitchFamily="34" charset="-122"/>
-                <a:cs typeface="Calibri" pitchFamily="34" charset="-120"/>
-              </a:rPr>
-              <a:t>RETRY_WAIT_SEC</a:t>
-            </a:r>
-            <a:endParaRPr lang="en-US" sz="1000" dirty="0"/>
-          </a:p>
-        </p:txBody>
-      </p:sp>
-      <p:sp>
-        <p:nvSpPr>
-          <p:cNvPr id="34" name="Text 32"/>
-          <p:cNvSpPr/>
-          <p:nvPr/>
-        </p:nvSpPr>
-        <p:spPr>
-          <a:xfrm>
-            <a:off x="10149840" y="5486400"/>
-            <a:ext cx="1097280" cy="274320"/>
-          </a:xfrm>
-          <a:prstGeom prst="rect">
-            <a:avLst/>
-          </a:prstGeom>
-          <a:noFill/>
-          <a:ln/>
-        </p:spPr>
-        <p:txBody>
-          <a:bodyPr wrap="square" lIns="0" tIns="0" rIns="0" bIns="0" rtlCol="0" anchor="ctr"/>
-          <a:lstStyle/>
-          <a:p>
-            <a:pPr algn="r" indent="0" marL="0">
-              <a:buNone/>
-            </a:pPr>
-            <a:r>
-              <a:rPr lang="en-US" sz="1000" b="1" dirty="0">
-                <a:solidFill>
-                  <a:srgbClr val="E4C860"/>
-                </a:solidFill>
-                <a:latin typeface="Calibri" pitchFamily="34" charset="0"/>
-                <a:ea typeface="Calibri" pitchFamily="34" charset="-122"/>
-                <a:cs typeface="Calibri" pitchFamily="34" charset="-120"/>
-              </a:rPr>
-              <a:t>65</a:t>
-            </a:r>
-            <a:endParaRPr lang="en-US" sz="1000" dirty="0"/>
-          </a:p>
-        </p:txBody>
-      </p:sp>
-      <p:sp>
-        <p:nvSpPr>
-          <p:cNvPr id="35" name="Text 33"/>
-          <p:cNvSpPr/>
-          <p:nvPr/>
-        </p:nvSpPr>
-        <p:spPr>
-          <a:xfrm>
-            <a:off x="7452360" y="5779008"/>
-            <a:ext cx="2743200" cy="274320"/>
-          </a:xfrm>
-          <a:prstGeom prst="rect">
-            <a:avLst/>
-          </a:prstGeom>
-          <a:noFill/>
-          <a:ln/>
-        </p:spPr>
-        <p:txBody>
-          <a:bodyPr wrap="square" lIns="0" tIns="0" rIns="0" bIns="0" rtlCol="0" anchor="ctr"/>
-          <a:lstStyle/>
-          <a:p>
-            <a:pPr indent="0" marL="0">
-              <a:buNone/>
-            </a:pPr>
-            <a:r>
-              <a:rPr lang="en-US" sz="1000" dirty="0">
-                <a:solidFill>
-                  <a:srgbClr val="AEB9D6"/>
-                </a:solidFill>
-                <a:latin typeface="Calibri" pitchFamily="34" charset="0"/>
-                <a:ea typeface="Calibri" pitchFamily="34" charset="-122"/>
-                <a:cs typeface="Calibri" pitchFamily="34" charset="-120"/>
-              </a:rPr>
-              <a:t>CLOSE_TOLERANCE</a:t>
-            </a:r>
-            <a:endParaRPr lang="en-US" sz="1000" dirty="0"/>
-          </a:p>
-        </p:txBody>
-      </p:sp>
-      <p:sp>
-        <p:nvSpPr>
-          <p:cNvPr id="36" name="Text 34"/>
-          <p:cNvSpPr/>
-          <p:nvPr/>
-        </p:nvSpPr>
-        <p:spPr>
-          <a:xfrm>
-            <a:off x="10149840" y="5779008"/>
-            <a:ext cx="1097280" cy="274320"/>
-          </a:xfrm>
-          <a:prstGeom prst="rect">
-            <a:avLst/>
-          </a:prstGeom>
-          <a:noFill/>
-          <a:ln/>
-        </p:spPr>
-        <p:txBody>
-          <a:bodyPr wrap="square" lIns="0" tIns="0" rIns="0" bIns="0" rtlCol="0" anchor="ctr"/>
-          <a:lstStyle/>
-          <a:p>
-            <a:pPr algn="r" indent="0" marL="0">
-              <a:buNone/>
-            </a:pPr>
-            <a:r>
-              <a:rPr lang="en-US" sz="1000" b="1" dirty="0">
-                <a:solidFill>
-                  <a:srgbClr val="E4C860"/>
-                </a:solidFill>
-                <a:latin typeface="Calibri" pitchFamily="34" charset="0"/>
-                <a:ea typeface="Calibri" pitchFamily="34" charset="-122"/>
-                <a:cs typeface="Calibri" pitchFamily="34" charset="-120"/>
-              </a:rPr>
-              <a:t>0.01</a:t>
-            </a:r>
-            <a:endParaRPr lang="en-US" sz="1000" dirty="0"/>
-          </a:p>
-        </p:txBody>
-      </p:sp>
-      <p:sp>
-        <p:nvSpPr>
-          <p:cNvPr id="37" name="Text 35"/>
           <p:cNvSpPr/>
           <p:nvPr/>
         </p:nvSpPr>
@@ -10705,7 +11489,7 @@
       </p:sp>
       <p:sp>
         <p:nvSpPr>
-          <p:cNvPr id="38" name="Text 36"/>
+          <p:cNvPr id="28" name="Text 26"/>
           <p:cNvSpPr/>
           <p:nvPr/>
         </p:nvSpPr>
@@ -10736,7 +11520,7 @@
                 <a:ea typeface="Calibri" pitchFamily="34" charset="-122"/>
                 <a:cs typeface="Calibri" pitchFamily="34" charset="-120"/>
               </a:rPr>
-              <a:t>6 / 11</a:t>
+              <a:t>6 / 12</a:t>
             </a:r>
             <a:endParaRPr lang="en-US" sz="900" dirty="0"/>
           </a:p>
@@ -10807,7 +11591,7 @@
                 <a:ea typeface="Cambria" pitchFamily="34" charset="-122"/>
                 <a:cs typeface="Cambria" pitchFamily="34" charset="-120"/>
               </a:rPr>
-              <a:t>Calculate Stage — What Python Actually Computes</a:t>
+              <a:t>Validation &amp; Retry Logic</a:t>
             </a:r>
             <a:endParaRPr lang="en-US" sz="2500" dirty="0"/>
           </a:p>
@@ -10846,6 +11630,1342 @@
                 <a:ea typeface="Calibri" pitchFamily="34" charset="-122"/>
                 <a:cs typeface="Calibri" pitchFamily="34" charset="-120"/>
               </a:rPr>
+              <a:t>Four checks gate every cycle before a bar reaches market_data</a:t>
+            </a:r>
+            <a:endParaRPr lang="en-US" sz="1150" dirty="0"/>
+          </a:p>
+        </p:txBody>
+      </p:sp>
+      <p:sp>
+        <p:nvSpPr>
+          <p:cNvPr id="4" name="Shape 2"/>
+          <p:cNvSpPr/>
+          <p:nvPr/>
+        </p:nvSpPr>
+        <p:spPr>
+          <a:xfrm>
+            <a:off x="640080" y="1417320"/>
+            <a:ext cx="457200" cy="457200"/>
+          </a:xfrm>
+          <a:prstGeom prst="ellipse">
+            <a:avLst/>
+          </a:prstGeom>
+          <a:solidFill>
+            <a:srgbClr val="1B2340"/>
+          </a:solidFill>
+          <a:ln/>
+        </p:spPr>
+      </p:sp>
+      <p:sp>
+        <p:nvSpPr>
+          <p:cNvPr id="5" name="Text 3"/>
+          <p:cNvSpPr/>
+          <p:nvPr/>
+        </p:nvSpPr>
+        <p:spPr>
+          <a:xfrm>
+            <a:off x="640080" y="1417320"/>
+            <a:ext cx="457200" cy="457200"/>
+          </a:xfrm>
+          <a:prstGeom prst="rect">
+            <a:avLst/>
+          </a:prstGeom>
+          <a:noFill/>
+          <a:ln/>
+        </p:spPr>
+        <p:txBody>
+          <a:bodyPr wrap="square" lIns="0" tIns="0" rIns="0" bIns="0" rtlCol="0" anchor="ctr"/>
+          <a:lstStyle/>
+          <a:p>
+            <a:pPr algn="ctr" indent="0" marL="0">
+              <a:buNone/>
+            </a:pPr>
+            <a:r>
+              <a:rPr lang="en-US" sz="1500" b="1" dirty="0">
+                <a:solidFill>
+                  <a:srgbClr val="E4C860"/>
+                </a:solidFill>
+                <a:latin typeface="Cambria" pitchFamily="34" charset="0"/>
+                <a:ea typeface="Cambria" pitchFamily="34" charset="-122"/>
+                <a:cs typeface="Cambria" pitchFamily="34" charset="-120"/>
+              </a:rPr>
+              <a:t>1</a:t>
+            </a:r>
+            <a:endParaRPr lang="en-US" sz="1500" dirty="0"/>
+          </a:p>
+        </p:txBody>
+      </p:sp>
+      <p:sp>
+        <p:nvSpPr>
+          <p:cNvPr id="6" name="Text 4"/>
+          <p:cNvSpPr/>
+          <p:nvPr/>
+        </p:nvSpPr>
+        <p:spPr>
+          <a:xfrm>
+            <a:off x="1234440" y="1371600"/>
+            <a:ext cx="5577840" cy="320040"/>
+          </a:xfrm>
+          <a:prstGeom prst="rect">
+            <a:avLst/>
+          </a:prstGeom>
+          <a:noFill/>
+          <a:ln/>
+        </p:spPr>
+        <p:txBody>
+          <a:bodyPr wrap="square" lIns="0" tIns="0" rIns="0" bIns="0" rtlCol="0" anchor="ctr"/>
+          <a:lstStyle/>
+          <a:p>
+            <a:pPr indent="0" marL="0">
+              <a:buNone/>
+            </a:pPr>
+            <a:r>
+              <a:rPr lang="en-US" sz="1250" b="1" dirty="0">
+                <a:solidFill>
+                  <a:srgbClr val="1B2340"/>
+                </a:solidFill>
+                <a:latin typeface="Calibri" pitchFamily="34" charset="0"/>
+                <a:ea typeface="Calibri" pitchFamily="34" charset="-122"/>
+                <a:cs typeface="Calibri" pitchFamily="34" charset="-120"/>
+              </a:rPr>
+              <a:t>Cross-source key agreement</a:t>
+            </a:r>
+            <a:endParaRPr lang="en-US" sz="1250" dirty="0"/>
+          </a:p>
+        </p:txBody>
+      </p:sp>
+      <p:sp>
+        <p:nvSpPr>
+          <p:cNvPr id="7" name="Text 5"/>
+          <p:cNvSpPr/>
+          <p:nvPr/>
+        </p:nvSpPr>
+        <p:spPr>
+          <a:xfrm>
+            <a:off x="1234440" y="1691640"/>
+            <a:ext cx="5623560" cy="685800"/>
+          </a:xfrm>
+          <a:prstGeom prst="rect">
+            <a:avLst/>
+          </a:prstGeom>
+          <a:noFill/>
+          <a:ln/>
+        </p:spPr>
+        <p:txBody>
+          <a:bodyPr wrap="square" lIns="0" tIns="0" rIns="0" bIns="0" rtlCol="0" anchor="ctr"/>
+          <a:lstStyle/>
+          <a:p>
+            <a:pPr indent="0" marL="0">
+              <a:lnSpc>
+                <a:spcPct val="118000"/>
+              </a:lnSpc>
+              <a:buNone/>
+            </a:pPr>
+            <a:r>
+              <a:rPr lang="en-US" sz="1000" dirty="0">
+                <a:solidFill>
+                  <a:srgbClr val="6B7390"/>
+                </a:solidFill>
+                <a:latin typeface="Calibri" pitchFamily="34" charset="0"/>
+                <a:ea typeface="Calibri" pitchFamily="34" charset="-122"/>
+                <a:cs typeface="Calibri" pitchFamily="34" charset="-120"/>
+              </a:rPr>
+              <a:t>For every timestamp present in ≥2 of the 11 per-bar sources: symbol and timeframe must match exactly; close must agree within CLOSE_TOLERANCE = 0.01 (one XAUUSD point).</a:t>
+            </a:r>
+            <a:endParaRPr lang="en-US" sz="1000" dirty="0"/>
+          </a:p>
+        </p:txBody>
+      </p:sp>
+      <p:sp>
+        <p:nvSpPr>
+          <p:cNvPr id="8" name="Shape 6"/>
+          <p:cNvSpPr/>
+          <p:nvPr/>
+        </p:nvSpPr>
+        <p:spPr>
+          <a:xfrm>
+            <a:off x="640080" y="2496312"/>
+            <a:ext cx="457200" cy="457200"/>
+          </a:xfrm>
+          <a:prstGeom prst="ellipse">
+            <a:avLst/>
+          </a:prstGeom>
+          <a:solidFill>
+            <a:srgbClr val="1B2340"/>
+          </a:solidFill>
+          <a:ln/>
+        </p:spPr>
+      </p:sp>
+      <p:sp>
+        <p:nvSpPr>
+          <p:cNvPr id="9" name="Text 7"/>
+          <p:cNvSpPr/>
+          <p:nvPr/>
+        </p:nvSpPr>
+        <p:spPr>
+          <a:xfrm>
+            <a:off x="640080" y="2496312"/>
+            <a:ext cx="457200" cy="457200"/>
+          </a:xfrm>
+          <a:prstGeom prst="rect">
+            <a:avLst/>
+          </a:prstGeom>
+          <a:noFill/>
+          <a:ln/>
+        </p:spPr>
+        <p:txBody>
+          <a:bodyPr wrap="square" lIns="0" tIns="0" rIns="0" bIns="0" rtlCol="0" anchor="ctr"/>
+          <a:lstStyle/>
+          <a:p>
+            <a:pPr algn="ctr" indent="0" marL="0">
+              <a:buNone/>
+            </a:pPr>
+            <a:r>
+              <a:rPr lang="en-US" sz="1500" b="1" dirty="0">
+                <a:solidFill>
+                  <a:srgbClr val="E4C860"/>
+                </a:solidFill>
+                <a:latin typeface="Cambria" pitchFamily="34" charset="0"/>
+                <a:ea typeface="Cambria" pitchFamily="34" charset="-122"/>
+                <a:cs typeface="Cambria" pitchFamily="34" charset="-120"/>
+              </a:rPr>
+              <a:t>2</a:t>
+            </a:r>
+            <a:endParaRPr lang="en-US" sz="1500" dirty="0"/>
+          </a:p>
+        </p:txBody>
+      </p:sp>
+      <p:sp>
+        <p:nvSpPr>
+          <p:cNvPr id="10" name="Text 8"/>
+          <p:cNvSpPr/>
+          <p:nvPr/>
+        </p:nvSpPr>
+        <p:spPr>
+          <a:xfrm>
+            <a:off x="1234440" y="2450592"/>
+            <a:ext cx="5577840" cy="320040"/>
+          </a:xfrm>
+          <a:prstGeom prst="rect">
+            <a:avLst/>
+          </a:prstGeom>
+          <a:noFill/>
+          <a:ln/>
+        </p:spPr>
+        <p:txBody>
+          <a:bodyPr wrap="square" lIns="0" tIns="0" rIns="0" bIns="0" rtlCol="0" anchor="ctr"/>
+          <a:lstStyle/>
+          <a:p>
+            <a:pPr indent="0" marL="0">
+              <a:buNone/>
+            </a:pPr>
+            <a:r>
+              <a:rPr lang="en-US" sz="1250" b="1" dirty="0">
+                <a:solidFill>
+                  <a:srgbClr val="1B2340"/>
+                </a:solidFill>
+                <a:latin typeface="Calibri" pitchFamily="34" charset="0"/>
+                <a:ea typeface="Calibri" pitchFamily="34" charset="-122"/>
+                <a:cs typeface="Calibri" pitchFamily="34" charset="-120"/>
+              </a:rPr>
+              <a:t>ZigZag-as-subset check</a:t>
+            </a:r>
+            <a:endParaRPr lang="en-US" sz="1250" dirty="0"/>
+          </a:p>
+        </p:txBody>
+      </p:sp>
+      <p:sp>
+        <p:nvSpPr>
+          <p:cNvPr id="11" name="Text 9"/>
+          <p:cNvSpPr/>
+          <p:nvPr/>
+        </p:nvSpPr>
+        <p:spPr>
+          <a:xfrm>
+            <a:off x="1234440" y="2770632"/>
+            <a:ext cx="5623560" cy="685800"/>
+          </a:xfrm>
+          <a:prstGeom prst="rect">
+            <a:avLst/>
+          </a:prstGeom>
+          <a:noFill/>
+          <a:ln/>
+        </p:spPr>
+        <p:txBody>
+          <a:bodyPr wrap="square" lIns="0" tIns="0" rIns="0" bIns="0" rtlCol="0" anchor="ctr"/>
+          <a:lstStyle/>
+          <a:p>
+            <a:pPr indent="0" marL="0">
+              <a:lnSpc>
+                <a:spcPct val="118000"/>
+              </a:lnSpc>
+              <a:buNone/>
+            </a:pPr>
+            <a:r>
+              <a:rPr lang="en-US" sz="1000" dirty="0">
+                <a:solidFill>
+                  <a:srgbClr val="6B7390"/>
+                </a:solidFill>
+                <a:latin typeface="Calibri" pitchFamily="34" charset="0"/>
+                <a:ea typeface="Calibri" pitchFamily="34" charset="-122"/>
+                <a:cs typeface="Calibri" pitchFamily="34" charset="-120"/>
+              </a:rPr>
+              <a:t>Every ZigZag pivot's timestamp must exist on the OHLCV spine, with its close matching the OHLCV close within the same tolerance.</a:t>
+            </a:r>
+            <a:endParaRPr lang="en-US" sz="1000" dirty="0"/>
+          </a:p>
+        </p:txBody>
+      </p:sp>
+      <p:sp>
+        <p:nvSpPr>
+          <p:cNvPr id="12" name="Shape 10"/>
+          <p:cNvSpPr/>
+          <p:nvPr/>
+        </p:nvSpPr>
+        <p:spPr>
+          <a:xfrm>
+            <a:off x="640080" y="3575304"/>
+            <a:ext cx="457200" cy="457200"/>
+          </a:xfrm>
+          <a:prstGeom prst="ellipse">
+            <a:avLst/>
+          </a:prstGeom>
+          <a:solidFill>
+            <a:srgbClr val="1B2340"/>
+          </a:solidFill>
+          <a:ln/>
+        </p:spPr>
+      </p:sp>
+      <p:sp>
+        <p:nvSpPr>
+          <p:cNvPr id="13" name="Text 11"/>
+          <p:cNvSpPr/>
+          <p:nvPr/>
+        </p:nvSpPr>
+        <p:spPr>
+          <a:xfrm>
+            <a:off x="640080" y="3575304"/>
+            <a:ext cx="457200" cy="457200"/>
+          </a:xfrm>
+          <a:prstGeom prst="rect">
+            <a:avLst/>
+          </a:prstGeom>
+          <a:noFill/>
+          <a:ln/>
+        </p:spPr>
+        <p:txBody>
+          <a:bodyPr wrap="square" lIns="0" tIns="0" rIns="0" bIns="0" rtlCol="0" anchor="ctr"/>
+          <a:lstStyle/>
+          <a:p>
+            <a:pPr algn="ctr" indent="0" marL="0">
+              <a:buNone/>
+            </a:pPr>
+            <a:r>
+              <a:rPr lang="en-US" sz="1500" b="1" dirty="0">
+                <a:solidFill>
+                  <a:srgbClr val="E4C860"/>
+                </a:solidFill>
+                <a:latin typeface="Cambria" pitchFamily="34" charset="0"/>
+                <a:ea typeface="Cambria" pitchFamily="34" charset="-122"/>
+                <a:cs typeface="Cambria" pitchFamily="34" charset="-120"/>
+              </a:rPr>
+              <a:t>3</a:t>
+            </a:r>
+            <a:endParaRPr lang="en-US" sz="1500" dirty="0"/>
+          </a:p>
+        </p:txBody>
+      </p:sp>
+      <p:sp>
+        <p:nvSpPr>
+          <p:cNvPr id="14" name="Text 12"/>
+          <p:cNvSpPr/>
+          <p:nvPr/>
+        </p:nvSpPr>
+        <p:spPr>
+          <a:xfrm>
+            <a:off x="1234440" y="3529584"/>
+            <a:ext cx="5577840" cy="320040"/>
+          </a:xfrm>
+          <a:prstGeom prst="rect">
+            <a:avLst/>
+          </a:prstGeom>
+          <a:noFill/>
+          <a:ln/>
+        </p:spPr>
+        <p:txBody>
+          <a:bodyPr wrap="square" lIns="0" tIns="0" rIns="0" bIns="0" rtlCol="0" anchor="ctr"/>
+          <a:lstStyle/>
+          <a:p>
+            <a:pPr indent="0" marL="0">
+              <a:buNone/>
+            </a:pPr>
+            <a:r>
+              <a:rPr lang="en-US" sz="1250" b="1" dirty="0">
+                <a:solidFill>
+                  <a:srgbClr val="1B2340"/>
+                </a:solidFill>
+                <a:latin typeface="Calibri" pitchFamily="34" charset="0"/>
+                <a:ea typeface="Calibri" pitchFamily="34" charset="-122"/>
+                <a:cs typeface="Calibri" pitchFamily="34" charset="-120"/>
+              </a:rPr>
+              <a:t>Completeness / staleness check</a:t>
+            </a:r>
+            <a:endParaRPr lang="en-US" sz="1250" dirty="0"/>
+          </a:p>
+        </p:txBody>
+      </p:sp>
+      <p:sp>
+        <p:nvSpPr>
+          <p:cNvPr id="15" name="Text 13"/>
+          <p:cNvSpPr/>
+          <p:nvPr/>
+        </p:nvSpPr>
+        <p:spPr>
+          <a:xfrm>
+            <a:off x="1234440" y="3849624"/>
+            <a:ext cx="5623560" cy="685800"/>
+          </a:xfrm>
+          <a:prstGeom prst="rect">
+            <a:avLst/>
+          </a:prstGeom>
+          <a:noFill/>
+          <a:ln/>
+        </p:spPr>
+        <p:txBody>
+          <a:bodyPr wrap="square" lIns="0" tIns="0" rIns="0" bIns="0" rtlCol="0" anchor="ctr"/>
+          <a:lstStyle/>
+          <a:p>
+            <a:pPr indent="0" marL="0">
+              <a:lnSpc>
+                <a:spcPct val="118000"/>
+              </a:lnSpc>
+              <a:buNone/>
+            </a:pPr>
+            <a:r>
+              <a:rPr lang="en-US" sz="1000" dirty="0">
+                <a:solidFill>
+                  <a:srgbClr val="6B7390"/>
+                </a:solidFill>
+                <a:latin typeface="Calibri" pitchFamily="34" charset="0"/>
+                <a:ea typeface="Calibri" pitchFamily="34" charset="-122"/>
+                <a:cs typeface="Calibri" pitchFamily="34" charset="-120"/>
+              </a:rPr>
+              <a:t>All 11 per-bar sources must have staged rows; the latest OHLCV bar must appear in every source — catches one indicator silently falling behind.</a:t>
+            </a:r>
+            <a:endParaRPr lang="en-US" sz="1000" dirty="0"/>
+          </a:p>
+        </p:txBody>
+      </p:sp>
+      <p:sp>
+        <p:nvSpPr>
+          <p:cNvPr id="16" name="Shape 14"/>
+          <p:cNvSpPr/>
+          <p:nvPr/>
+        </p:nvSpPr>
+        <p:spPr>
+          <a:xfrm>
+            <a:off x="640080" y="4654296"/>
+            <a:ext cx="457200" cy="457200"/>
+          </a:xfrm>
+          <a:prstGeom prst="ellipse">
+            <a:avLst/>
+          </a:prstGeom>
+          <a:solidFill>
+            <a:srgbClr val="1B2340"/>
+          </a:solidFill>
+          <a:ln/>
+        </p:spPr>
+      </p:sp>
+      <p:sp>
+        <p:nvSpPr>
+          <p:cNvPr id="17" name="Text 15"/>
+          <p:cNvSpPr/>
+          <p:nvPr/>
+        </p:nvSpPr>
+        <p:spPr>
+          <a:xfrm>
+            <a:off x="640080" y="4654296"/>
+            <a:ext cx="457200" cy="457200"/>
+          </a:xfrm>
+          <a:prstGeom prst="rect">
+            <a:avLst/>
+          </a:prstGeom>
+          <a:noFill/>
+          <a:ln/>
+        </p:spPr>
+        <p:txBody>
+          <a:bodyPr wrap="square" lIns="0" tIns="0" rIns="0" bIns="0" rtlCol="0" anchor="ctr"/>
+          <a:lstStyle/>
+          <a:p>
+            <a:pPr algn="ctr" indent="0" marL="0">
+              <a:buNone/>
+            </a:pPr>
+            <a:r>
+              <a:rPr lang="en-US" sz="1500" b="1" dirty="0">
+                <a:solidFill>
+                  <a:srgbClr val="E4C860"/>
+                </a:solidFill>
+                <a:latin typeface="Cambria" pitchFamily="34" charset="0"/>
+                <a:ea typeface="Cambria" pitchFamily="34" charset="-122"/>
+                <a:cs typeface="Cambria" pitchFamily="34" charset="-120"/>
+              </a:rPr>
+              <a:t>4</a:t>
+            </a:r>
+            <a:endParaRPr lang="en-US" sz="1500" dirty="0"/>
+          </a:p>
+        </p:txBody>
+      </p:sp>
+      <p:sp>
+        <p:nvSpPr>
+          <p:cNvPr id="18" name="Text 16"/>
+          <p:cNvSpPr/>
+          <p:nvPr/>
+        </p:nvSpPr>
+        <p:spPr>
+          <a:xfrm>
+            <a:off x="1234440" y="4608576"/>
+            <a:ext cx="5577840" cy="320040"/>
+          </a:xfrm>
+          <a:prstGeom prst="rect">
+            <a:avLst/>
+          </a:prstGeom>
+          <a:noFill/>
+          <a:ln/>
+        </p:spPr>
+        <p:txBody>
+          <a:bodyPr wrap="square" lIns="0" tIns="0" rIns="0" bIns="0" rtlCol="0" anchor="ctr"/>
+          <a:lstStyle/>
+          <a:p>
+            <a:pPr indent="0" marL="0">
+              <a:buNone/>
+            </a:pPr>
+            <a:r>
+              <a:rPr lang="en-US" sz="1250" b="1" dirty="0">
+                <a:solidFill>
+                  <a:srgbClr val="1B2340"/>
+                </a:solidFill>
+                <a:latin typeface="Calibri" pitchFamily="34" charset="0"/>
+                <a:ea typeface="Calibri" pitchFamily="34" charset="-122"/>
+                <a:cs typeface="Calibri" pitchFamily="34" charset="-120"/>
+              </a:rPr>
+              <a:t>Market-hours gate</a:t>
+            </a:r>
+            <a:endParaRPr lang="en-US" sz="1250" dirty="0"/>
+          </a:p>
+        </p:txBody>
+      </p:sp>
+      <p:sp>
+        <p:nvSpPr>
+          <p:cNvPr id="19" name="Text 17"/>
+          <p:cNvSpPr/>
+          <p:nvPr/>
+        </p:nvSpPr>
+        <p:spPr>
+          <a:xfrm>
+            <a:off x="1234440" y="4928616"/>
+            <a:ext cx="5623560" cy="685800"/>
+          </a:xfrm>
+          <a:prstGeom prst="rect">
+            <a:avLst/>
+          </a:prstGeom>
+          <a:noFill/>
+          <a:ln/>
+        </p:spPr>
+        <p:txBody>
+          <a:bodyPr wrap="square" lIns="0" tIns="0" rIns="0" bIns="0" rtlCol="0" anchor="ctr"/>
+          <a:lstStyle/>
+          <a:p>
+            <a:pPr indent="0" marL="0">
+              <a:lnSpc>
+                <a:spcPct val="118000"/>
+              </a:lnSpc>
+              <a:buNone/>
+            </a:pPr>
+            <a:r>
+              <a:rPr lang="en-US" sz="1000" dirty="0">
+                <a:solidFill>
+                  <a:srgbClr val="6B7390"/>
+                </a:solidFill>
+                <a:latin typeface="Calibri" pitchFamily="34" charset="0"/>
+                <a:ea typeface="Calibri" pitchFamily="34" charset="-122"/>
+                <a:cs typeface="Calibri" pitchFamily="34" charset="-120"/>
+              </a:rPr>
+              <a:t>XAUUSD Mon–Fri 01:01–23:59 broker-server time (GMT+2/+3, US-DST-aware, converted to UTC). Closed-market cycles are skipped without burning a retry attempt.</a:t>
+            </a:r>
+            <a:endParaRPr lang="en-US" sz="1000" dirty="0"/>
+          </a:p>
+        </p:txBody>
+      </p:sp>
+      <p:sp>
+        <p:nvSpPr>
+          <p:cNvPr id="20" name="Shape 18"/>
+          <p:cNvSpPr/>
+          <p:nvPr/>
+        </p:nvSpPr>
+        <p:spPr>
+          <a:xfrm>
+            <a:off x="7178040" y="1417320"/>
+            <a:ext cx="4343400" cy="4892040"/>
+          </a:xfrm>
+          <a:prstGeom prst="roundRect">
+            <a:avLst>
+              <a:gd name="adj" fmla="val 1684"/>
+            </a:avLst>
+          </a:prstGeom>
+          <a:solidFill>
+            <a:srgbClr val="1B2340"/>
+          </a:solidFill>
+          <a:ln/>
+          <a:effectLst>
+            <a:outerShdw sx="100000" sy="100000" kx="0" ky="0" algn="bl" rotWithShape="0" blurRad="101600" dist="38100" dir="2700000">
+              <a:srgbClr val="000000">
+                <a:alpha val="12000"/>
+              </a:srgbClr>
+            </a:outerShdw>
+          </a:effectLst>
+        </p:spPr>
+      </p:sp>
+      <p:sp>
+        <p:nvSpPr>
+          <p:cNvPr id="21" name="Text 19"/>
+          <p:cNvSpPr/>
+          <p:nvPr/>
+        </p:nvSpPr>
+        <p:spPr>
+          <a:xfrm>
+            <a:off x="7452360" y="1645920"/>
+            <a:ext cx="3840480" cy="274320"/>
+          </a:xfrm>
+          <a:prstGeom prst="rect">
+            <a:avLst/>
+          </a:prstGeom>
+          <a:noFill/>
+          <a:ln/>
+        </p:spPr>
+        <p:txBody>
+          <a:bodyPr wrap="square" lIns="0" tIns="0" rIns="0" bIns="0" rtlCol="0" anchor="ctr"/>
+          <a:lstStyle/>
+          <a:p>
+            <a:pPr indent="0" marL="0">
+              <a:buNone/>
+            </a:pPr>
+            <a:r>
+              <a:rPr lang="en-US" sz="1100" b="1" spc="200" kern="0" dirty="0">
+                <a:solidFill>
+                  <a:srgbClr val="C9A227"/>
+                </a:solidFill>
+                <a:latin typeface="Calibri" pitchFamily="34" charset="0"/>
+                <a:ea typeface="Calibri" pitchFamily="34" charset="-122"/>
+                <a:cs typeface="Calibri" pitchFamily="34" charset="-120"/>
+              </a:rPr>
+              <a:t>CYCLE LIFECYCLE</a:t>
+            </a:r>
+            <a:endParaRPr lang="en-US" sz="1100" dirty="0"/>
+          </a:p>
+        </p:txBody>
+      </p:sp>
+      <p:sp>
+        <p:nvSpPr>
+          <p:cNvPr id="22" name="Shape 20"/>
+          <p:cNvSpPr/>
+          <p:nvPr/>
+        </p:nvSpPr>
+        <p:spPr>
+          <a:xfrm>
+            <a:off x="7452360" y="2057400"/>
+            <a:ext cx="3794760" cy="457200"/>
+          </a:xfrm>
+          <a:prstGeom prst="roundRect">
+            <a:avLst>
+              <a:gd name="adj" fmla="val 12000"/>
+            </a:avLst>
+          </a:prstGeom>
+          <a:solidFill>
+            <a:srgbClr val="141A32"/>
+          </a:solidFill>
+          <a:ln/>
+        </p:spPr>
+      </p:sp>
+      <p:sp>
+        <p:nvSpPr>
+          <p:cNvPr id="23" name="Text 21"/>
+          <p:cNvSpPr/>
+          <p:nvPr/>
+        </p:nvSpPr>
+        <p:spPr>
+          <a:xfrm>
+            <a:off x="7452360" y="2057400"/>
+            <a:ext cx="3794760" cy="457200"/>
+          </a:xfrm>
+          <a:prstGeom prst="rect">
+            <a:avLst/>
+          </a:prstGeom>
+          <a:noFill/>
+          <a:ln/>
+        </p:spPr>
+        <p:txBody>
+          <a:bodyPr wrap="square" lIns="0" tIns="0" rIns="0" bIns="0" rtlCol="0" anchor="ctr"/>
+          <a:lstStyle/>
+          <a:p>
+            <a:pPr algn="ctr" indent="0" marL="0">
+              <a:buNone/>
+            </a:pPr>
+            <a:r>
+              <a:rPr lang="en-US" sz="1150" b="1" dirty="0">
+                <a:solidFill>
+                  <a:srgbClr val="FFFFFF"/>
+                </a:solidFill>
+                <a:latin typeface="Calibri" pitchFamily="34" charset="0"/>
+                <a:ea typeface="Calibri" pitchFamily="34" charset="-122"/>
+                <a:cs typeface="Calibri" pitchFamily="34" charset="-120"/>
+              </a:rPr>
+              <a:t>collecting</a:t>
+            </a:r>
+            <a:endParaRPr lang="en-US" sz="1150" dirty="0"/>
+          </a:p>
+        </p:txBody>
+      </p:sp>
+      <p:sp>
+        <p:nvSpPr>
+          <p:cNvPr id="24" name="Shape 22"/>
+          <p:cNvSpPr/>
+          <p:nvPr/>
+        </p:nvSpPr>
+        <p:spPr>
+          <a:xfrm>
+            <a:off x="7452360" y="2624328"/>
+            <a:ext cx="3794760" cy="457200"/>
+          </a:xfrm>
+          <a:prstGeom prst="roundRect">
+            <a:avLst>
+              <a:gd name="adj" fmla="val 12000"/>
+            </a:avLst>
+          </a:prstGeom>
+          <a:solidFill>
+            <a:srgbClr val="141A32"/>
+          </a:solidFill>
+          <a:ln/>
+        </p:spPr>
+      </p:sp>
+      <p:sp>
+        <p:nvSpPr>
+          <p:cNvPr id="25" name="Text 23"/>
+          <p:cNvSpPr/>
+          <p:nvPr/>
+        </p:nvSpPr>
+        <p:spPr>
+          <a:xfrm>
+            <a:off x="7452360" y="2624328"/>
+            <a:ext cx="3794760" cy="457200"/>
+          </a:xfrm>
+          <a:prstGeom prst="rect">
+            <a:avLst/>
+          </a:prstGeom>
+          <a:noFill/>
+          <a:ln/>
+        </p:spPr>
+        <p:txBody>
+          <a:bodyPr wrap="square" lIns="0" tIns="0" rIns="0" bIns="0" rtlCol="0" anchor="ctr"/>
+          <a:lstStyle/>
+          <a:p>
+            <a:pPr algn="ctr" indent="0" marL="0">
+              <a:buNone/>
+            </a:pPr>
+            <a:r>
+              <a:rPr lang="en-US" sz="1150" b="1" dirty="0">
+                <a:solidFill>
+                  <a:srgbClr val="FFFFFF"/>
+                </a:solidFill>
+                <a:latin typeface="Calibri" pitchFamily="34" charset="0"/>
+                <a:ea typeface="Calibri" pitchFamily="34" charset="-122"/>
+                <a:cs typeface="Calibri" pitchFamily="34" charset="-120"/>
+              </a:rPr>
+              <a:t>validating</a:t>
+            </a:r>
+            <a:endParaRPr lang="en-US" sz="1150" dirty="0"/>
+          </a:p>
+        </p:txBody>
+      </p:sp>
+      <p:sp>
+        <p:nvSpPr>
+          <p:cNvPr id="26" name="Shape 24"/>
+          <p:cNvSpPr/>
+          <p:nvPr/>
+        </p:nvSpPr>
+        <p:spPr>
+          <a:xfrm>
+            <a:off x="7452360" y="3191256"/>
+            <a:ext cx="3794760" cy="457200"/>
+          </a:xfrm>
+          <a:prstGeom prst="roundRect">
+            <a:avLst>
+              <a:gd name="adj" fmla="val 12000"/>
+            </a:avLst>
+          </a:prstGeom>
+          <a:solidFill>
+            <a:srgbClr val="C9A227"/>
+          </a:solidFill>
+          <a:ln/>
+        </p:spPr>
+      </p:sp>
+      <p:sp>
+        <p:nvSpPr>
+          <p:cNvPr id="27" name="Text 25"/>
+          <p:cNvSpPr/>
+          <p:nvPr/>
+        </p:nvSpPr>
+        <p:spPr>
+          <a:xfrm>
+            <a:off x="7452360" y="3191256"/>
+            <a:ext cx="3794760" cy="457200"/>
+          </a:xfrm>
+          <a:prstGeom prst="rect">
+            <a:avLst/>
+          </a:prstGeom>
+          <a:noFill/>
+          <a:ln/>
+        </p:spPr>
+        <p:txBody>
+          <a:bodyPr wrap="square" lIns="0" tIns="0" rIns="0" bIns="0" rtlCol="0" anchor="ctr"/>
+          <a:lstStyle/>
+          <a:p>
+            <a:pPr algn="ctr" indent="0" marL="0">
+              <a:buNone/>
+            </a:pPr>
+            <a:r>
+              <a:rPr lang="en-US" sz="1150" b="1" dirty="0">
+                <a:solidFill>
+                  <a:srgbClr val="141A32"/>
+                </a:solidFill>
+                <a:latin typeface="Calibri" pitchFamily="34" charset="0"/>
+                <a:ea typeface="Calibri" pitchFamily="34" charset="-122"/>
+                <a:cs typeface="Calibri" pitchFamily="34" charset="-120"/>
+              </a:rPr>
+              <a:t>validated  ✓</a:t>
+            </a:r>
+            <a:endParaRPr lang="en-US" sz="1150" dirty="0"/>
+          </a:p>
+        </p:txBody>
+      </p:sp>
+      <p:sp>
+        <p:nvSpPr>
+          <p:cNvPr id="28" name="Shape 26"/>
+          <p:cNvSpPr/>
+          <p:nvPr/>
+        </p:nvSpPr>
+        <p:spPr>
+          <a:xfrm>
+            <a:off x="7452360" y="3758184"/>
+            <a:ext cx="3794760" cy="457200"/>
+          </a:xfrm>
+          <a:prstGeom prst="roundRect">
+            <a:avLst>
+              <a:gd name="adj" fmla="val 12000"/>
+            </a:avLst>
+          </a:prstGeom>
+          <a:solidFill>
+            <a:srgbClr val="3A2230"/>
+          </a:solidFill>
+          <a:ln/>
+        </p:spPr>
+      </p:sp>
+      <p:sp>
+        <p:nvSpPr>
+          <p:cNvPr id="29" name="Text 27"/>
+          <p:cNvSpPr/>
+          <p:nvPr/>
+        </p:nvSpPr>
+        <p:spPr>
+          <a:xfrm>
+            <a:off x="7452360" y="3758184"/>
+            <a:ext cx="3794760" cy="457200"/>
+          </a:xfrm>
+          <a:prstGeom prst="rect">
+            <a:avLst/>
+          </a:prstGeom>
+          <a:noFill/>
+          <a:ln/>
+        </p:spPr>
+        <p:txBody>
+          <a:bodyPr wrap="square" lIns="0" tIns="0" rIns="0" bIns="0" rtlCol="0" anchor="ctr"/>
+          <a:lstStyle/>
+          <a:p>
+            <a:pPr algn="ctr" indent="0" marL="0">
+              <a:buNone/>
+            </a:pPr>
+            <a:r>
+              <a:rPr lang="en-US" sz="1150" b="1" dirty="0">
+                <a:solidFill>
+                  <a:srgbClr val="FFFFFF"/>
+                </a:solidFill>
+                <a:latin typeface="Calibri" pitchFamily="34" charset="0"/>
+                <a:ea typeface="Calibri" pitchFamily="34" charset="-122"/>
+                <a:cs typeface="Calibri" pitchFamily="34" charset="-120"/>
+              </a:rPr>
+              <a:t>rejected  ✗</a:t>
+            </a:r>
+            <a:endParaRPr lang="en-US" sz="1150" dirty="0"/>
+          </a:p>
+        </p:txBody>
+      </p:sp>
+      <p:sp>
+        <p:nvSpPr>
+          <p:cNvPr id="30" name="Text 28"/>
+          <p:cNvSpPr/>
+          <p:nvPr/>
+        </p:nvSpPr>
+        <p:spPr>
+          <a:xfrm>
+            <a:off x="7452360" y="4370832"/>
+            <a:ext cx="3840480" cy="685800"/>
+          </a:xfrm>
+          <a:prstGeom prst="rect">
+            <a:avLst/>
+          </a:prstGeom>
+          <a:noFill/>
+          <a:ln/>
+        </p:spPr>
+        <p:txBody>
+          <a:bodyPr wrap="square" lIns="0" tIns="0" rIns="0" bIns="0" rtlCol="0" anchor="ctr"/>
+          <a:lstStyle/>
+          <a:p>
+            <a:pPr indent="0" marL="0">
+              <a:lnSpc>
+                <a:spcPct val="120000"/>
+              </a:lnSpc>
+              <a:buNone/>
+            </a:pPr>
+            <a:r>
+              <a:rPr lang="en-US" sz="950" dirty="0">
+                <a:solidFill>
+                  <a:srgbClr val="AEB9D6"/>
+                </a:solidFill>
+                <a:latin typeface="Calibri" pitchFamily="34" charset="0"/>
+                <a:ea typeface="Calibri" pitchFamily="34" charset="-122"/>
+                <a:cs typeface="Calibri" pitchFamily="34" charset="-120"/>
+              </a:rPr>
+              <a:t>On rejection: staged rows are purged, the reason is logged to validation_failures (JSON detail per mismatch), and the cycle re-requests.</a:t>
+            </a:r>
+            <a:endParaRPr lang="en-US" sz="950" dirty="0"/>
+          </a:p>
+        </p:txBody>
+      </p:sp>
+      <p:sp>
+        <p:nvSpPr>
+          <p:cNvPr id="31" name="Text 29"/>
+          <p:cNvSpPr/>
+          <p:nvPr/>
+        </p:nvSpPr>
+        <p:spPr>
+          <a:xfrm>
+            <a:off x="7452360" y="5193792"/>
+            <a:ext cx="2743200" cy="274320"/>
+          </a:xfrm>
+          <a:prstGeom prst="rect">
+            <a:avLst/>
+          </a:prstGeom>
+          <a:noFill/>
+          <a:ln/>
+        </p:spPr>
+        <p:txBody>
+          <a:bodyPr wrap="square" lIns="0" tIns="0" rIns="0" bIns="0" rtlCol="0" anchor="ctr"/>
+          <a:lstStyle/>
+          <a:p>
+            <a:pPr indent="0" marL="0">
+              <a:buNone/>
+            </a:pPr>
+            <a:r>
+              <a:rPr lang="en-US" sz="1000" dirty="0">
+                <a:solidFill>
+                  <a:srgbClr val="AEB9D6"/>
+                </a:solidFill>
+                <a:latin typeface="Calibri" pitchFamily="34" charset="0"/>
+                <a:ea typeface="Calibri" pitchFamily="34" charset="-122"/>
+                <a:cs typeface="Calibri" pitchFamily="34" charset="-120"/>
+              </a:rPr>
+              <a:t>MAX_ATTEMPTS_PER_CYCLE</a:t>
+            </a:r>
+            <a:endParaRPr lang="en-US" sz="1000" dirty="0"/>
+          </a:p>
+        </p:txBody>
+      </p:sp>
+      <p:sp>
+        <p:nvSpPr>
+          <p:cNvPr id="32" name="Text 30"/>
+          <p:cNvSpPr/>
+          <p:nvPr/>
+        </p:nvSpPr>
+        <p:spPr>
+          <a:xfrm>
+            <a:off x="10149840" y="5193792"/>
+            <a:ext cx="1097280" cy="274320"/>
+          </a:xfrm>
+          <a:prstGeom prst="rect">
+            <a:avLst/>
+          </a:prstGeom>
+          <a:noFill/>
+          <a:ln/>
+        </p:spPr>
+        <p:txBody>
+          <a:bodyPr wrap="square" lIns="0" tIns="0" rIns="0" bIns="0" rtlCol="0" anchor="ctr"/>
+          <a:lstStyle/>
+          <a:p>
+            <a:pPr algn="r" indent="0" marL="0">
+              <a:buNone/>
+            </a:pPr>
+            <a:r>
+              <a:rPr lang="en-US" sz="1000" b="1" dirty="0">
+                <a:solidFill>
+                  <a:srgbClr val="E4C860"/>
+                </a:solidFill>
+                <a:latin typeface="Calibri" pitchFamily="34" charset="0"/>
+                <a:ea typeface="Calibri" pitchFamily="34" charset="-122"/>
+                <a:cs typeface="Calibri" pitchFamily="34" charset="-120"/>
+              </a:rPr>
+              <a:t>3</a:t>
+            </a:r>
+            <a:endParaRPr lang="en-US" sz="1000" dirty="0"/>
+          </a:p>
+        </p:txBody>
+      </p:sp>
+      <p:sp>
+        <p:nvSpPr>
+          <p:cNvPr id="33" name="Text 31"/>
+          <p:cNvSpPr/>
+          <p:nvPr/>
+        </p:nvSpPr>
+        <p:spPr>
+          <a:xfrm>
+            <a:off x="7452360" y="5486400"/>
+            <a:ext cx="2743200" cy="274320"/>
+          </a:xfrm>
+          <a:prstGeom prst="rect">
+            <a:avLst/>
+          </a:prstGeom>
+          <a:noFill/>
+          <a:ln/>
+        </p:spPr>
+        <p:txBody>
+          <a:bodyPr wrap="square" lIns="0" tIns="0" rIns="0" bIns="0" rtlCol="0" anchor="ctr"/>
+          <a:lstStyle/>
+          <a:p>
+            <a:pPr indent="0" marL="0">
+              <a:buNone/>
+            </a:pPr>
+            <a:r>
+              <a:rPr lang="en-US" sz="1000" dirty="0">
+                <a:solidFill>
+                  <a:srgbClr val="AEB9D6"/>
+                </a:solidFill>
+                <a:latin typeface="Calibri" pitchFamily="34" charset="0"/>
+                <a:ea typeface="Calibri" pitchFamily="34" charset="-122"/>
+                <a:cs typeface="Calibri" pitchFamily="34" charset="-120"/>
+              </a:rPr>
+              <a:t>RETRY_WAIT_SEC</a:t>
+            </a:r>
+            <a:endParaRPr lang="en-US" sz="1000" dirty="0"/>
+          </a:p>
+        </p:txBody>
+      </p:sp>
+      <p:sp>
+        <p:nvSpPr>
+          <p:cNvPr id="34" name="Text 32"/>
+          <p:cNvSpPr/>
+          <p:nvPr/>
+        </p:nvSpPr>
+        <p:spPr>
+          <a:xfrm>
+            <a:off x="10149840" y="5486400"/>
+            <a:ext cx="1097280" cy="274320"/>
+          </a:xfrm>
+          <a:prstGeom prst="rect">
+            <a:avLst/>
+          </a:prstGeom>
+          <a:noFill/>
+          <a:ln/>
+        </p:spPr>
+        <p:txBody>
+          <a:bodyPr wrap="square" lIns="0" tIns="0" rIns="0" bIns="0" rtlCol="0" anchor="ctr"/>
+          <a:lstStyle/>
+          <a:p>
+            <a:pPr algn="r" indent="0" marL="0">
+              <a:buNone/>
+            </a:pPr>
+            <a:r>
+              <a:rPr lang="en-US" sz="1000" b="1" dirty="0">
+                <a:solidFill>
+                  <a:srgbClr val="E4C860"/>
+                </a:solidFill>
+                <a:latin typeface="Calibri" pitchFamily="34" charset="0"/>
+                <a:ea typeface="Calibri" pitchFamily="34" charset="-122"/>
+                <a:cs typeface="Calibri" pitchFamily="34" charset="-120"/>
+              </a:rPr>
+              <a:t>65</a:t>
+            </a:r>
+            <a:endParaRPr lang="en-US" sz="1000" dirty="0"/>
+          </a:p>
+        </p:txBody>
+      </p:sp>
+      <p:sp>
+        <p:nvSpPr>
+          <p:cNvPr id="35" name="Text 33"/>
+          <p:cNvSpPr/>
+          <p:nvPr/>
+        </p:nvSpPr>
+        <p:spPr>
+          <a:xfrm>
+            <a:off x="7452360" y="5779008"/>
+            <a:ext cx="2743200" cy="274320"/>
+          </a:xfrm>
+          <a:prstGeom prst="rect">
+            <a:avLst/>
+          </a:prstGeom>
+          <a:noFill/>
+          <a:ln/>
+        </p:spPr>
+        <p:txBody>
+          <a:bodyPr wrap="square" lIns="0" tIns="0" rIns="0" bIns="0" rtlCol="0" anchor="ctr"/>
+          <a:lstStyle/>
+          <a:p>
+            <a:pPr indent="0" marL="0">
+              <a:buNone/>
+            </a:pPr>
+            <a:r>
+              <a:rPr lang="en-US" sz="1000" dirty="0">
+                <a:solidFill>
+                  <a:srgbClr val="AEB9D6"/>
+                </a:solidFill>
+                <a:latin typeface="Calibri" pitchFamily="34" charset="0"/>
+                <a:ea typeface="Calibri" pitchFamily="34" charset="-122"/>
+                <a:cs typeface="Calibri" pitchFamily="34" charset="-120"/>
+              </a:rPr>
+              <a:t>CLOSE_TOLERANCE</a:t>
+            </a:r>
+            <a:endParaRPr lang="en-US" sz="1000" dirty="0"/>
+          </a:p>
+        </p:txBody>
+      </p:sp>
+      <p:sp>
+        <p:nvSpPr>
+          <p:cNvPr id="36" name="Text 34"/>
+          <p:cNvSpPr/>
+          <p:nvPr/>
+        </p:nvSpPr>
+        <p:spPr>
+          <a:xfrm>
+            <a:off x="10149840" y="5779008"/>
+            <a:ext cx="1097280" cy="274320"/>
+          </a:xfrm>
+          <a:prstGeom prst="rect">
+            <a:avLst/>
+          </a:prstGeom>
+          <a:noFill/>
+          <a:ln/>
+        </p:spPr>
+        <p:txBody>
+          <a:bodyPr wrap="square" lIns="0" tIns="0" rIns="0" bIns="0" rtlCol="0" anchor="ctr"/>
+          <a:lstStyle/>
+          <a:p>
+            <a:pPr algn="r" indent="0" marL="0">
+              <a:buNone/>
+            </a:pPr>
+            <a:r>
+              <a:rPr lang="en-US" sz="1000" b="1" dirty="0">
+                <a:solidFill>
+                  <a:srgbClr val="E4C860"/>
+                </a:solidFill>
+                <a:latin typeface="Calibri" pitchFamily="34" charset="0"/>
+                <a:ea typeface="Calibri" pitchFamily="34" charset="-122"/>
+                <a:cs typeface="Calibri" pitchFamily="34" charset="-120"/>
+              </a:rPr>
+              <a:t>0.01</a:t>
+            </a:r>
+            <a:endParaRPr lang="en-US" sz="1000" dirty="0"/>
+          </a:p>
+        </p:txBody>
+      </p:sp>
+      <p:sp>
+        <p:nvSpPr>
+          <p:cNvPr id="37" name="Text 35"/>
+          <p:cNvSpPr/>
+          <p:nvPr/>
+        </p:nvSpPr>
+        <p:spPr>
+          <a:xfrm>
+            <a:off x="457200" y="6473952"/>
+            <a:ext cx="7315200" cy="274320"/>
+          </a:xfrm>
+          <a:prstGeom prst="rect">
+            <a:avLst/>
+          </a:prstGeom>
+          <a:noFill/>
+          <a:ln/>
+        </p:spPr>
+        <p:txBody>
+          <a:bodyPr wrap="square" lIns="0" tIns="0" rIns="0" bIns="0" rtlCol="0" anchor="ctr"/>
+          <a:lstStyle/>
+          <a:p>
+            <a:pPr indent="0" marL="0">
+              <a:buNone/>
+            </a:pPr>
+            <a:r>
+              <a:rPr lang="en-US" sz="900" dirty="0">
+                <a:solidFill>
+                  <a:srgbClr val="6B7390"/>
+                </a:solidFill>
+                <a:latin typeface="Calibri" pitchFamily="34" charset="0"/>
+                <a:ea typeface="Calibri" pitchFamily="34" charset="-122"/>
+                <a:cs typeface="Calibri" pitchFamily="34" charset="-120"/>
+              </a:rPr>
+              <a:t>Combined Architecture — Executive Overview</a:t>
+            </a:r>
+            <a:endParaRPr lang="en-US" sz="900" dirty="0"/>
+          </a:p>
+        </p:txBody>
+      </p:sp>
+      <p:sp>
+        <p:nvSpPr>
+          <p:cNvPr id="38" name="Text 36"/>
+          <p:cNvSpPr/>
+          <p:nvPr/>
+        </p:nvSpPr>
+        <p:spPr>
+          <a:xfrm>
+            <a:off x="11155680" y="6473952"/>
+            <a:ext cx="548640" cy="274320"/>
+          </a:xfrm>
+          <a:prstGeom prst="rect">
+            <a:avLst/>
+          </a:prstGeom>
+          <a:noFill/>
+          <a:ln/>
+        </p:spPr>
+        <p:txBody>
+          <a:bodyPr wrap="square" lIns="0" tIns="0" rIns="0" bIns="0" rtlCol="0" anchor="ctr"/>
+          <a:lstStyle/>
+          <a:p>
+            <a:pPr algn="r" indent="0" marL="0">
+              <a:buNone/>
+            </a:pPr>
+            <a:r>
+              <a:rPr lang="en-US" sz="900" dirty="0">
+                <a:solidFill>
+                  <a:srgbClr val="6B7390"/>
+                </a:solidFill>
+                <a:latin typeface="Calibri" pitchFamily="34" charset="0"/>
+                <a:ea typeface="Calibri" pitchFamily="34" charset="-122"/>
+                <a:cs typeface="Calibri" pitchFamily="34" charset="-120"/>
+              </a:rPr>
+              <a:t>7 / 12</a:t>
+            </a:r>
+            <a:endParaRPr lang="en-US" sz="900" dirty="0"/>
+          </a:p>
+        </p:txBody>
+      </p:sp>
+    </p:spTree>
+  </p:cSld>
+  <p:clrMapOvr>
+    <a:masterClrMapping/>
+  </p:clrMapOvr>
+</p:sld>
+</file>
+
+<file path=ppt/slides/slide8.xml><?xml version="1.0" encoding="utf-8"?>
+<p:sld xmlns:a="http://schemas.openxmlformats.org/drawingml/2006/main" xmlns:r="http://schemas.openxmlformats.org/officeDocument/2006/relationships" xmlns:p="http://schemas.openxmlformats.org/presentationml/2006/main">
+  <p:cSld name="Slide 8">
+    <p:bg>
+      <p:bgPr>
+        <a:solidFill>
+          <a:srgbClr val="F7F7F5"/>
+        </a:solidFill>
+      </p:bgPr>
+    </p:bg>
+    <p:spTree>
+      <p:nvGrpSpPr>
+        <p:cNvPr id="1" name=""/>
+        <p:cNvGrpSpPr/>
+        <p:nvPr/>
+      </p:nvGrpSpPr>
+      <p:grpSpPr>
+        <a:xfrm>
+          <a:off x="0" y="0"/>
+          <a:ext cx="0" cy="0"/>
+          <a:chOff x="0" y="0"/>
+          <a:chExt cx="0" cy="0"/>
+        </a:xfrm>
+      </p:grpSpPr>
+      <p:sp>
+        <p:nvSpPr>
+          <p:cNvPr id="2" name="Text 0"/>
+          <p:cNvSpPr/>
+          <p:nvPr/>
+        </p:nvSpPr>
+        <p:spPr>
+          <a:xfrm>
+            <a:off x="640080" y="384048"/>
+            <a:ext cx="10058400" cy="502920"/>
+          </a:xfrm>
+          <a:prstGeom prst="rect">
+            <a:avLst/>
+          </a:prstGeom>
+          <a:noFill/>
+          <a:ln/>
+        </p:spPr>
+        <p:txBody>
+          <a:bodyPr wrap="square" lIns="0" tIns="0" rIns="0" bIns="0" rtlCol="0" anchor="ctr"/>
+          <a:lstStyle/>
+          <a:p>
+            <a:pPr indent="0" marL="0">
+              <a:buNone/>
+            </a:pPr>
+            <a:r>
+              <a:rPr lang="en-US" sz="2500" b="1" dirty="0">
+                <a:solidFill>
+                  <a:srgbClr val="1B2340"/>
+                </a:solidFill>
+                <a:latin typeface="Cambria" pitchFamily="34" charset="0"/>
+                <a:ea typeface="Cambria" pitchFamily="34" charset="-122"/>
+                <a:cs typeface="Cambria" pitchFamily="34" charset="-120"/>
+              </a:rPr>
+              <a:t>Calculate Stage — What Python Actually Computes</a:t>
+            </a:r>
+            <a:endParaRPr lang="en-US" sz="2500" dirty="0"/>
+          </a:p>
+        </p:txBody>
+      </p:sp>
+      <p:sp>
+        <p:nvSpPr>
+          <p:cNvPr id="3" name="Text 1"/>
+          <p:cNvSpPr/>
+          <p:nvPr/>
+        </p:nvSpPr>
+        <p:spPr>
+          <a:xfrm>
+            <a:off x="640080" y="841248"/>
+            <a:ext cx="10607040" cy="320040"/>
+          </a:xfrm>
+          <a:prstGeom prst="rect">
+            <a:avLst/>
+          </a:prstGeom>
+          <a:noFill/>
+          <a:ln/>
+        </p:spPr>
+        <p:txBody>
+          <a:bodyPr wrap="square" lIns="0" tIns="0" rIns="0" bIns="0" rtlCol="0" anchor="ctr"/>
+          <a:lstStyle/>
+          <a:p>
+            <a:pPr indent="0" marL="0">
+              <a:buNone/>
+            </a:pPr>
+            <a:r>
+              <a:rPr lang="en-US" sz="1150" i="1" dirty="0">
+                <a:solidFill>
+                  <a:srgbClr val="6B7390"/>
+                </a:solidFill>
+                <a:latin typeface="Calibri" pitchFamily="34" charset="0"/>
+                <a:ea typeface="Calibri" pitchFamily="34" charset="-122"/>
+                <a:cs typeface="Calibri" pitchFamily="34" charset="-120"/>
+              </a:rPr>
               <a:t>Four hand-ported modules; each has a different dependency on the MQL5 admin layer</a:t>
             </a:r>
             <a:endParaRPr lang="en-US" sz="1150" dirty="0"/>
@@ -10854,7 +12974,7 @@
       </p:sp>
       <p:graphicFrame>
         <p:nvGraphicFramePr>
-          <p:cNvPr id="8" name="Table 0"/>
+          <p:cNvPr id="9" name="Table 0"/>
           <p:cNvGraphicFramePr>
             <a:graphicFrameLocks noGrp="1"/>
           </p:cNvGraphicFramePr>
@@ -12342,1072 +14462,7 @@
                 <a:ea typeface="Calibri" pitchFamily="34" charset="-122"/>
                 <a:cs typeface="Calibri" pitchFamily="34" charset="-120"/>
               </a:rPr>
-              <a:t>7 / 11</a:t>
-            </a:r>
-            <a:endParaRPr lang="en-US" sz="900" dirty="0"/>
-          </a:p>
-        </p:txBody>
-      </p:sp>
-    </p:spTree>
-  </p:cSld>
-  <p:clrMapOvr>
-    <a:masterClrMapping/>
-  </p:clrMapOvr>
-</p:sld>
-</file>
-
-<file path=ppt/slides/slide8.xml><?xml version="1.0" encoding="utf-8"?>
-<p:sld xmlns:a="http://schemas.openxmlformats.org/drawingml/2006/main" xmlns:r="http://schemas.openxmlformats.org/officeDocument/2006/relationships" xmlns:p="http://schemas.openxmlformats.org/presentationml/2006/main">
-  <p:cSld name="Slide 8">
-    <p:bg>
-      <p:bgPr>
-        <a:solidFill>
-          <a:srgbClr val="F7F7F5"/>
-        </a:solidFill>
-      </p:bgPr>
-    </p:bg>
-    <p:spTree>
-      <p:nvGrpSpPr>
-        <p:cNvPr id="1" name=""/>
-        <p:cNvGrpSpPr/>
-        <p:nvPr/>
-      </p:nvGrpSpPr>
-      <p:grpSpPr>
-        <a:xfrm>
-          <a:off x="0" y="0"/>
-          <a:ext cx="0" cy="0"/>
-          <a:chOff x="0" y="0"/>
-          <a:chExt cx="0" cy="0"/>
-        </a:xfrm>
-      </p:grpSpPr>
-      <p:sp>
-        <p:nvSpPr>
-          <p:cNvPr id="2" name="Text 0"/>
-          <p:cNvSpPr/>
-          <p:nvPr/>
-        </p:nvSpPr>
-        <p:spPr>
-          <a:xfrm>
-            <a:off x="640080" y="384048"/>
-            <a:ext cx="10058400" cy="502920"/>
-          </a:xfrm>
-          <a:prstGeom prst="rect">
-            <a:avLst/>
-          </a:prstGeom>
-          <a:noFill/>
-          <a:ln/>
-        </p:spPr>
-        <p:txBody>
-          <a:bodyPr wrap="square" lIns="0" tIns="0" rIns="0" bIns="0" rtlCol="0" anchor="ctr"/>
-          <a:lstStyle/>
-          <a:p>
-            <a:pPr indent="0" marL="0">
-              <a:buNone/>
-            </a:pPr>
-            <a:r>
-              <a:rPr lang="en-US" sz="2500" b="1" dirty="0">
-                <a:solidFill>
-                  <a:srgbClr val="1B2340"/>
-                </a:solidFill>
-                <a:latin typeface="Cambria" pitchFamily="34" charset="0"/>
-                <a:ea typeface="Cambria" pitchFamily="34" charset="-122"/>
-                <a:cs typeface="Cambria" pitchFamily="34" charset="-120"/>
-              </a:rPr>
-              <a:t>Distribution, Recovery &amp; Deployment</a:t>
-            </a:r>
-            <a:endParaRPr lang="en-US" sz="2500" dirty="0"/>
-          </a:p>
-        </p:txBody>
-      </p:sp>
-      <p:sp>
-        <p:nvSpPr>
-          <p:cNvPr id="3" name="Text 1"/>
-          <p:cNvSpPr/>
-          <p:nvPr/>
-        </p:nvSpPr>
-        <p:spPr>
-          <a:xfrm>
-            <a:off x="640080" y="841248"/>
-            <a:ext cx="10607040" cy="320040"/>
-          </a:xfrm>
-          <a:prstGeom prst="rect">
-            <a:avLst/>
-          </a:prstGeom>
-          <a:noFill/>
-          <a:ln/>
-        </p:spPr>
-        <p:txBody>
-          <a:bodyPr wrap="square" lIns="0" tIns="0" rIns="0" bIns="0" rtlCol="0" anchor="ctr"/>
-          <a:lstStyle/>
-          <a:p>
-            <a:pPr indent="0" marL="0">
-              <a:buNone/>
-            </a:pPr>
-            <a:r>
-              <a:rPr lang="en-US" sz="1150" i="1" dirty="0">
-                <a:solidFill>
-                  <a:srgbClr val="6B7390"/>
-                </a:solidFill>
-                <a:latin typeface="Calibri" pitchFamily="34" charset="0"/>
-                <a:ea typeface="Calibri" pitchFamily="34" charset="-122"/>
-                <a:cs typeface="Calibri" pitchFamily="34" charset="-120"/>
-              </a:rPr>
-              <a:t>The push worker's outbox loop, its safety net, and how the whole stack runs on the VPS</a:t>
-            </a:r>
-            <a:endParaRPr lang="en-US" sz="1150" dirty="0"/>
-          </a:p>
-        </p:txBody>
-      </p:sp>
-      <p:sp>
-        <p:nvSpPr>
-          <p:cNvPr id="4" name="Shape 2"/>
-          <p:cNvSpPr/>
-          <p:nvPr/>
-        </p:nvSpPr>
-        <p:spPr>
-          <a:xfrm>
-            <a:off x="640080" y="1371600"/>
-            <a:ext cx="5257800" cy="3063240"/>
-          </a:xfrm>
-          <a:prstGeom prst="roundRect">
-            <a:avLst>
-              <a:gd name="adj" fmla="val 2388"/>
-            </a:avLst>
-          </a:prstGeom>
-          <a:solidFill>
-            <a:srgbClr val="FFFFFF"/>
-          </a:solidFill>
-          <a:ln/>
-          <a:effectLst>
-            <a:outerShdw sx="100000" sy="100000" kx="0" ky="0" algn="bl" rotWithShape="0" blurRad="101600" dist="38100" dir="2700000">
-              <a:srgbClr val="000000">
-                <a:alpha val="12000"/>
-              </a:srgbClr>
-            </a:outerShdw>
-          </a:effectLst>
-        </p:spPr>
-      </p:sp>
-      <p:sp>
-        <p:nvSpPr>
-          <p:cNvPr id="5" name="Text 3"/>
-          <p:cNvSpPr/>
-          <p:nvPr/>
-        </p:nvSpPr>
-        <p:spPr>
-          <a:xfrm>
-            <a:off x="914400" y="1600200"/>
-            <a:ext cx="4709160" cy="411480"/>
-          </a:xfrm>
-          <a:prstGeom prst="rect">
-            <a:avLst/>
-          </a:prstGeom>
-          <a:noFill/>
-          <a:ln/>
-        </p:spPr>
-        <p:txBody>
-          <a:bodyPr wrap="square" lIns="0" tIns="0" rIns="0" bIns="0" rtlCol="0" anchor="ctr"/>
-          <a:lstStyle/>
-          <a:p>
-            <a:pPr indent="0" marL="0">
-              <a:lnSpc>
-                <a:spcPct val="110000"/>
-              </a:lnSpc>
-              <a:buNone/>
-            </a:pPr>
-            <a:r>
-              <a:rPr lang="en-US" sz="1100" b="1" dirty="0">
-                <a:solidFill>
-                  <a:srgbClr val="C9A227"/>
-                </a:solidFill>
-                <a:latin typeface="Calibri" pitchFamily="34" charset="0"/>
-                <a:ea typeface="Calibri" pitchFamily="34" charset="-122"/>
-                <a:cs typeface="Calibri" pitchFamily="34" charset="-120"/>
-              </a:rPr>
-              <a:t>OUTBOX LOOP — backfill_worker_api_gateway_v5.py</a:t>
-            </a:r>
-            <a:endParaRPr lang="en-US" sz="1100" dirty="0"/>
-          </a:p>
-        </p:txBody>
-      </p:sp>
-      <p:sp>
-        <p:nvSpPr>
-          <p:cNvPr id="6" name="Shape 4"/>
-          <p:cNvSpPr/>
-          <p:nvPr/>
-        </p:nvSpPr>
-        <p:spPr>
-          <a:xfrm>
-            <a:off x="914400" y="2203704"/>
-            <a:ext cx="73152" cy="73152"/>
-          </a:xfrm>
-          <a:prstGeom prst="ellipse">
-            <a:avLst/>
-          </a:prstGeom>
-          <a:solidFill>
-            <a:srgbClr val="C9A227"/>
-          </a:solidFill>
-          <a:ln/>
-        </p:spPr>
-      </p:sp>
-      <p:sp>
-        <p:nvSpPr>
-          <p:cNvPr id="7" name="Text 5"/>
-          <p:cNvSpPr/>
-          <p:nvPr/>
-        </p:nvSpPr>
-        <p:spPr>
-          <a:xfrm>
-            <a:off x="1097280" y="2148840"/>
-            <a:ext cx="4526280" cy="502920"/>
-          </a:xfrm>
-          <a:prstGeom prst="rect">
-            <a:avLst/>
-          </a:prstGeom>
-          <a:noFill/>
-          <a:ln/>
-        </p:spPr>
-        <p:txBody>
-          <a:bodyPr wrap="square" lIns="0" tIns="0" rIns="0" bIns="0" rtlCol="0" anchor="t"/>
-          <a:lstStyle/>
-          <a:p>
-            <a:pPr indent="0" marL="0">
-              <a:lnSpc>
-                <a:spcPct val="115000"/>
-              </a:lnSpc>
-              <a:buNone/>
-            </a:pPr>
-            <a:r>
-              <a:rPr lang="en-US" sz="1000" dirty="0">
-                <a:solidFill>
-                  <a:srgbClr val="3C4560"/>
-                </a:solidFill>
-                <a:latin typeface="Calibri" pitchFamily="34" charset="0"/>
-                <a:ea typeface="Calibri" pitchFamily="34" charset="-122"/>
-                <a:cs typeface="Calibri" pitchFamily="34" charset="-120"/>
-              </a:rPr>
-              <a:t>Drains market_data WHERE synced_at IS NULL, oldest-first, ≤500 rows/cycle</a:t>
-            </a:r>
-            <a:endParaRPr lang="en-US" sz="1000" dirty="0"/>
-          </a:p>
-        </p:txBody>
-      </p:sp>
-      <p:sp>
-        <p:nvSpPr>
-          <p:cNvPr id="8" name="Shape 6"/>
-          <p:cNvSpPr/>
-          <p:nvPr/>
-        </p:nvSpPr>
-        <p:spPr>
-          <a:xfrm>
-            <a:off x="914400" y="2770632"/>
-            <a:ext cx="73152" cy="73152"/>
-          </a:xfrm>
-          <a:prstGeom prst="ellipse">
-            <a:avLst/>
-          </a:prstGeom>
-          <a:solidFill>
-            <a:srgbClr val="C9A227"/>
-          </a:solidFill>
-          <a:ln/>
-        </p:spPr>
-      </p:sp>
-      <p:sp>
-        <p:nvSpPr>
-          <p:cNvPr id="9" name="Text 7"/>
-          <p:cNvSpPr/>
-          <p:nvPr/>
-        </p:nvSpPr>
-        <p:spPr>
-          <a:xfrm>
-            <a:off x="1097280" y="2715768"/>
-            <a:ext cx="4526280" cy="502920"/>
-          </a:xfrm>
-          <a:prstGeom prst="rect">
-            <a:avLst/>
-          </a:prstGeom>
-          <a:noFill/>
-          <a:ln/>
-        </p:spPr>
-        <p:txBody>
-          <a:bodyPr wrap="square" lIns="0" tIns="0" rIns="0" bIns="0" rtlCol="0" anchor="t"/>
-          <a:lstStyle/>
-          <a:p>
-            <a:pPr indent="0" marL="0">
-              <a:lnSpc>
-                <a:spcPct val="115000"/>
-              </a:lnSpc>
-              <a:buNone/>
-            </a:pPr>
-            <a:r>
-              <a:rPr lang="en-US" sz="1000" dirty="0">
-                <a:solidFill>
-                  <a:srgbClr val="3C4560"/>
-                </a:solidFill>
-                <a:latin typeface="Calibri" pitchFamily="34" charset="0"/>
-                <a:ea typeface="Calibri" pitchFamily="34" charset="-122"/>
-                <a:cs typeface="Calibri" pitchFamily="34" charset="-120"/>
-              </a:rPr>
-              <a:t>Idle sleep 300s when empty; active sleep 30s while a backlog remains</a:t>
-            </a:r>
-            <a:endParaRPr lang="en-US" sz="1000" dirty="0"/>
-          </a:p>
-        </p:txBody>
-      </p:sp>
-      <p:sp>
-        <p:nvSpPr>
-          <p:cNvPr id="10" name="Shape 8"/>
-          <p:cNvSpPr/>
-          <p:nvPr/>
-        </p:nvSpPr>
-        <p:spPr>
-          <a:xfrm>
-            <a:off x="914400" y="3337560"/>
-            <a:ext cx="73152" cy="73152"/>
-          </a:xfrm>
-          <a:prstGeom prst="ellipse">
-            <a:avLst/>
-          </a:prstGeom>
-          <a:solidFill>
-            <a:srgbClr val="C9A227"/>
-          </a:solidFill>
-          <a:ln/>
-        </p:spPr>
-      </p:sp>
-      <p:sp>
-        <p:nvSpPr>
-          <p:cNvPr id="11" name="Text 9"/>
-          <p:cNvSpPr/>
-          <p:nvPr/>
-        </p:nvSpPr>
-        <p:spPr>
-          <a:xfrm>
-            <a:off x="1097280" y="3282696"/>
-            <a:ext cx="4526280" cy="502920"/>
-          </a:xfrm>
-          <a:prstGeom prst="rect">
-            <a:avLst/>
-          </a:prstGeom>
-          <a:noFill/>
-          <a:ln/>
-        </p:spPr>
-        <p:txBody>
-          <a:bodyPr wrap="square" lIns="0" tIns="0" rIns="0" bIns="0" rtlCol="0" anchor="t"/>
-          <a:lstStyle/>
-          <a:p>
-            <a:pPr indent="0" marL="0">
-              <a:lnSpc>
-                <a:spcPct val="115000"/>
-              </a:lnSpc>
-              <a:buNone/>
-            </a:pPr>
-            <a:r>
-              <a:rPr lang="en-US" sz="1000" dirty="0">
-                <a:solidFill>
-                  <a:srgbClr val="3C4560"/>
-                </a:solidFill>
-                <a:latin typeface="Calibri" pitchFamily="34" charset="0"/>
-                <a:ea typeface="Calibri" pitchFamily="34" charset="-122"/>
-                <a:cs typeface="Calibri" pitchFamily="34" charset="-120"/>
-              </a:rPr>
-              <a:t>Repeated no-progress → exponential backoff (30s → 300s cap)</a:t>
-            </a:r>
-            <a:endParaRPr lang="en-US" sz="1000" dirty="0"/>
-          </a:p>
-        </p:txBody>
-      </p:sp>
-      <p:sp>
-        <p:nvSpPr>
-          <p:cNvPr id="12" name="Shape 10"/>
-          <p:cNvSpPr/>
-          <p:nvPr/>
-        </p:nvSpPr>
-        <p:spPr>
-          <a:xfrm>
-            <a:off x="914400" y="3904488"/>
-            <a:ext cx="73152" cy="73152"/>
-          </a:xfrm>
-          <a:prstGeom prst="ellipse">
-            <a:avLst/>
-          </a:prstGeom>
-          <a:solidFill>
-            <a:srgbClr val="C9A227"/>
-          </a:solidFill>
-          <a:ln/>
-        </p:spPr>
-      </p:sp>
-      <p:sp>
-        <p:nvSpPr>
-          <p:cNvPr id="13" name="Text 11"/>
-          <p:cNvSpPr/>
-          <p:nvPr/>
-        </p:nvSpPr>
-        <p:spPr>
-          <a:xfrm>
-            <a:off x="1097280" y="3849624"/>
-            <a:ext cx="4526280" cy="502920"/>
-          </a:xfrm>
-          <a:prstGeom prst="rect">
-            <a:avLst/>
-          </a:prstGeom>
-          <a:noFill/>
-          <a:ln/>
-        </p:spPr>
-        <p:txBody>
-          <a:bodyPr wrap="square" lIns="0" tIns="0" rIns="0" bIns="0" rtlCol="0" anchor="t"/>
-          <a:lstStyle/>
-          <a:p>
-            <a:pPr indent="0" marL="0">
-              <a:lnSpc>
-                <a:spcPct val="115000"/>
-              </a:lnSpc>
-              <a:buNone/>
-            </a:pPr>
-            <a:r>
-              <a:rPr lang="en-US" sz="1000" dirty="0">
-                <a:solidFill>
-                  <a:srgbClr val="3C4560"/>
-                </a:solidFill>
-                <a:latin typeface="Calibri" pitchFamily="34" charset="0"/>
-                <a:ea typeface="Calibri" pitchFamily="34" charset="-122"/>
-                <a:cs typeface="Calibri" pitchFamily="34" charset="-120"/>
-              </a:rPr>
-              <a:t>HTTP session recreated after 10 consecutive failures; periodic /api/v1/health check</a:t>
-            </a:r>
-            <a:endParaRPr lang="en-US" sz="1000" dirty="0"/>
-          </a:p>
-        </p:txBody>
-      </p:sp>
-      <p:sp>
-        <p:nvSpPr>
-          <p:cNvPr id="14" name="Shape 12"/>
-          <p:cNvSpPr/>
-          <p:nvPr/>
-        </p:nvSpPr>
-        <p:spPr>
-          <a:xfrm>
-            <a:off x="6263640" y="1371600"/>
-            <a:ext cx="5257800" cy="3063240"/>
-          </a:xfrm>
-          <a:prstGeom prst="roundRect">
-            <a:avLst>
-              <a:gd name="adj" fmla="val 2388"/>
-            </a:avLst>
-          </a:prstGeom>
-          <a:solidFill>
-            <a:srgbClr val="FFFFFF"/>
-          </a:solidFill>
-          <a:ln/>
-          <a:effectLst>
-            <a:outerShdw sx="100000" sy="100000" kx="0" ky="0" algn="bl" rotWithShape="0" blurRad="101600" dist="38100" dir="2700000">
-              <a:srgbClr val="000000">
-                <a:alpha val="12000"/>
-              </a:srgbClr>
-            </a:outerShdw>
-          </a:effectLst>
-        </p:spPr>
-      </p:sp>
-      <p:sp>
-        <p:nvSpPr>
-          <p:cNvPr id="15" name="Text 13"/>
-          <p:cNvSpPr/>
-          <p:nvPr/>
-        </p:nvSpPr>
-        <p:spPr>
-          <a:xfrm>
-            <a:off x="6537960" y="1600200"/>
-            <a:ext cx="4709160" cy="274320"/>
-          </a:xfrm>
-          <a:prstGeom prst="rect">
-            <a:avLst/>
-          </a:prstGeom>
-          <a:noFill/>
-          <a:ln/>
-        </p:spPr>
-        <p:txBody>
-          <a:bodyPr wrap="square" lIns="0" tIns="0" rIns="0" bIns="0" rtlCol="0" anchor="ctr"/>
-          <a:lstStyle/>
-          <a:p>
-            <a:pPr indent="0" marL="0">
-              <a:buNone/>
-            </a:pPr>
-            <a:r>
-              <a:rPr lang="en-US" sz="1100" b="1" dirty="0">
-                <a:solidFill>
-                  <a:srgbClr val="C9A227"/>
-                </a:solidFill>
-                <a:latin typeface="Calibri" pitchFamily="34" charset="0"/>
-                <a:ea typeface="Calibri" pitchFamily="34" charset="-122"/>
-                <a:cs typeface="Calibri" pitchFamily="34" charset="-120"/>
-              </a:rPr>
-              <a:t>QUARANTINE &amp; REPLAY — the safety net</a:t>
-            </a:r>
-            <a:endParaRPr lang="en-US" sz="1100" dirty="0"/>
-          </a:p>
-        </p:txBody>
-      </p:sp>
-      <p:sp>
-        <p:nvSpPr>
-          <p:cNvPr id="16" name="Shape 14"/>
-          <p:cNvSpPr/>
-          <p:nvPr/>
-        </p:nvSpPr>
-        <p:spPr>
-          <a:xfrm>
-            <a:off x="6537960" y="2203704"/>
-            <a:ext cx="73152" cy="73152"/>
-          </a:xfrm>
-          <a:prstGeom prst="ellipse">
-            <a:avLst/>
-          </a:prstGeom>
-          <a:solidFill>
-            <a:srgbClr val="C9A227"/>
-          </a:solidFill>
-          <a:ln/>
-        </p:spPr>
-      </p:sp>
-      <p:sp>
-        <p:nvSpPr>
-          <p:cNvPr id="17" name="Text 15"/>
-          <p:cNvSpPr/>
-          <p:nvPr/>
-        </p:nvSpPr>
-        <p:spPr>
-          <a:xfrm>
-            <a:off x="6720840" y="2148840"/>
-            <a:ext cx="4526280" cy="640080"/>
-          </a:xfrm>
-          <a:prstGeom prst="rect">
-            <a:avLst/>
-          </a:prstGeom>
-          <a:noFill/>
-          <a:ln/>
-        </p:spPr>
-        <p:txBody>
-          <a:bodyPr wrap="square" lIns="0" tIns="0" rIns="0" bIns="0" rtlCol="0" anchor="t"/>
-          <a:lstStyle/>
-          <a:p>
-            <a:pPr indent="0" marL="0">
-              <a:lnSpc>
-                <a:spcPct val="115000"/>
-              </a:lnSpc>
-              <a:buNone/>
-            </a:pPr>
-            <a:r>
-              <a:rPr lang="en-US" sz="1000" dirty="0">
-                <a:solidFill>
-                  <a:srgbClr val="3C4560"/>
-                </a:solidFill>
-                <a:latin typeface="Calibri" pitchFamily="34" charset="0"/>
-                <a:ea typeface="Calibri" pitchFamily="34" charset="-122"/>
-                <a:cs typeface="Calibri" pitchFamily="34" charset="-120"/>
-              </a:rPr>
-              <a:t>HTTP 400 rows are written to rejected_rows.jsonl AND stamped synced_at — a poison row can't block the outbox</a:t>
-            </a:r>
-            <a:endParaRPr lang="en-US" sz="1000" dirty="0"/>
-          </a:p>
-        </p:txBody>
-      </p:sp>
-      <p:sp>
-        <p:nvSpPr>
-          <p:cNvPr id="18" name="Shape 16"/>
-          <p:cNvSpPr/>
-          <p:nvPr/>
-        </p:nvSpPr>
-        <p:spPr>
-          <a:xfrm>
-            <a:off x="6537960" y="2916936"/>
-            <a:ext cx="73152" cy="73152"/>
-          </a:xfrm>
-          <a:prstGeom prst="ellipse">
-            <a:avLst/>
-          </a:prstGeom>
-          <a:solidFill>
-            <a:srgbClr val="C9A227"/>
-          </a:solidFill>
-          <a:ln/>
-        </p:spPr>
-      </p:sp>
-      <p:sp>
-        <p:nvSpPr>
-          <p:cNvPr id="19" name="Text 17"/>
-          <p:cNvSpPr/>
-          <p:nvPr/>
-        </p:nvSpPr>
-        <p:spPr>
-          <a:xfrm>
-            <a:off x="6720840" y="2862072"/>
-            <a:ext cx="4526280" cy="640080"/>
-          </a:xfrm>
-          <a:prstGeom prst="rect">
-            <a:avLst/>
-          </a:prstGeom>
-          <a:noFill/>
-          <a:ln/>
-        </p:spPr>
-        <p:txBody>
-          <a:bodyPr wrap="square" lIns="0" tIns="0" rIns="0" bIns="0" rtlCol="0" anchor="t"/>
-          <a:lstStyle/>
-          <a:p>
-            <a:pPr indent="0" marL="0">
-              <a:lnSpc>
-                <a:spcPct val="115000"/>
-              </a:lnSpc>
-              <a:buNone/>
-            </a:pPr>
-            <a:r>
-              <a:rPr lang="en-US" sz="1000" dirty="0">
-                <a:solidFill>
-                  <a:srgbClr val="3C4560"/>
-                </a:solidFill>
-                <a:latin typeface="Calibri" pitchFamily="34" charset="0"/>
-                <a:ea typeface="Calibri" pitchFamily="34" charset="-122"/>
-                <a:cs typeface="Calibri" pitchFamily="34" charset="-120"/>
-              </a:rPr>
-              <a:t>replay_quarantine.py re-POSTs quarantined rows after a fix; --dry-run previews without sending</a:t>
-            </a:r>
-            <a:endParaRPr lang="en-US" sz="1000" dirty="0"/>
-          </a:p>
-        </p:txBody>
-      </p:sp>
-      <p:sp>
-        <p:nvSpPr>
-          <p:cNvPr id="20" name="Shape 18"/>
-          <p:cNvSpPr/>
-          <p:nvPr/>
-        </p:nvSpPr>
-        <p:spPr>
-          <a:xfrm>
-            <a:off x="6537960" y="3630168"/>
-            <a:ext cx="73152" cy="73152"/>
-          </a:xfrm>
-          <a:prstGeom prst="ellipse">
-            <a:avLst/>
-          </a:prstGeom>
-          <a:solidFill>
-            <a:srgbClr val="C9A227"/>
-          </a:solidFill>
-          <a:ln/>
-        </p:spPr>
-      </p:sp>
-      <p:sp>
-        <p:nvSpPr>
-          <p:cNvPr id="21" name="Text 19"/>
-          <p:cNvSpPr/>
-          <p:nvPr/>
-        </p:nvSpPr>
-        <p:spPr>
-          <a:xfrm>
-            <a:off x="6720840" y="3575304"/>
-            <a:ext cx="4526280" cy="640080"/>
-          </a:xfrm>
-          <a:prstGeom prst="rect">
-            <a:avLst/>
-          </a:prstGeom>
-          <a:noFill/>
-          <a:ln/>
-        </p:spPr>
-        <p:txBody>
-          <a:bodyPr wrap="square" lIns="0" tIns="0" rIns="0" bIns="0" rtlCol="0" anchor="t"/>
-          <a:lstStyle/>
-          <a:p>
-            <a:pPr indent="0" marL="0">
-              <a:lnSpc>
-                <a:spcPct val="115000"/>
-              </a:lnSpc>
-              <a:buNone/>
-            </a:pPr>
-            <a:r>
-              <a:rPr lang="en-US" sz="1000" dirty="0">
-                <a:solidFill>
-                  <a:srgbClr val="3C4560"/>
-                </a:solidFill>
-                <a:latin typeface="Calibri" pitchFamily="34" charset="0"/>
-                <a:ea typeface="Calibri" pitchFamily="34" charset="-122"/>
-                <a:cs typeface="Calibri" pitchFamily="34" charset="-120"/>
-              </a:rPr>
-              <a:t>Successful replays are dropped from the file; failures are rewritten back — safe to re-run, idempotent</a:t>
-            </a:r>
-            <a:endParaRPr lang="en-US" sz="1000" dirty="0"/>
-          </a:p>
-        </p:txBody>
-      </p:sp>
-      <p:sp>
-        <p:nvSpPr>
-          <p:cNvPr id="22" name="Shape 20"/>
-          <p:cNvSpPr/>
-          <p:nvPr/>
-        </p:nvSpPr>
-        <p:spPr>
-          <a:xfrm>
-            <a:off x="640080" y="4663440"/>
-            <a:ext cx="10881360" cy="1234440"/>
-          </a:xfrm>
-          <a:prstGeom prst="roundRect">
-            <a:avLst>
-              <a:gd name="adj" fmla="val 5926"/>
-            </a:avLst>
-          </a:prstGeom>
-          <a:solidFill>
-            <a:srgbClr val="1B2340"/>
-          </a:solidFill>
-          <a:ln/>
-        </p:spPr>
-      </p:sp>
-      <p:sp>
-        <p:nvSpPr>
-          <p:cNvPr id="23" name="Text 21"/>
-          <p:cNvSpPr/>
-          <p:nvPr/>
-        </p:nvSpPr>
-        <p:spPr>
-          <a:xfrm>
-            <a:off x="914400" y="4800600"/>
-            <a:ext cx="10332720" cy="274320"/>
-          </a:xfrm>
-          <a:prstGeom prst="rect">
-            <a:avLst/>
-          </a:prstGeom>
-          <a:noFill/>
-          <a:ln/>
-        </p:spPr>
-        <p:txBody>
-          <a:bodyPr wrap="square" lIns="0" tIns="0" rIns="0" bIns="0" rtlCol="0" anchor="ctr"/>
-          <a:lstStyle/>
-          <a:p>
-            <a:pPr indent="0" marL="0">
-              <a:buNone/>
-            </a:pPr>
-            <a:r>
-              <a:rPr lang="en-US" sz="1050" b="1" dirty="0">
-                <a:solidFill>
-                  <a:srgbClr val="C9A227"/>
-                </a:solidFill>
-                <a:latin typeface="Calibri" pitchFamily="34" charset="0"/>
-                <a:ea typeface="Calibri" pitchFamily="34" charset="-122"/>
-                <a:cs typeface="Calibri" pitchFamily="34" charset="-120"/>
-              </a:rPr>
-              <a:t>DEPLOYMENT — install_services.bat installs 3 auto-restarting NSSM services on the VPS</a:t>
-            </a:r>
-            <a:endParaRPr lang="en-US" sz="1050" dirty="0"/>
-          </a:p>
-        </p:txBody>
-      </p:sp>
-      <p:sp>
-        <p:nvSpPr>
-          <p:cNvPr id="24" name="Text 22"/>
-          <p:cNvSpPr/>
-          <p:nvPr/>
-        </p:nvSpPr>
-        <p:spPr>
-          <a:xfrm>
-            <a:off x="914400" y="5166360"/>
-            <a:ext cx="3383280" cy="274320"/>
-          </a:xfrm>
-          <a:prstGeom prst="rect">
-            <a:avLst/>
-          </a:prstGeom>
-          <a:noFill/>
-          <a:ln/>
-        </p:spPr>
-        <p:txBody>
-          <a:bodyPr wrap="square" lIns="0" tIns="0" rIns="0" bIns="0" rtlCol="0" anchor="ctr"/>
-          <a:lstStyle/>
-          <a:p>
-            <a:pPr indent="0" marL="0">
-              <a:buNone/>
-            </a:pPr>
-            <a:r>
-              <a:rPr lang="en-US" sz="1100" b="1" dirty="0">
-                <a:solidFill>
-                  <a:srgbClr val="FFFFFF"/>
-                </a:solidFill>
-                <a:latin typeface="Calibri" pitchFamily="34" charset="0"/>
-                <a:ea typeface="Calibri" pitchFamily="34" charset="-122"/>
-                <a:cs typeface="Calibri" pitchFamily="34" charset="-120"/>
-              </a:rPr>
-              <a:t>MT5Collector</a:t>
-            </a:r>
-            <a:endParaRPr lang="en-US" sz="1100" dirty="0"/>
-          </a:p>
-        </p:txBody>
-      </p:sp>
-      <p:sp>
-        <p:nvSpPr>
-          <p:cNvPr id="25" name="Text 23"/>
-          <p:cNvSpPr/>
-          <p:nvPr/>
-        </p:nvSpPr>
-        <p:spPr>
-          <a:xfrm>
-            <a:off x="914400" y="5440680"/>
-            <a:ext cx="3383280" cy="365760"/>
-          </a:xfrm>
-          <a:prstGeom prst="rect">
-            <a:avLst/>
-          </a:prstGeom>
-          <a:noFill/>
-          <a:ln/>
-        </p:spPr>
-        <p:txBody>
-          <a:bodyPr wrap="square" lIns="0" tIns="0" rIns="0" bIns="0" rtlCol="0" anchor="ctr"/>
-          <a:lstStyle/>
-          <a:p>
-            <a:pPr indent="0" marL="0">
-              <a:lnSpc>
-                <a:spcPct val="115000"/>
-              </a:lnSpc>
-              <a:buNone/>
-            </a:pPr>
-            <a:r>
-              <a:rPr lang="en-US" sz="950" dirty="0">
-                <a:solidFill>
-                  <a:srgbClr val="AEB9D6"/>
-                </a:solidFill>
-                <a:latin typeface="Calibri" pitchFamily="34" charset="0"/>
-                <a:ea typeface="Calibri" pitchFamily="34" charset="-122"/>
-                <a:cs typeface="Calibri" pitchFamily="34" charset="-120"/>
-              </a:rPr>
-              <a:t>the pipeline engine (COLLECT→PROMOTE)</a:t>
-            </a:r>
-            <a:endParaRPr lang="en-US" sz="950" dirty="0"/>
-          </a:p>
-        </p:txBody>
-      </p:sp>
-      <p:sp>
-        <p:nvSpPr>
-          <p:cNvPr id="26" name="Text 24"/>
-          <p:cNvSpPr/>
-          <p:nvPr/>
-        </p:nvSpPr>
-        <p:spPr>
-          <a:xfrm>
-            <a:off x="4526280" y="5166360"/>
-            <a:ext cx="3383280" cy="274320"/>
-          </a:xfrm>
-          <a:prstGeom prst="rect">
-            <a:avLst/>
-          </a:prstGeom>
-          <a:noFill/>
-          <a:ln/>
-        </p:spPr>
-        <p:txBody>
-          <a:bodyPr wrap="square" lIns="0" tIns="0" rIns="0" bIns="0" rtlCol="0" anchor="ctr"/>
-          <a:lstStyle/>
-          <a:p>
-            <a:pPr indent="0" marL="0">
-              <a:buNone/>
-            </a:pPr>
-            <a:r>
-              <a:rPr lang="en-US" sz="1100" b="1" dirty="0">
-                <a:solidFill>
-                  <a:srgbClr val="FFFFFF"/>
-                </a:solidFill>
-                <a:latin typeface="Calibri" pitchFamily="34" charset="0"/>
-                <a:ea typeface="Calibri" pitchFamily="34" charset="-122"/>
-                <a:cs typeface="Calibri" pitchFamily="34" charset="-120"/>
-              </a:rPr>
-              <a:t>MT5PushWorker</a:t>
-            </a:r>
-            <a:endParaRPr lang="en-US" sz="1100" dirty="0"/>
-          </a:p>
-        </p:txBody>
-      </p:sp>
-      <p:sp>
-        <p:nvSpPr>
-          <p:cNvPr id="27" name="Text 25"/>
-          <p:cNvSpPr/>
-          <p:nvPr/>
-        </p:nvSpPr>
-        <p:spPr>
-          <a:xfrm>
-            <a:off x="4526280" y="5440680"/>
-            <a:ext cx="3383280" cy="365760"/>
-          </a:xfrm>
-          <a:prstGeom prst="rect">
-            <a:avLst/>
-          </a:prstGeom>
-          <a:noFill/>
-          <a:ln/>
-        </p:spPr>
-        <p:txBody>
-          <a:bodyPr wrap="square" lIns="0" tIns="0" rIns="0" bIns="0" rtlCol="0" anchor="ctr"/>
-          <a:lstStyle/>
-          <a:p>
-            <a:pPr indent="0" marL="0">
-              <a:lnSpc>
-                <a:spcPct val="115000"/>
-              </a:lnSpc>
-              <a:buNone/>
-            </a:pPr>
-            <a:r>
-              <a:rPr lang="en-US" sz="950" dirty="0">
-                <a:solidFill>
-                  <a:srgbClr val="AEB9D6"/>
-                </a:solidFill>
-                <a:latin typeface="Calibri" pitchFamily="34" charset="0"/>
-                <a:ea typeface="Calibri" pitchFamily="34" charset="-122"/>
-                <a:cs typeface="Calibri" pitchFamily="34" charset="-120"/>
-              </a:rPr>
-              <a:t>outbox → gateway</a:t>
-            </a:r>
-            <a:endParaRPr lang="en-US" sz="950" dirty="0"/>
-          </a:p>
-        </p:txBody>
-      </p:sp>
-      <p:sp>
-        <p:nvSpPr>
-          <p:cNvPr id="28" name="Text 26"/>
-          <p:cNvSpPr/>
-          <p:nvPr/>
-        </p:nvSpPr>
-        <p:spPr>
-          <a:xfrm>
-            <a:off x="8138160" y="5166360"/>
-            <a:ext cx="3383280" cy="274320"/>
-          </a:xfrm>
-          <a:prstGeom prst="rect">
-            <a:avLst/>
-          </a:prstGeom>
-          <a:noFill/>
-          <a:ln/>
-        </p:spPr>
-        <p:txBody>
-          <a:bodyPr wrap="square" lIns="0" tIns="0" rIns="0" bIns="0" rtlCol="0" anchor="ctr"/>
-          <a:lstStyle/>
-          <a:p>
-            <a:pPr indent="0" marL="0">
-              <a:buNone/>
-            </a:pPr>
-            <a:r>
-              <a:rPr lang="en-US" sz="1100" b="1" dirty="0">
-                <a:solidFill>
-                  <a:srgbClr val="FFFFFF"/>
-                </a:solidFill>
-                <a:latin typeface="Calibri" pitchFamily="34" charset="0"/>
-                <a:ea typeface="Calibri" pitchFamily="34" charset="-122"/>
-                <a:cs typeface="Calibri" pitchFamily="34" charset="-120"/>
-              </a:rPr>
-              <a:t>MT5Relay</a:t>
-            </a:r>
-            <a:endParaRPr lang="en-US" sz="1100" dirty="0"/>
-          </a:p>
-        </p:txBody>
-      </p:sp>
-      <p:sp>
-        <p:nvSpPr>
-          <p:cNvPr id="29" name="Text 27"/>
-          <p:cNvSpPr/>
-          <p:nvPr/>
-        </p:nvSpPr>
-        <p:spPr>
-          <a:xfrm>
-            <a:off x="8138160" y="5440680"/>
-            <a:ext cx="3383280" cy="365760"/>
-          </a:xfrm>
-          <a:prstGeom prst="rect">
-            <a:avLst/>
-          </a:prstGeom>
-          <a:noFill/>
-          <a:ln/>
-        </p:spPr>
-        <p:txBody>
-          <a:bodyPr wrap="square" lIns="0" tIns="0" rIns="0" bIns="0" rtlCol="0" anchor="ctr"/>
-          <a:lstStyle/>
-          <a:p>
-            <a:pPr indent="0" marL="0">
-              <a:lnSpc>
-                <a:spcPct val="115000"/>
-              </a:lnSpc>
-              <a:buNone/>
-            </a:pPr>
-            <a:r>
-              <a:rPr lang="en-US" sz="950" dirty="0">
-                <a:solidFill>
-                  <a:srgbClr val="AEB9D6"/>
-                </a:solidFill>
-                <a:latin typeface="Calibri" pitchFamily="34" charset="0"/>
-                <a:ea typeface="Calibri" pitchFamily="34" charset="-122"/>
-                <a:cs typeface="Calibri" pitchFamily="34" charset="-120"/>
-              </a:rPr>
-              <a:t>legacy socket relay (optional, not in v6 flow)</a:t>
-            </a:r>
-            <a:endParaRPr lang="en-US" sz="950" dirty="0"/>
-          </a:p>
-        </p:txBody>
-      </p:sp>
-      <p:sp>
-        <p:nvSpPr>
-          <p:cNvPr id="30" name="Text 28"/>
-          <p:cNvSpPr/>
-          <p:nvPr/>
-        </p:nvSpPr>
-        <p:spPr>
-          <a:xfrm>
-            <a:off x="457200" y="6473952"/>
-            <a:ext cx="7315200" cy="274320"/>
-          </a:xfrm>
-          <a:prstGeom prst="rect">
-            <a:avLst/>
-          </a:prstGeom>
-          <a:noFill/>
-          <a:ln/>
-        </p:spPr>
-        <p:txBody>
-          <a:bodyPr wrap="square" lIns="0" tIns="0" rIns="0" bIns="0" rtlCol="0" anchor="ctr"/>
-          <a:lstStyle/>
-          <a:p>
-            <a:pPr indent="0" marL="0">
-              <a:buNone/>
-            </a:pPr>
-            <a:r>
-              <a:rPr lang="en-US" sz="900" dirty="0">
-                <a:solidFill>
-                  <a:srgbClr val="6B7390"/>
-                </a:solidFill>
-                <a:latin typeface="Calibri" pitchFamily="34" charset="0"/>
-                <a:ea typeface="Calibri" pitchFamily="34" charset="-122"/>
-                <a:cs typeface="Calibri" pitchFamily="34" charset="-120"/>
-              </a:rPr>
-              <a:t>Combined Architecture — Executive Overview</a:t>
-            </a:r>
-            <a:endParaRPr lang="en-US" sz="900" dirty="0"/>
-          </a:p>
-        </p:txBody>
-      </p:sp>
-      <p:sp>
-        <p:nvSpPr>
-          <p:cNvPr id="31" name="Text 29"/>
-          <p:cNvSpPr/>
-          <p:nvPr/>
-        </p:nvSpPr>
-        <p:spPr>
-          <a:xfrm>
-            <a:off x="11155680" y="6473952"/>
-            <a:ext cx="548640" cy="274320"/>
-          </a:xfrm>
-          <a:prstGeom prst="rect">
-            <a:avLst/>
-          </a:prstGeom>
-          <a:noFill/>
-          <a:ln/>
-        </p:spPr>
-        <p:txBody>
-          <a:bodyPr wrap="square" lIns="0" tIns="0" rIns="0" bIns="0" rtlCol="0" anchor="ctr"/>
-          <a:lstStyle/>
-          <a:p>
-            <a:pPr algn="r" indent="0" marL="0">
-              <a:buNone/>
-            </a:pPr>
-            <a:r>
-              <a:rPr lang="en-US" sz="900" dirty="0">
-                <a:solidFill>
-                  <a:srgbClr val="6B7390"/>
-                </a:solidFill>
-                <a:latin typeface="Calibri" pitchFamily="34" charset="0"/>
-                <a:ea typeface="Calibri" pitchFamily="34" charset="-122"/>
-                <a:cs typeface="Calibri" pitchFamily="34" charset="-120"/>
-              </a:rPr>
-              <a:t>8 / 11</a:t>
+              <a:t>8 / 12</a:t>
             </a:r>
             <a:endParaRPr lang="en-US" sz="900" dirty="0"/>
           </a:p>
@@ -13478,7 +14533,7 @@
                 <a:ea typeface="Cambria" pitchFamily="34" charset="-122"/>
                 <a:cs typeface="Cambria" pitchFamily="34" charset="-120"/>
               </a:rPr>
-              <a:t>Visualisation Internals — mtf_render</a:t>
+              <a:t>Distribution, Recovery &amp; Deployment</a:t>
             </a:r>
             <a:endParaRPr lang="en-US" sz="2500" dirty="0"/>
           </a:p>
@@ -13517,7 +14572,7 @@
                 <a:ea typeface="Calibri" pitchFamily="34" charset="-122"/>
                 <a:cs typeface="Calibri" pitchFamily="34" charset="-120"/>
               </a:rPr>
-              <a:t>How the same market_data table becomes a three-panel PNG</a:t>
+              <a:t>The push worker's outbox loop, its safety net, and how the whole stack runs on the VPS</a:t>
             </a:r>
             <a:endParaRPr lang="en-US" sz="1150" dirty="0"/>
           </a:p>
@@ -13531,12 +14586,12 @@
         </p:nvSpPr>
         <p:spPr>
           <a:xfrm>
-            <a:off x="640080" y="1417320"/>
-            <a:ext cx="2450592" cy="1371600"/>
+            <a:off x="640080" y="1371600"/>
+            <a:ext cx="5257800" cy="3063240"/>
           </a:xfrm>
           <a:prstGeom prst="roundRect">
             <a:avLst>
-              <a:gd name="adj" fmla="val 4667"/>
+              <a:gd name="adj" fmla="val 2388"/>
             </a:avLst>
           </a:prstGeom>
           <a:solidFill>
@@ -13560,47 +14615,70 @@
         </p:nvSpPr>
         <p:spPr>
           <a:xfrm>
-            <a:off x="804672" y="1527048"/>
-            <a:ext cx="2121408" cy="365760"/>
-          </a:xfrm>
-          <a:prstGeom prst="rect">
-            <a:avLst/>
-          </a:prstGeom>
-          <a:noFill/>
-          <a:ln/>
-        </p:spPr>
-        <p:txBody>
-          <a:bodyPr wrap="square" lIns="0" tIns="0" rIns="0" bIns="0" rtlCol="0" anchor="ctr"/>
-          <a:lstStyle/>
-          <a:p>
-            <a:pPr indent="0" marL="0">
-              <a:buNone/>
-            </a:pPr>
-            <a:r>
-              <a:rPr lang="en-US" sz="1150" b="1" dirty="0">
-                <a:solidFill>
-                  <a:srgbClr val="1B2340"/>
-                </a:solidFill>
-                <a:latin typeface="Calibri" pitchFamily="34" charset="0"/>
-                <a:ea typeface="Calibri" pitchFamily="34" charset="-122"/>
-                <a:cs typeface="Calibri" pitchFamily="34" charset="-120"/>
-              </a:rPr>
-              <a:t>data_source.py</a:t>
-            </a:r>
-            <a:endParaRPr lang="en-US" sz="1150" dirty="0"/>
-          </a:p>
-        </p:txBody>
-      </p:sp>
-      <p:sp>
-        <p:nvSpPr>
-          <p:cNvPr id="6" name="Text 4"/>
-          <p:cNvSpPr/>
-          <p:nvPr/>
-        </p:nvSpPr>
-        <p:spPr>
-          <a:xfrm>
-            <a:off x="804672" y="1874520"/>
-            <a:ext cx="2121408" cy="777240"/>
+            <a:off x="914400" y="1600200"/>
+            <a:ext cx="4709160" cy="411480"/>
+          </a:xfrm>
+          <a:prstGeom prst="rect">
+            <a:avLst/>
+          </a:prstGeom>
+          <a:noFill/>
+          <a:ln/>
+        </p:spPr>
+        <p:txBody>
+          <a:bodyPr wrap="square" lIns="0" tIns="0" rIns="0" bIns="0" rtlCol="0" anchor="ctr"/>
+          <a:lstStyle/>
+          <a:p>
+            <a:pPr indent="0" marL="0">
+              <a:lnSpc>
+                <a:spcPct val="110000"/>
+              </a:lnSpc>
+              <a:buNone/>
+            </a:pPr>
+            <a:r>
+              <a:rPr lang="en-US" sz="1100" b="1" dirty="0">
+                <a:solidFill>
+                  <a:srgbClr val="C9A227"/>
+                </a:solidFill>
+                <a:latin typeface="Calibri" pitchFamily="34" charset="0"/>
+                <a:ea typeface="Calibri" pitchFamily="34" charset="-122"/>
+                <a:cs typeface="Calibri" pitchFamily="34" charset="-120"/>
+              </a:rPr>
+              <a:t>OUTBOX LOOP — backfill_worker_api_gateway_v5.py</a:t>
+            </a:r>
+            <a:endParaRPr lang="en-US" sz="1100" dirty="0"/>
+          </a:p>
+        </p:txBody>
+      </p:sp>
+      <p:sp>
+        <p:nvSpPr>
+          <p:cNvPr id="6" name="Shape 4"/>
+          <p:cNvSpPr/>
+          <p:nvPr/>
+        </p:nvSpPr>
+        <p:spPr>
+          <a:xfrm>
+            <a:off x="914400" y="2203704"/>
+            <a:ext cx="73152" cy="73152"/>
+          </a:xfrm>
+          <a:prstGeom prst="ellipse">
+            <a:avLst/>
+          </a:prstGeom>
+          <a:solidFill>
+            <a:srgbClr val="C9A227"/>
+          </a:solidFill>
+          <a:ln/>
+        </p:spPr>
+      </p:sp>
+      <p:sp>
+        <p:nvSpPr>
+          <p:cNvPr id="7" name="Text 5"/>
+          <p:cNvSpPr/>
+          <p:nvPr/>
+        </p:nvSpPr>
+        <p:spPr>
+          <a:xfrm>
+            <a:off x="1097280" y="2148840"/>
+            <a:ext cx="4526280" cy="502920"/>
           </a:xfrm>
           <a:prstGeom prst="rect">
             <a:avLst/>
@@ -13614,48 +14692,24 @@
           <a:p>
             <a:pPr indent="0" marL="0">
               <a:lnSpc>
-                <a:spcPct val="118000"/>
+                <a:spcPct val="115000"/>
               </a:lnSpc>
               <a:buNone/>
             </a:pPr>
             <a:r>
-              <a:rPr lang="en-US" sz="930" dirty="0">
-                <a:solidFill>
-                  <a:srgbClr val="6B7390"/>
-                </a:solidFill>
-                <a:latin typeface="Calibri" pitchFamily="34" charset="0"/>
-                <a:ea typeface="Calibri" pitchFamily="34" charset="-122"/>
-                <a:cs typeface="Calibri" pitchFamily="34" charset="-120"/>
-              </a:rPr>
-              <a:t>Two independent SQL queries (M5 rows, M15 rows), each filtered on symbol + timeframe. Renames {variant}_uoedt/base_fl/loedt to canonical names.</a:t>
-            </a:r>
-            <a:endParaRPr lang="en-US" sz="930" dirty="0"/>
-          </a:p>
-        </p:txBody>
-      </p:sp>
-      <p:sp>
-        <p:nvSpPr>
-          <p:cNvPr id="7" name="Shape 5"/>
-          <p:cNvSpPr/>
-          <p:nvPr/>
-        </p:nvSpPr>
-        <p:spPr>
-          <a:xfrm>
-            <a:off x="3090672" y="2103120"/>
-            <a:ext cx="228600" cy="0"/>
-          </a:xfrm>
-          <a:prstGeom prst="line">
-            <a:avLst/>
-          </a:prstGeom>
-          <a:noFill/>
-          <a:ln w="22225">
-            <a:solidFill>
-              <a:srgbClr val="1B2340"/>
-            </a:solidFill>
-            <a:prstDash val="solid"/>
-            <a:tailEnd type="triangle"/>
-          </a:ln>
-        </p:spPr>
+              <a:rPr lang="en-US" sz="1000" dirty="0">
+                <a:solidFill>
+                  <a:srgbClr val="3C4560"/>
+                </a:solidFill>
+                <a:latin typeface="Calibri" pitchFamily="34" charset="0"/>
+                <a:ea typeface="Calibri" pitchFamily="34" charset="-122"/>
+                <a:cs typeface="Calibri" pitchFamily="34" charset="-120"/>
+              </a:rPr>
+              <a:t>Drains market_data WHERE synced_at IS NULL, oldest-first, ≤500 rows/cycle</a:t>
+            </a:r>
+            <a:endParaRPr lang="en-US" sz="1000" dirty="0"/>
+          </a:p>
+        </p:txBody>
       </p:sp>
       <p:sp>
         <p:nvSpPr>
@@ -13665,16 +14719,202 @@
         </p:nvSpPr>
         <p:spPr>
           <a:xfrm>
-            <a:off x="3319272" y="1417320"/>
-            <a:ext cx="2450592" cy="1371600"/>
+            <a:off x="914400" y="2770632"/>
+            <a:ext cx="73152" cy="73152"/>
+          </a:xfrm>
+          <a:prstGeom prst="ellipse">
+            <a:avLst/>
+          </a:prstGeom>
+          <a:solidFill>
+            <a:srgbClr val="C9A227"/>
+          </a:solidFill>
+          <a:ln/>
+        </p:spPr>
+      </p:sp>
+      <p:sp>
+        <p:nvSpPr>
+          <p:cNvPr id="9" name="Text 7"/>
+          <p:cNvSpPr/>
+          <p:nvPr/>
+        </p:nvSpPr>
+        <p:spPr>
+          <a:xfrm>
+            <a:off x="1097280" y="2715768"/>
+            <a:ext cx="4526280" cy="502920"/>
+          </a:xfrm>
+          <a:prstGeom prst="rect">
+            <a:avLst/>
+          </a:prstGeom>
+          <a:noFill/>
+          <a:ln/>
+        </p:spPr>
+        <p:txBody>
+          <a:bodyPr wrap="square" lIns="0" tIns="0" rIns="0" bIns="0" rtlCol="0" anchor="t"/>
+          <a:lstStyle/>
+          <a:p>
+            <a:pPr indent="0" marL="0">
+              <a:lnSpc>
+                <a:spcPct val="115000"/>
+              </a:lnSpc>
+              <a:buNone/>
+            </a:pPr>
+            <a:r>
+              <a:rPr lang="en-US" sz="1000" dirty="0">
+                <a:solidFill>
+                  <a:srgbClr val="3C4560"/>
+                </a:solidFill>
+                <a:latin typeface="Calibri" pitchFamily="34" charset="0"/>
+                <a:ea typeface="Calibri" pitchFamily="34" charset="-122"/>
+                <a:cs typeface="Calibri" pitchFamily="34" charset="-120"/>
+              </a:rPr>
+              <a:t>Idle sleep 300s when empty; active sleep 30s while a backlog remains</a:t>
+            </a:r>
+            <a:endParaRPr lang="en-US" sz="1000" dirty="0"/>
+          </a:p>
+        </p:txBody>
+      </p:sp>
+      <p:sp>
+        <p:nvSpPr>
+          <p:cNvPr id="10" name="Shape 8"/>
+          <p:cNvSpPr/>
+          <p:nvPr/>
+        </p:nvSpPr>
+        <p:spPr>
+          <a:xfrm>
+            <a:off x="914400" y="3337560"/>
+            <a:ext cx="73152" cy="73152"/>
+          </a:xfrm>
+          <a:prstGeom prst="ellipse">
+            <a:avLst/>
+          </a:prstGeom>
+          <a:solidFill>
+            <a:srgbClr val="C9A227"/>
+          </a:solidFill>
+          <a:ln/>
+        </p:spPr>
+      </p:sp>
+      <p:sp>
+        <p:nvSpPr>
+          <p:cNvPr id="11" name="Text 9"/>
+          <p:cNvSpPr/>
+          <p:nvPr/>
+        </p:nvSpPr>
+        <p:spPr>
+          <a:xfrm>
+            <a:off x="1097280" y="3282696"/>
+            <a:ext cx="4526280" cy="502920"/>
+          </a:xfrm>
+          <a:prstGeom prst="rect">
+            <a:avLst/>
+          </a:prstGeom>
+          <a:noFill/>
+          <a:ln/>
+        </p:spPr>
+        <p:txBody>
+          <a:bodyPr wrap="square" lIns="0" tIns="0" rIns="0" bIns="0" rtlCol="0" anchor="t"/>
+          <a:lstStyle/>
+          <a:p>
+            <a:pPr indent="0" marL="0">
+              <a:lnSpc>
+                <a:spcPct val="115000"/>
+              </a:lnSpc>
+              <a:buNone/>
+            </a:pPr>
+            <a:r>
+              <a:rPr lang="en-US" sz="1000" dirty="0">
+                <a:solidFill>
+                  <a:srgbClr val="3C4560"/>
+                </a:solidFill>
+                <a:latin typeface="Calibri" pitchFamily="34" charset="0"/>
+                <a:ea typeface="Calibri" pitchFamily="34" charset="-122"/>
+                <a:cs typeface="Calibri" pitchFamily="34" charset="-120"/>
+              </a:rPr>
+              <a:t>Repeated no-progress → exponential backoff (30s → 300s cap)</a:t>
+            </a:r>
+            <a:endParaRPr lang="en-US" sz="1000" dirty="0"/>
+          </a:p>
+        </p:txBody>
+      </p:sp>
+      <p:sp>
+        <p:nvSpPr>
+          <p:cNvPr id="12" name="Shape 10"/>
+          <p:cNvSpPr/>
+          <p:nvPr/>
+        </p:nvSpPr>
+        <p:spPr>
+          <a:xfrm>
+            <a:off x="914400" y="3904488"/>
+            <a:ext cx="73152" cy="73152"/>
+          </a:xfrm>
+          <a:prstGeom prst="ellipse">
+            <a:avLst/>
+          </a:prstGeom>
+          <a:solidFill>
+            <a:srgbClr val="C9A227"/>
+          </a:solidFill>
+          <a:ln/>
+        </p:spPr>
+      </p:sp>
+      <p:sp>
+        <p:nvSpPr>
+          <p:cNvPr id="13" name="Text 11"/>
+          <p:cNvSpPr/>
+          <p:nvPr/>
+        </p:nvSpPr>
+        <p:spPr>
+          <a:xfrm>
+            <a:off x="1097280" y="3849624"/>
+            <a:ext cx="4526280" cy="502920"/>
+          </a:xfrm>
+          <a:prstGeom prst="rect">
+            <a:avLst/>
+          </a:prstGeom>
+          <a:noFill/>
+          <a:ln/>
+        </p:spPr>
+        <p:txBody>
+          <a:bodyPr wrap="square" lIns="0" tIns="0" rIns="0" bIns="0" rtlCol="0" anchor="t"/>
+          <a:lstStyle/>
+          <a:p>
+            <a:pPr indent="0" marL="0">
+              <a:lnSpc>
+                <a:spcPct val="115000"/>
+              </a:lnSpc>
+              <a:buNone/>
+            </a:pPr>
+            <a:r>
+              <a:rPr lang="en-US" sz="1000" dirty="0">
+                <a:solidFill>
+                  <a:srgbClr val="3C4560"/>
+                </a:solidFill>
+                <a:latin typeface="Calibri" pitchFamily="34" charset="0"/>
+                <a:ea typeface="Calibri" pitchFamily="34" charset="-122"/>
+                <a:cs typeface="Calibri" pitchFamily="34" charset="-120"/>
+              </a:rPr>
+              <a:t>HTTP session recreated after 10 consecutive failures; periodic /api/v1/health check</a:t>
+            </a:r>
+            <a:endParaRPr lang="en-US" sz="1000" dirty="0"/>
+          </a:p>
+        </p:txBody>
+      </p:sp>
+      <p:sp>
+        <p:nvSpPr>
+          <p:cNvPr id="14" name="Shape 12"/>
+          <p:cNvSpPr/>
+          <p:nvPr/>
+        </p:nvSpPr>
+        <p:spPr>
+          <a:xfrm>
+            <a:off x="6263640" y="1371600"/>
+            <a:ext cx="5257800" cy="3063240"/>
           </a:xfrm>
           <a:prstGeom prst="roundRect">
             <a:avLst>
-              <a:gd name="adj" fmla="val 4667"/>
+              <a:gd name="adj" fmla="val 2388"/>
             </a:avLst>
           </a:prstGeom>
           <a:solidFill>
-            <a:srgbClr val="C9A227"/>
+            <a:srgbClr val="FFFFFF"/>
           </a:solidFill>
           <a:ln/>
           <a:effectLst>
@@ -13688,53 +14928,73 @@
       </p:sp>
       <p:sp>
         <p:nvSpPr>
-          <p:cNvPr id="9" name="Text 7"/>
-          <p:cNvSpPr/>
-          <p:nvPr/>
-        </p:nvSpPr>
-        <p:spPr>
-          <a:xfrm>
-            <a:off x="3483864" y="1527048"/>
-            <a:ext cx="2121408" cy="365760"/>
-          </a:xfrm>
-          <a:prstGeom prst="rect">
-            <a:avLst/>
-          </a:prstGeom>
-          <a:noFill/>
-          <a:ln/>
-        </p:spPr>
-        <p:txBody>
-          <a:bodyPr wrap="square" lIns="0" tIns="0" rIns="0" bIns="0" rtlCol="0" anchor="ctr"/>
-          <a:lstStyle/>
-          <a:p>
-            <a:pPr indent="0" marL="0">
-              <a:buNone/>
-            </a:pPr>
-            <a:r>
-              <a:rPr lang="en-US" sz="1150" b="1" dirty="0">
-                <a:solidFill>
-                  <a:srgbClr val="141A32"/>
-                </a:solidFill>
-                <a:latin typeface="Calibri" pitchFamily="34" charset="0"/>
-                <a:ea typeface="Calibri" pitchFamily="34" charset="-122"/>
-                <a:cs typeface="Calibri" pitchFamily="34" charset="-120"/>
-              </a:rPr>
-              <a:t>Channel object</a:t>
-            </a:r>
-            <a:endParaRPr lang="en-US" sz="1150" dirty="0"/>
-          </a:p>
-        </p:txBody>
-      </p:sp>
-      <p:sp>
-        <p:nvSpPr>
-          <p:cNvPr id="10" name="Text 8"/>
-          <p:cNvSpPr/>
-          <p:nvPr/>
-        </p:nvSpPr>
-        <p:spPr>
-          <a:xfrm>
-            <a:off x="3483864" y="1874520"/>
-            <a:ext cx="2121408" cy="777240"/>
+          <p:cNvPr id="15" name="Text 13"/>
+          <p:cNvSpPr/>
+          <p:nvPr/>
+        </p:nvSpPr>
+        <p:spPr>
+          <a:xfrm>
+            <a:off x="6537960" y="1600200"/>
+            <a:ext cx="4709160" cy="274320"/>
+          </a:xfrm>
+          <a:prstGeom prst="rect">
+            <a:avLst/>
+          </a:prstGeom>
+          <a:noFill/>
+          <a:ln/>
+        </p:spPr>
+        <p:txBody>
+          <a:bodyPr wrap="square" lIns="0" tIns="0" rIns="0" bIns="0" rtlCol="0" anchor="ctr"/>
+          <a:lstStyle/>
+          <a:p>
+            <a:pPr indent="0" marL="0">
+              <a:buNone/>
+            </a:pPr>
+            <a:r>
+              <a:rPr lang="en-US" sz="1100" b="1" dirty="0">
+                <a:solidFill>
+                  <a:srgbClr val="C9A227"/>
+                </a:solidFill>
+                <a:latin typeface="Calibri" pitchFamily="34" charset="0"/>
+                <a:ea typeface="Calibri" pitchFamily="34" charset="-122"/>
+                <a:cs typeface="Calibri" pitchFamily="34" charset="-120"/>
+              </a:rPr>
+              <a:t>QUARANTINE &amp; REPLAY — the safety net</a:t>
+            </a:r>
+            <a:endParaRPr lang="en-US" sz="1100" dirty="0"/>
+          </a:p>
+        </p:txBody>
+      </p:sp>
+      <p:sp>
+        <p:nvSpPr>
+          <p:cNvPr id="16" name="Shape 14"/>
+          <p:cNvSpPr/>
+          <p:nvPr/>
+        </p:nvSpPr>
+        <p:spPr>
+          <a:xfrm>
+            <a:off x="6537960" y="2203704"/>
+            <a:ext cx="73152" cy="73152"/>
+          </a:xfrm>
+          <a:prstGeom prst="ellipse">
+            <a:avLst/>
+          </a:prstGeom>
+          <a:solidFill>
+            <a:srgbClr val="C9A227"/>
+          </a:solidFill>
+          <a:ln/>
+        </p:spPr>
+      </p:sp>
+      <p:sp>
+        <p:nvSpPr>
+          <p:cNvPr id="17" name="Text 15"/>
+          <p:cNvSpPr/>
+          <p:nvPr/>
+        </p:nvSpPr>
+        <p:spPr>
+          <a:xfrm>
+            <a:off x="6720840" y="2148840"/>
+            <a:ext cx="4526280" cy="640080"/>
           </a:xfrm>
           <a:prstGeom prst="rect">
             <a:avLst/>
@@ -13748,307 +15008,163 @@
           <a:p>
             <a:pPr indent="0" marL="0">
               <a:lnSpc>
-                <a:spcPct val="118000"/>
+                <a:spcPct val="115000"/>
               </a:lnSpc>
               <a:buNone/>
             </a:pPr>
             <a:r>
-              <a:rPr lang="en-US" sz="930" dirty="0">
-                <a:solidFill>
-                  <a:srgbClr val="141A32"/>
-                </a:solidFill>
-                <a:latin typeface="Calibri" pitchFamily="34" charset="0"/>
-                <a:ea typeface="Calibri" pitchFamily="34" charset="-122"/>
-                <a:cs typeface="Calibri" pitchFamily="34" charset="-120"/>
-              </a:rPr>
-              <a:t>build_panels() builds ONE Channel from the M5 frame, then assigns that SAME object — by reference, not a copy — to panels A, B, and C.</a:t>
-            </a:r>
-            <a:endParaRPr lang="en-US" sz="930" dirty="0"/>
-          </a:p>
-        </p:txBody>
-      </p:sp>
-      <p:sp>
-        <p:nvSpPr>
-          <p:cNvPr id="11" name="Shape 9"/>
-          <p:cNvSpPr/>
-          <p:nvPr/>
-        </p:nvSpPr>
-        <p:spPr>
-          <a:xfrm>
-            <a:off x="5769864" y="2103120"/>
-            <a:ext cx="228600" cy="0"/>
-          </a:xfrm>
-          <a:prstGeom prst="line">
-            <a:avLst/>
-          </a:prstGeom>
-          <a:noFill/>
-          <a:ln w="22225">
-            <a:solidFill>
-              <a:srgbClr val="1B2340"/>
-            </a:solidFill>
-            <a:prstDash val="solid"/>
-            <a:tailEnd type="triangle"/>
-          </a:ln>
-        </p:spPr>
-      </p:sp>
-      <p:sp>
-        <p:nvSpPr>
-          <p:cNvPr id="12" name="Shape 10"/>
-          <p:cNvSpPr/>
-          <p:nvPr/>
-        </p:nvSpPr>
-        <p:spPr>
-          <a:xfrm>
-            <a:off x="5998464" y="1417320"/>
-            <a:ext cx="2450592" cy="1371600"/>
+              <a:rPr lang="en-US" sz="1000" dirty="0">
+                <a:solidFill>
+                  <a:srgbClr val="3C4560"/>
+                </a:solidFill>
+                <a:latin typeface="Calibri" pitchFamily="34" charset="0"/>
+                <a:ea typeface="Calibri" pitchFamily="34" charset="-122"/>
+                <a:cs typeface="Calibri" pitchFamily="34" charset="-120"/>
+              </a:rPr>
+              <a:t>HTTP 400 rows are written to rejected_rows.jsonl AND stamped synced_at — a poison row can't block the outbox</a:t>
+            </a:r>
+            <a:endParaRPr lang="en-US" sz="1000" dirty="0"/>
+          </a:p>
+        </p:txBody>
+      </p:sp>
+      <p:sp>
+        <p:nvSpPr>
+          <p:cNvPr id="18" name="Shape 16"/>
+          <p:cNvSpPr/>
+          <p:nvPr/>
+        </p:nvSpPr>
+        <p:spPr>
+          <a:xfrm>
+            <a:off x="6537960" y="2916936"/>
+            <a:ext cx="73152" cy="73152"/>
+          </a:xfrm>
+          <a:prstGeom prst="ellipse">
+            <a:avLst/>
+          </a:prstGeom>
+          <a:solidFill>
+            <a:srgbClr val="C9A227"/>
+          </a:solidFill>
+          <a:ln/>
+        </p:spPr>
+      </p:sp>
+      <p:sp>
+        <p:nvSpPr>
+          <p:cNvPr id="19" name="Text 17"/>
+          <p:cNvSpPr/>
+          <p:nvPr/>
+        </p:nvSpPr>
+        <p:spPr>
+          <a:xfrm>
+            <a:off x="6720840" y="2862072"/>
+            <a:ext cx="4526280" cy="640080"/>
+          </a:xfrm>
+          <a:prstGeom prst="rect">
+            <a:avLst/>
+          </a:prstGeom>
+          <a:noFill/>
+          <a:ln/>
+        </p:spPr>
+        <p:txBody>
+          <a:bodyPr wrap="square" lIns="0" tIns="0" rIns="0" bIns="0" rtlCol="0" anchor="t"/>
+          <a:lstStyle/>
+          <a:p>
+            <a:pPr indent="0" marL="0">
+              <a:lnSpc>
+                <a:spcPct val="115000"/>
+              </a:lnSpc>
+              <a:buNone/>
+            </a:pPr>
+            <a:r>
+              <a:rPr lang="en-US" sz="1000" dirty="0">
+                <a:solidFill>
+                  <a:srgbClr val="3C4560"/>
+                </a:solidFill>
+                <a:latin typeface="Calibri" pitchFamily="34" charset="0"/>
+                <a:ea typeface="Calibri" pitchFamily="34" charset="-122"/>
+                <a:cs typeface="Calibri" pitchFamily="34" charset="-120"/>
+              </a:rPr>
+              <a:t>replay_quarantine.py re-POSTs quarantined rows after a fix; --dry-run previews without sending</a:t>
+            </a:r>
+            <a:endParaRPr lang="en-US" sz="1000" dirty="0"/>
+          </a:p>
+        </p:txBody>
+      </p:sp>
+      <p:sp>
+        <p:nvSpPr>
+          <p:cNvPr id="20" name="Shape 18"/>
+          <p:cNvSpPr/>
+          <p:nvPr/>
+        </p:nvSpPr>
+        <p:spPr>
+          <a:xfrm>
+            <a:off x="6537960" y="3630168"/>
+            <a:ext cx="73152" cy="73152"/>
+          </a:xfrm>
+          <a:prstGeom prst="ellipse">
+            <a:avLst/>
+          </a:prstGeom>
+          <a:solidFill>
+            <a:srgbClr val="C9A227"/>
+          </a:solidFill>
+          <a:ln/>
+        </p:spPr>
+      </p:sp>
+      <p:sp>
+        <p:nvSpPr>
+          <p:cNvPr id="21" name="Text 19"/>
+          <p:cNvSpPr/>
+          <p:nvPr/>
+        </p:nvSpPr>
+        <p:spPr>
+          <a:xfrm>
+            <a:off x="6720840" y="3575304"/>
+            <a:ext cx="4526280" cy="640080"/>
+          </a:xfrm>
+          <a:prstGeom prst="rect">
+            <a:avLst/>
+          </a:prstGeom>
+          <a:noFill/>
+          <a:ln/>
+        </p:spPr>
+        <p:txBody>
+          <a:bodyPr wrap="square" lIns="0" tIns="0" rIns="0" bIns="0" rtlCol="0" anchor="t"/>
+          <a:lstStyle/>
+          <a:p>
+            <a:pPr indent="0" marL="0">
+              <a:lnSpc>
+                <a:spcPct val="115000"/>
+              </a:lnSpc>
+              <a:buNone/>
+            </a:pPr>
+            <a:r>
+              <a:rPr lang="en-US" sz="1000" dirty="0">
+                <a:solidFill>
+                  <a:srgbClr val="3C4560"/>
+                </a:solidFill>
+                <a:latin typeface="Calibri" pitchFamily="34" charset="0"/>
+                <a:ea typeface="Calibri" pitchFamily="34" charset="-122"/>
+                <a:cs typeface="Calibri" pitchFamily="34" charset="-120"/>
+              </a:rPr>
+              <a:t>Successful replays are dropped from the file; failures are rewritten back — safe to re-run, idempotent</a:t>
+            </a:r>
+            <a:endParaRPr lang="en-US" sz="1000" dirty="0"/>
+          </a:p>
+        </p:txBody>
+      </p:sp>
+      <p:sp>
+        <p:nvSpPr>
+          <p:cNvPr id="22" name="Shape 20"/>
+          <p:cNvSpPr/>
+          <p:nvPr/>
+        </p:nvSpPr>
+        <p:spPr>
+          <a:xfrm>
+            <a:off x="640080" y="4663440"/>
+            <a:ext cx="10881360" cy="1234440"/>
           </a:xfrm>
           <a:prstGeom prst="roundRect">
             <a:avLst>
-              <a:gd name="adj" fmla="val 4667"/>
-            </a:avLst>
-          </a:prstGeom>
-          <a:solidFill>
-            <a:srgbClr val="FFFFFF"/>
-          </a:solidFill>
-          <a:ln/>
-          <a:effectLst>
-            <a:outerShdw sx="100000" sy="100000" kx="0" ky="0" algn="bl" rotWithShape="0" blurRad="101600" dist="38100" dir="2700000">
-              <a:srgbClr val="000000">
-                <a:alpha val="12000"/>
-              </a:srgbClr>
-            </a:outerShdw>
-          </a:effectLst>
-        </p:spPr>
-      </p:sp>
-      <p:sp>
-        <p:nvSpPr>
-          <p:cNvPr id="13" name="Text 11"/>
-          <p:cNvSpPr/>
-          <p:nvPr/>
-        </p:nvSpPr>
-        <p:spPr>
-          <a:xfrm>
-            <a:off x="6163056" y="1527048"/>
-            <a:ext cx="2121408" cy="365760"/>
-          </a:xfrm>
-          <a:prstGeom prst="rect">
-            <a:avLst/>
-          </a:prstGeom>
-          <a:noFill/>
-          <a:ln/>
-        </p:spPr>
-        <p:txBody>
-          <a:bodyPr wrap="square" lIns="0" tIns="0" rIns="0" bIns="0" rtlCol="0" anchor="ctr"/>
-          <a:lstStyle/>
-          <a:p>
-            <a:pPr indent="0" marL="0">
-              <a:buNone/>
-            </a:pPr>
-            <a:r>
-              <a:rPr lang="en-US" sz="1150" b="1" dirty="0">
-                <a:solidFill>
-                  <a:srgbClr val="1B2340"/>
-                </a:solidFill>
-                <a:latin typeface="Calibri" pitchFamily="34" charset="0"/>
-                <a:ea typeface="Calibri" pitchFamily="34" charset="-122"/>
-                <a:cs typeface="Calibri" pitchFamily="34" charset="-120"/>
-              </a:rPr>
-              <a:t>renderer.py</a:t>
-            </a:r>
-            <a:endParaRPr lang="en-US" sz="1150" dirty="0"/>
-          </a:p>
-        </p:txBody>
-      </p:sp>
-      <p:sp>
-        <p:nvSpPr>
-          <p:cNvPr id="14" name="Text 12"/>
-          <p:cNvSpPr/>
-          <p:nvPr/>
-        </p:nvSpPr>
-        <p:spPr>
-          <a:xfrm>
-            <a:off x="6163056" y="1874520"/>
-            <a:ext cx="2121408" cy="777240"/>
-          </a:xfrm>
-          <a:prstGeom prst="rect">
-            <a:avLst/>
-          </a:prstGeom>
-          <a:noFill/>
-          <a:ln/>
-        </p:spPr>
-        <p:txBody>
-          <a:bodyPr wrap="square" lIns="0" tIns="0" rIns="0" bIns="0" rtlCol="0" anchor="t"/>
-          <a:lstStyle/>
-          <a:p>
-            <a:pPr indent="0" marL="0">
-              <a:lnSpc>
-                <a:spcPct val="118000"/>
-              </a:lnSpc>
-              <a:buNone/>
-            </a:pPr>
-            <a:r>
-              <a:rPr lang="en-US" sz="930" dirty="0">
-                <a:solidFill>
-                  <a:srgbClr val="6B7390"/>
-                </a:solidFill>
-                <a:latin typeface="Calibri" pitchFamily="34" charset="0"/>
-                <a:ea typeface="Calibri" pitchFamily="34" charset="-122"/>
-                <a:cs typeface="Calibri" pitchFamily="34" charset="-120"/>
-              </a:rPr>
-              <a:t>Hand-draws candles + channel against a REAL unix-time matplotlib axis — deliberately not mplfinance's categorical index, so M5 lines land at the correct time on M15 bars.</a:t>
-            </a:r>
-            <a:endParaRPr lang="en-US" sz="930" dirty="0"/>
-          </a:p>
-        </p:txBody>
-      </p:sp>
-      <p:sp>
-        <p:nvSpPr>
-          <p:cNvPr id="15" name="Shape 13"/>
-          <p:cNvSpPr/>
-          <p:nvPr/>
-        </p:nvSpPr>
-        <p:spPr>
-          <a:xfrm>
-            <a:off x="8449056" y="2103120"/>
-            <a:ext cx="228600" cy="0"/>
-          </a:xfrm>
-          <a:prstGeom prst="line">
-            <a:avLst/>
-          </a:prstGeom>
-          <a:noFill/>
-          <a:ln w="22225">
-            <a:solidFill>
-              <a:srgbClr val="1B2340"/>
-            </a:solidFill>
-            <a:prstDash val="solid"/>
-            <a:tailEnd type="triangle"/>
-          </a:ln>
-        </p:spPr>
-      </p:sp>
-      <p:sp>
-        <p:nvSpPr>
-          <p:cNvPr id="16" name="Shape 14"/>
-          <p:cNvSpPr/>
-          <p:nvPr/>
-        </p:nvSpPr>
-        <p:spPr>
-          <a:xfrm>
-            <a:off x="8677656" y="1417320"/>
-            <a:ext cx="2450592" cy="1371600"/>
-          </a:xfrm>
-          <a:prstGeom prst="roundRect">
-            <a:avLst>
-              <a:gd name="adj" fmla="val 4667"/>
-            </a:avLst>
-          </a:prstGeom>
-          <a:solidFill>
-            <a:srgbClr val="141A32"/>
-          </a:solidFill>
-          <a:ln/>
-          <a:effectLst>
-            <a:outerShdw sx="100000" sy="100000" kx="0" ky="0" algn="bl" rotWithShape="0" blurRad="101600" dist="38100" dir="2700000">
-              <a:srgbClr val="000000">
-                <a:alpha val="12000"/>
-              </a:srgbClr>
-            </a:outerShdw>
-          </a:effectLst>
-        </p:spPr>
-      </p:sp>
-      <p:sp>
-        <p:nvSpPr>
-          <p:cNvPr id="17" name="Text 15"/>
-          <p:cNvSpPr/>
-          <p:nvPr/>
-        </p:nvSpPr>
-        <p:spPr>
-          <a:xfrm>
-            <a:off x="8842248" y="1527048"/>
-            <a:ext cx="2121408" cy="365760"/>
-          </a:xfrm>
-          <a:prstGeom prst="rect">
-            <a:avLst/>
-          </a:prstGeom>
-          <a:noFill/>
-          <a:ln/>
-        </p:spPr>
-        <p:txBody>
-          <a:bodyPr wrap="square" lIns="0" tIns="0" rIns="0" bIns="0" rtlCol="0" anchor="ctr"/>
-          <a:lstStyle/>
-          <a:p>
-            <a:pPr indent="0" marL="0">
-              <a:buNone/>
-            </a:pPr>
-            <a:r>
-              <a:rPr lang="en-US" sz="1150" b="1" dirty="0">
-                <a:solidFill>
-                  <a:srgbClr val="FFFFFF"/>
-                </a:solidFill>
-                <a:latin typeface="Calibri" pitchFamily="34" charset="0"/>
-                <a:ea typeface="Calibri" pitchFamily="34" charset="-122"/>
-                <a:cs typeface="Calibri" pitchFamily="34" charset="-120"/>
-              </a:rPr>
-              <a:t>3-Panel PNG</a:t>
-            </a:r>
-            <a:endParaRPr lang="en-US" sz="1150" dirty="0"/>
-          </a:p>
-        </p:txBody>
-      </p:sp>
-      <p:sp>
-        <p:nvSpPr>
-          <p:cNvPr id="18" name="Text 16"/>
-          <p:cNvSpPr/>
-          <p:nvPr/>
-        </p:nvSpPr>
-        <p:spPr>
-          <a:xfrm>
-            <a:off x="8842248" y="1874520"/>
-            <a:ext cx="2121408" cy="777240"/>
-          </a:xfrm>
-          <a:prstGeom prst="rect">
-            <a:avLst/>
-          </a:prstGeom>
-          <a:noFill/>
-          <a:ln/>
-        </p:spPr>
-        <p:txBody>
-          <a:bodyPr wrap="square" lIns="0" tIns="0" rIns="0" bIns="0" rtlCol="0" anchor="t"/>
-          <a:lstStyle/>
-          <a:p>
-            <a:pPr indent="0" marL="0">
-              <a:lnSpc>
-                <a:spcPct val="118000"/>
-              </a:lnSpc>
-              <a:buNone/>
-            </a:pPr>
-            <a:r>
-              <a:rPr lang="en-US" sz="930" dirty="0">
-                <a:solidFill>
-                  <a:srgbClr val="AEB9D6"/>
-                </a:solidFill>
-                <a:latin typeface="Calibri" pitchFamily="34" charset="0"/>
-                <a:ea typeface="Calibri" pitchFamily="34" charset="-122"/>
-                <a:cs typeface="Calibri" pitchFamily="34" charset="-120"/>
-              </a:rPr>
-              <a:t>One combined figure, Agg backend (headless), 120 dpi. Chart A = M5 + its channel; B/C = M15 with the M5 channel overlaid.</a:t>
-            </a:r>
-            <a:endParaRPr lang="en-US" sz="930" dirty="0"/>
-          </a:p>
-        </p:txBody>
-      </p:sp>
-      <p:sp>
-        <p:nvSpPr>
-          <p:cNvPr id="19" name="Shape 17"/>
-          <p:cNvSpPr/>
-          <p:nvPr/>
-        </p:nvSpPr>
-        <p:spPr>
-          <a:xfrm>
-            <a:off x="640080" y="3154680"/>
-            <a:ext cx="5257800" cy="2331720"/>
-          </a:xfrm>
-          <a:prstGeom prst="roundRect">
-            <a:avLst>
-              <a:gd name="adj" fmla="val 3137"/>
+              <a:gd name="adj" fmla="val 5926"/>
             </a:avLst>
           </a:prstGeom>
           <a:solidFill>
@@ -14059,14 +15175,53 @@
       </p:sp>
       <p:sp>
         <p:nvSpPr>
-          <p:cNvPr id="20" name="Text 18"/>
-          <p:cNvSpPr/>
-          <p:nvPr/>
-        </p:nvSpPr>
-        <p:spPr>
-          <a:xfrm>
-            <a:off x="914400" y="3355848"/>
-            <a:ext cx="4709160" cy="274320"/>
+          <p:cNvPr id="23" name="Text 21"/>
+          <p:cNvSpPr/>
+          <p:nvPr/>
+        </p:nvSpPr>
+        <p:spPr>
+          <a:xfrm>
+            <a:off x="914400" y="4800600"/>
+            <a:ext cx="10332720" cy="274320"/>
+          </a:xfrm>
+          <a:prstGeom prst="rect">
+            <a:avLst/>
+          </a:prstGeom>
+          <a:noFill/>
+          <a:ln/>
+        </p:spPr>
+        <p:txBody>
+          <a:bodyPr wrap="square" lIns="0" tIns="0" rIns="0" bIns="0" rtlCol="0" anchor="ctr"/>
+          <a:lstStyle/>
+          <a:p>
+            <a:pPr indent="0" marL="0">
+              <a:buNone/>
+            </a:pPr>
+            <a:r>
+              <a:rPr lang="en-US" sz="1050" b="1" dirty="0">
+                <a:solidFill>
+                  <a:srgbClr val="C9A227"/>
+                </a:solidFill>
+                <a:latin typeface="Calibri" pitchFamily="34" charset="0"/>
+                <a:ea typeface="Calibri" pitchFamily="34" charset="-122"/>
+                <a:cs typeface="Calibri" pitchFamily="34" charset="-120"/>
+              </a:rPr>
+              <a:t>DEPLOYMENT — install_services.bat installs 3 auto-restarting NSSM services on the VPS</a:t>
+            </a:r>
+            <a:endParaRPr lang="en-US" sz="1050" dirty="0"/>
+          </a:p>
+        </p:txBody>
+      </p:sp>
+      <p:sp>
+        <p:nvSpPr>
+          <p:cNvPr id="24" name="Text 22"/>
+          <p:cNvSpPr/>
+          <p:nvPr/>
+        </p:nvSpPr>
+        <p:spPr>
+          <a:xfrm>
+            <a:off x="914400" y="5166360"/>
+            <a:ext cx="3383280" cy="274320"/>
           </a:xfrm>
           <a:prstGeom prst="rect">
             <a:avLst/>
@@ -14084,13 +15239,13 @@
             <a:r>
               <a:rPr lang="en-US" sz="1100" b="1" dirty="0">
                 <a:solidFill>
-                  <a:srgbClr val="C9A227"/>
-                </a:solidFill>
-                <a:latin typeface="Calibri" pitchFamily="34" charset="0"/>
-                <a:ea typeface="Calibri" pitchFamily="34" charset="-122"/>
-                <a:cs typeface="Calibri" pitchFamily="34" charset="-120"/>
-              </a:rPr>
-              <a:t>DEV / DEMO PATH — fixture.py</a:t>
+                  <a:srgbClr val="FFFFFF"/>
+                </a:solidFill>
+                <a:latin typeface="Calibri" pitchFamily="34" charset="0"/>
+                <a:ea typeface="Calibri" pitchFamily="34" charset="-122"/>
+                <a:cs typeface="Calibri" pitchFamily="34" charset="-120"/>
+              </a:rPr>
+              <a:t>MT5Collector</a:t>
             </a:r>
             <a:endParaRPr lang="en-US" sz="1100" dirty="0"/>
           </a:p>
@@ -14098,14 +15253,14 @@
       </p:sp>
       <p:sp>
         <p:nvSpPr>
-          <p:cNvPr id="21" name="Text 19"/>
-          <p:cNvSpPr/>
-          <p:nvPr/>
-        </p:nvSpPr>
-        <p:spPr>
-          <a:xfrm>
-            <a:off x="914400" y="3703320"/>
-            <a:ext cx="4709160" cy="1600200"/>
+          <p:cNvPr id="25" name="Text 23"/>
+          <p:cNvSpPr/>
+          <p:nvPr/>
+        </p:nvSpPr>
+        <p:spPr>
+          <a:xfrm>
+            <a:off x="914400" y="5440680"/>
+            <a:ext cx="3383280" cy="365760"/>
           </a:xfrm>
           <a:prstGeom prst="rect">
             <a:avLst/>
@@ -14119,12 +15274,12 @@
           <a:p>
             <a:pPr indent="0" marL="0">
               <a:lnSpc>
-                <a:spcPct val="125000"/>
+                <a:spcPct val="115000"/>
               </a:lnSpc>
               <a:buNone/>
             </a:pPr>
             <a:r>
-              <a:rPr lang="en-US" sz="1000" dirty="0">
+              <a:rPr lang="en-US" sz="950" dirty="0">
                 <a:solidFill>
                   <a:srgbClr val="AEB9D6"/>
                 </a:solidFill>
@@ -14132,51 +15287,22 @@
                 <a:ea typeface="Calibri" pitchFamily="34" charset="-122"/>
                 <a:cs typeface="Calibri" pitchFamily="34" charset="-120"/>
               </a:rPr>
-              <a:t>The shipped real market_data sample has only 3 M5 bars, no M15 rows, and NULL channel columns (warm-up by design) — it can't exercise the renderer. fixture.py fabricates a self-consistent synthetic xauusd.db instead: 96 M5 bars (8h) plus a coherently-aggregated M15 series, with a populated straight parallel channel per variant. Used automatically whenever --db is omitted from the CLI.</a:t>
-            </a:r>
-            <a:endParaRPr lang="en-US" sz="1000" dirty="0"/>
-          </a:p>
-        </p:txBody>
-      </p:sp>
-      <p:sp>
-        <p:nvSpPr>
-          <p:cNvPr id="22" name="Shape 20"/>
-          <p:cNvSpPr/>
-          <p:nvPr/>
-        </p:nvSpPr>
-        <p:spPr>
-          <a:xfrm>
-            <a:off x="6263640" y="3154680"/>
-            <a:ext cx="5257800" cy="2331720"/>
-          </a:xfrm>
-          <a:prstGeom prst="roundRect">
-            <a:avLst>
-              <a:gd name="adj" fmla="val 3137"/>
-            </a:avLst>
-          </a:prstGeom>
-          <a:solidFill>
-            <a:srgbClr val="FFFFFF"/>
-          </a:solidFill>
-          <a:ln/>
-          <a:effectLst>
-            <a:outerShdw sx="100000" sy="100000" kx="0" ky="0" algn="bl" rotWithShape="0" blurRad="101600" dist="38100" dir="2700000">
-              <a:srgbClr val="000000">
-                <a:alpha val="12000"/>
-              </a:srgbClr>
-            </a:outerShdw>
-          </a:effectLst>
-        </p:spPr>
-      </p:sp>
-      <p:sp>
-        <p:nvSpPr>
-          <p:cNvPr id="23" name="Text 21"/>
-          <p:cNvSpPr/>
-          <p:nvPr/>
-        </p:nvSpPr>
-        <p:spPr>
-          <a:xfrm>
-            <a:off x="6537960" y="3355848"/>
-            <a:ext cx="4709160" cy="274320"/>
+              <a:t>the pipeline engine (COLLECT→PROMOTE)</a:t>
+            </a:r>
+            <a:endParaRPr lang="en-US" sz="950" dirty="0"/>
+          </a:p>
+        </p:txBody>
+      </p:sp>
+      <p:sp>
+        <p:nvSpPr>
+          <p:cNvPr id="26" name="Text 24"/>
+          <p:cNvSpPr/>
+          <p:nvPr/>
+        </p:nvSpPr>
+        <p:spPr>
+          <a:xfrm>
+            <a:off x="4526280" y="5166360"/>
+            <a:ext cx="3383280" cy="274320"/>
           </a:xfrm>
           <a:prstGeom prst="rect">
             <a:avLst/>
@@ -14194,13 +15320,13 @@
             <a:r>
               <a:rPr lang="en-US" sz="1100" b="1" dirty="0">
                 <a:solidFill>
-                  <a:srgbClr val="C9A227"/>
-                </a:solidFill>
-                <a:latin typeface="Calibri" pitchFamily="34" charset="0"/>
-                <a:ea typeface="Calibri" pitchFamily="34" charset="-122"/>
-                <a:cs typeface="Calibri" pitchFamily="34" charset="-120"/>
-              </a:rPr>
-              <a:t>TEST COVERAGE — test_mtf_render.py</a:t>
+                  <a:srgbClr val="FFFFFF"/>
+                </a:solidFill>
+                <a:latin typeface="Calibri" pitchFamily="34" charset="0"/>
+                <a:ea typeface="Calibri" pitchFamily="34" charset="-122"/>
+                <a:cs typeface="Calibri" pitchFamily="34" charset="-120"/>
+              </a:rPr>
+              <a:t>MT5PushWorker</a:t>
             </a:r>
             <a:endParaRPr lang="en-US" sz="1100" dirty="0"/>
           </a:p>
@@ -14208,187 +15334,124 @@
       </p:sp>
       <p:sp>
         <p:nvSpPr>
-          <p:cNvPr id="24" name="Shape 22"/>
-          <p:cNvSpPr/>
-          <p:nvPr/>
-        </p:nvSpPr>
-        <p:spPr>
-          <a:xfrm>
-            <a:off x="6537960" y="3803904"/>
-            <a:ext cx="73152" cy="73152"/>
-          </a:xfrm>
-          <a:prstGeom prst="ellipse">
-            <a:avLst/>
-          </a:prstGeom>
-          <a:solidFill>
-            <a:srgbClr val="C9A227"/>
-          </a:solidFill>
-          <a:ln/>
-        </p:spPr>
-      </p:sp>
-      <p:sp>
-        <p:nvSpPr>
-          <p:cNvPr id="25" name="Text 23"/>
-          <p:cNvSpPr/>
-          <p:nvPr/>
-        </p:nvSpPr>
-        <p:spPr>
-          <a:xfrm>
-            <a:off x="6720840" y="3749040"/>
-            <a:ext cx="4526280" cy="548640"/>
-          </a:xfrm>
-          <a:prstGeom prst="rect">
-            <a:avLst/>
-          </a:prstGeom>
-          <a:noFill/>
-          <a:ln/>
-        </p:spPr>
-        <p:txBody>
-          <a:bodyPr wrap="square" lIns="0" tIns="0" rIns="0" bIns="0" rtlCol="0" anchor="t"/>
+          <p:cNvPr id="27" name="Text 25"/>
+          <p:cNvSpPr/>
+          <p:nvPr/>
+        </p:nvSpPr>
+        <p:spPr>
+          <a:xfrm>
+            <a:off x="4526280" y="5440680"/>
+            <a:ext cx="3383280" cy="365760"/>
+          </a:xfrm>
+          <a:prstGeom prst="rect">
+            <a:avLst/>
+          </a:prstGeom>
+          <a:noFill/>
+          <a:ln/>
+        </p:spPr>
+        <p:txBody>
+          <a:bodyPr wrap="square" lIns="0" tIns="0" rIns="0" bIns="0" rtlCol="0" anchor="ctr"/>
           <a:lstStyle/>
           <a:p>
             <a:pPr indent="0" marL="0">
               <a:lnSpc>
-                <a:spcPct val="118000"/>
+                <a:spcPct val="115000"/>
               </a:lnSpc>
               <a:buNone/>
             </a:pPr>
             <a:r>
-              <a:rPr lang="en-US" sz="1000" dirty="0">
-                <a:solidFill>
-                  <a:srgbClr val="3C4560"/>
-                </a:solidFill>
-                <a:latin typeface="Calibri" pitchFamily="34" charset="0"/>
-                <a:ea typeface="Calibri" pitchFamily="34" charset="-122"/>
-                <a:cs typeface="Calibri" pitchFamily="34" charset="-120"/>
-              </a:rPr>
-              <a:t>Asserts panels B and C reference the IDENTICAL Channel object as A — proves the M5 channel is reused, not recomputed</a:t>
-            </a:r>
-            <a:endParaRPr lang="en-US" sz="1000" dirty="0"/>
-          </a:p>
-        </p:txBody>
-      </p:sp>
-      <p:sp>
-        <p:nvSpPr>
-          <p:cNvPr id="26" name="Shape 24"/>
-          <p:cNvSpPr/>
-          <p:nvPr/>
-        </p:nvSpPr>
-        <p:spPr>
-          <a:xfrm>
-            <a:off x="6537960" y="4370832"/>
-            <a:ext cx="73152" cy="73152"/>
-          </a:xfrm>
-          <a:prstGeom prst="ellipse">
-            <a:avLst/>
-          </a:prstGeom>
-          <a:solidFill>
-            <a:srgbClr val="C9A227"/>
-          </a:solidFill>
-          <a:ln/>
-        </p:spPr>
-      </p:sp>
-      <p:sp>
-        <p:nvSpPr>
-          <p:cNvPr id="27" name="Text 25"/>
-          <p:cNvSpPr/>
-          <p:nvPr/>
-        </p:nvSpPr>
-        <p:spPr>
-          <a:xfrm>
-            <a:off x="6720840" y="4315968"/>
-            <a:ext cx="4526280" cy="548640"/>
-          </a:xfrm>
-          <a:prstGeom prst="rect">
-            <a:avLst/>
-          </a:prstGeom>
-          <a:noFill/>
-          <a:ln/>
-        </p:spPr>
-        <p:txBody>
-          <a:bodyPr wrap="square" lIns="0" tIns="0" rIns="0" bIns="0" rtlCol="0" anchor="t"/>
+              <a:rPr lang="en-US" sz="950" dirty="0">
+                <a:solidFill>
+                  <a:srgbClr val="AEB9D6"/>
+                </a:solidFill>
+                <a:latin typeface="Calibri" pitchFamily="34" charset="0"/>
+                <a:ea typeface="Calibri" pitchFamily="34" charset="-122"/>
+                <a:cs typeface="Calibri" pitchFamily="34" charset="-120"/>
+              </a:rPr>
+              <a:t>outbox → gateway</a:t>
+            </a:r>
+            <a:endParaRPr lang="en-US" sz="950" dirty="0"/>
+          </a:p>
+        </p:txBody>
+      </p:sp>
+      <p:sp>
+        <p:nvSpPr>
+          <p:cNvPr id="28" name="Text 26"/>
+          <p:cNvSpPr/>
+          <p:nvPr/>
+        </p:nvSpPr>
+        <p:spPr>
+          <a:xfrm>
+            <a:off x="8138160" y="5166360"/>
+            <a:ext cx="3383280" cy="274320"/>
+          </a:xfrm>
+          <a:prstGeom prst="rect">
+            <a:avLst/>
+          </a:prstGeom>
+          <a:noFill/>
+          <a:ln/>
+        </p:spPr>
+        <p:txBody>
+          <a:bodyPr wrap="square" lIns="0" tIns="0" rIns="0" bIns="0" rtlCol="0" anchor="ctr"/>
+          <a:lstStyle/>
+          <a:p>
+            <a:pPr indent="0" marL="0">
+              <a:buNone/>
+            </a:pPr>
+            <a:r>
+              <a:rPr lang="en-US" sz="1100" b="1" dirty="0">
+                <a:solidFill>
+                  <a:srgbClr val="FFFFFF"/>
+                </a:solidFill>
+                <a:latin typeface="Calibri" pitchFamily="34" charset="0"/>
+                <a:ea typeface="Calibri" pitchFamily="34" charset="-122"/>
+                <a:cs typeface="Calibri" pitchFamily="34" charset="-120"/>
+              </a:rPr>
+              <a:t>MT5Relay</a:t>
+            </a:r>
+            <a:endParaRPr lang="en-US" sz="1100" dirty="0"/>
+          </a:p>
+        </p:txBody>
+      </p:sp>
+      <p:sp>
+        <p:nvSpPr>
+          <p:cNvPr id="29" name="Text 27"/>
+          <p:cNvSpPr/>
+          <p:nvPr/>
+        </p:nvSpPr>
+        <p:spPr>
+          <a:xfrm>
+            <a:off x="8138160" y="5440680"/>
+            <a:ext cx="3383280" cy="365760"/>
+          </a:xfrm>
+          <a:prstGeom prst="rect">
+            <a:avLst/>
+          </a:prstGeom>
+          <a:noFill/>
+          <a:ln/>
+        </p:spPr>
+        <p:txBody>
+          <a:bodyPr wrap="square" lIns="0" tIns="0" rIns="0" bIns="0" rtlCol="0" anchor="ctr"/>
           <a:lstStyle/>
           <a:p>
             <a:pPr indent="0" marL="0">
               <a:lnSpc>
-                <a:spcPct val="118000"/>
+                <a:spcPct val="115000"/>
               </a:lnSpc>
               <a:buNone/>
             </a:pPr>
             <a:r>
-              <a:rPr lang="en-US" sz="1000" dirty="0">
-                <a:solidFill>
-                  <a:srgbClr val="3C4560"/>
-                </a:solidFill>
-                <a:latin typeface="Calibri" pitchFamily="34" charset="0"/>
-                <a:ea typeface="Calibri" pitchFamily="34" charset="-122"/>
-                <a:cs typeface="Calibri" pitchFamily="34" charset="-120"/>
-              </a:rPr>
-              <a:t>All 6 centroid variants load and populate the channel correctly</a:t>
-            </a:r>
-            <a:endParaRPr lang="en-US" sz="1000" dirty="0"/>
-          </a:p>
-        </p:txBody>
-      </p:sp>
-      <p:sp>
-        <p:nvSpPr>
-          <p:cNvPr id="28" name="Shape 26"/>
-          <p:cNvSpPr/>
-          <p:nvPr/>
-        </p:nvSpPr>
-        <p:spPr>
-          <a:xfrm>
-            <a:off x="6537960" y="4937760"/>
-            <a:ext cx="73152" cy="73152"/>
-          </a:xfrm>
-          <a:prstGeom prst="ellipse">
-            <a:avLst/>
-          </a:prstGeom>
-          <a:solidFill>
-            <a:srgbClr val="C9A227"/>
-          </a:solidFill>
-          <a:ln/>
-        </p:spPr>
-      </p:sp>
-      <p:sp>
-        <p:nvSpPr>
-          <p:cNvPr id="29" name="Text 27"/>
-          <p:cNvSpPr/>
-          <p:nvPr/>
-        </p:nvSpPr>
-        <p:spPr>
-          <a:xfrm>
-            <a:off x="6720840" y="4882896"/>
-            <a:ext cx="4526280" cy="548640"/>
-          </a:xfrm>
-          <a:prstGeom prst="rect">
-            <a:avLst/>
-          </a:prstGeom>
-          <a:noFill/>
-          <a:ln/>
-        </p:spPr>
-        <p:txBody>
-          <a:bodyPr wrap="square" lIns="0" tIns="0" rIns="0" bIns="0" rtlCol="0" anchor="t"/>
-          <a:lstStyle/>
-          <a:p>
-            <a:pPr indent="0" marL="0">
-              <a:lnSpc>
-                <a:spcPct val="118000"/>
-              </a:lnSpc>
-              <a:buNone/>
-            </a:pPr>
-            <a:r>
-              <a:rPr lang="en-US" sz="1000" dirty="0">
-                <a:solidFill>
-                  <a:srgbClr val="3C4560"/>
-                </a:solidFill>
-                <a:latin typeface="Calibri" pitchFamily="34" charset="0"/>
-                <a:ea typeface="Calibri" pitchFamily="34" charset="-122"/>
-                <a:cs typeface="Calibri" pitchFamily="34" charset="-120"/>
-              </a:rPr>
-              <a:t>Render produces a non-trivial PNG file (size-checked)</a:t>
-            </a:r>
-            <a:endParaRPr lang="en-US" sz="1000" dirty="0"/>
+              <a:rPr lang="en-US" sz="950" dirty="0">
+                <a:solidFill>
+                  <a:srgbClr val="AEB9D6"/>
+                </a:solidFill>
+                <a:latin typeface="Calibri" pitchFamily="34" charset="0"/>
+                <a:ea typeface="Calibri" pitchFamily="34" charset="-122"/>
+                <a:cs typeface="Calibri" pitchFamily="34" charset="-120"/>
+              </a:rPr>
+              <a:t>legacy socket relay (optional, not in v6 flow)</a:t>
+            </a:r>
+            <a:endParaRPr lang="en-US" sz="950" dirty="0"/>
           </a:p>
         </p:txBody>
       </p:sp>
@@ -14464,7 +15527,7 @@
                 <a:ea typeface="Calibri" pitchFamily="34" charset="-122"/>
                 <a:cs typeface="Calibri" pitchFamily="34" charset="-120"/>
               </a:rPr>
-              <a:t>9 / 11</a:t>
+              <a:t>9 / 12</a:t>
             </a:r>
             <a:endParaRPr lang="en-US" sz="900" dirty="0"/>
           </a:p>
